--- a/artifacts/presentation.pptx
+++ b/artifacts/presentation.pptx
@@ -2,33 +2,33 @@
 <file path=ppt/presentation.xml><?xml version="1.0" encoding="utf-8"?>
 <p:presentation xmlns:p="http://schemas.openxmlformats.org/presentationml/2006/main">
   <p:sldMasterIdLst>
-    <p:sldMasterId xmlns:r="http://schemas.openxmlformats.org/officeDocument/2006/relationships" id="2147483648" r:id="R59cb20e73813468c"/>
+    <p:sldMasterId xmlns:r="http://schemas.openxmlformats.org/officeDocument/2006/relationships" id="2147483648" r:id="R98ef870035fc42e4"/>
   </p:sldMasterIdLst>
   <p:notesMasterIdLst>
-    <p:notesMasterId xmlns:r="http://schemas.openxmlformats.org/officeDocument/2006/relationships" r:id="R09fc0654e89e4a5a"/>
+    <p:notesMasterId xmlns:r="http://schemas.openxmlformats.org/officeDocument/2006/relationships" r:id="R84c98e8b6bf5400a"/>
   </p:notesMasterIdLst>
   <p:sldIdLst>
-    <p:sldId xmlns:r="http://schemas.openxmlformats.org/officeDocument/2006/relationships" id="256" r:id="R6a080159137e4a1c"/>
-    <p:sldId xmlns:r="http://schemas.openxmlformats.org/officeDocument/2006/relationships" id="257" r:id="R880478f35a704c16"/>
-    <p:sldId xmlns:r="http://schemas.openxmlformats.org/officeDocument/2006/relationships" id="258" r:id="R72c731a36f29472a"/>
-    <p:sldId xmlns:r="http://schemas.openxmlformats.org/officeDocument/2006/relationships" id="259" r:id="R7ae723a585074e41"/>
-    <p:sldId xmlns:r="http://schemas.openxmlformats.org/officeDocument/2006/relationships" id="260" r:id="Rb9352c0671b7408a"/>
-    <p:sldId xmlns:r="http://schemas.openxmlformats.org/officeDocument/2006/relationships" id="261" r:id="Re6e56d56fbd24c33"/>
-    <p:sldId xmlns:r="http://schemas.openxmlformats.org/officeDocument/2006/relationships" id="262" r:id="R0a2e08d21f344332"/>
-    <p:sldId xmlns:r="http://schemas.openxmlformats.org/officeDocument/2006/relationships" id="263" r:id="Rffbb523b76df4e91"/>
-    <p:sldId xmlns:r="http://schemas.openxmlformats.org/officeDocument/2006/relationships" id="264" r:id="Ref275a85b9c541d8"/>
-    <p:sldId xmlns:r="http://schemas.openxmlformats.org/officeDocument/2006/relationships" id="265" r:id="R614815ccc21540aa"/>
-    <p:sldId xmlns:r="http://schemas.openxmlformats.org/officeDocument/2006/relationships" id="266" r:id="R2457af2416ce4f94"/>
-    <p:sldId xmlns:r="http://schemas.openxmlformats.org/officeDocument/2006/relationships" id="267" r:id="R2dc883cbbaa44b8f"/>
-    <p:sldId xmlns:r="http://schemas.openxmlformats.org/officeDocument/2006/relationships" id="268" r:id="R0658a4cc859c4674"/>
-    <p:sldId xmlns:r="http://schemas.openxmlformats.org/officeDocument/2006/relationships" id="269" r:id="Ra816dd2a400543dc"/>
-    <p:sldId xmlns:r="http://schemas.openxmlformats.org/officeDocument/2006/relationships" id="270" r:id="Rbc2d3d8d7dc0453f"/>
-    <p:sldId xmlns:r="http://schemas.openxmlformats.org/officeDocument/2006/relationships" id="271" r:id="Rc3c092dfc5c34612"/>
-    <p:sldId xmlns:r="http://schemas.openxmlformats.org/officeDocument/2006/relationships" id="272" r:id="Rab2bd860e9034aca"/>
-    <p:sldId xmlns:r="http://schemas.openxmlformats.org/officeDocument/2006/relationships" id="273" r:id="Ra5075bc316384ba4"/>
-    <p:sldId xmlns:r="http://schemas.openxmlformats.org/officeDocument/2006/relationships" id="274" r:id="Rbfd2dd8294584ff7"/>
-    <p:sldId xmlns:r="http://schemas.openxmlformats.org/officeDocument/2006/relationships" id="275" r:id="R2cdfdbd7d7be4915"/>
-    <p:sldId xmlns:r="http://schemas.openxmlformats.org/officeDocument/2006/relationships" id="276" r:id="Rb0b75cf708f043fc"/>
+    <p:sldId xmlns:r="http://schemas.openxmlformats.org/officeDocument/2006/relationships" id="256" r:id="Rf8ebda1a42bb48c9"/>
+    <p:sldId xmlns:r="http://schemas.openxmlformats.org/officeDocument/2006/relationships" id="257" r:id="Re7b84f4af578402b"/>
+    <p:sldId xmlns:r="http://schemas.openxmlformats.org/officeDocument/2006/relationships" id="258" r:id="R2cbf895420fa4e90"/>
+    <p:sldId xmlns:r="http://schemas.openxmlformats.org/officeDocument/2006/relationships" id="259" r:id="Rdad5bd3d1c9f44b0"/>
+    <p:sldId xmlns:r="http://schemas.openxmlformats.org/officeDocument/2006/relationships" id="260" r:id="R78f5f5132bf84cf0"/>
+    <p:sldId xmlns:r="http://schemas.openxmlformats.org/officeDocument/2006/relationships" id="261" r:id="R36af2381c15645ca"/>
+    <p:sldId xmlns:r="http://schemas.openxmlformats.org/officeDocument/2006/relationships" id="262" r:id="R47c65a55e0614c37"/>
+    <p:sldId xmlns:r="http://schemas.openxmlformats.org/officeDocument/2006/relationships" id="263" r:id="Rdd3fe14dc3d04130"/>
+    <p:sldId xmlns:r="http://schemas.openxmlformats.org/officeDocument/2006/relationships" id="264" r:id="R3addeb948c4e42f5"/>
+    <p:sldId xmlns:r="http://schemas.openxmlformats.org/officeDocument/2006/relationships" id="265" r:id="Rfddbf0e01d3240f4"/>
+    <p:sldId xmlns:r="http://schemas.openxmlformats.org/officeDocument/2006/relationships" id="266" r:id="R2814f1d58d934808"/>
+    <p:sldId xmlns:r="http://schemas.openxmlformats.org/officeDocument/2006/relationships" id="267" r:id="Rdad4fb2045ca4e99"/>
+    <p:sldId xmlns:r="http://schemas.openxmlformats.org/officeDocument/2006/relationships" id="268" r:id="Rc605a90195f64f12"/>
+    <p:sldId xmlns:r="http://schemas.openxmlformats.org/officeDocument/2006/relationships" id="269" r:id="R79aa823696b04154"/>
+    <p:sldId xmlns:r="http://schemas.openxmlformats.org/officeDocument/2006/relationships" id="270" r:id="Rddd47e7d64724d1a"/>
+    <p:sldId xmlns:r="http://schemas.openxmlformats.org/officeDocument/2006/relationships" id="271" r:id="R14d80aee8ef34f89"/>
+    <p:sldId xmlns:r="http://schemas.openxmlformats.org/officeDocument/2006/relationships" id="272" r:id="Rf26f2e712d5f4c01"/>
+    <p:sldId xmlns:r="http://schemas.openxmlformats.org/officeDocument/2006/relationships" id="273" r:id="Re2ecdbac0a6646f5"/>
+    <p:sldId xmlns:r="http://schemas.openxmlformats.org/officeDocument/2006/relationships" id="274" r:id="Rfdeb7863339c4d6c"/>
+    <p:sldId xmlns:r="http://schemas.openxmlformats.org/officeDocument/2006/relationships" id="275" r:id="Rc9233dc61f8b421e"/>
+    <p:sldId xmlns:r="http://schemas.openxmlformats.org/officeDocument/2006/relationships" id="276" r:id="R96c53e52a6b441be"/>
   </p:sldIdLst>
   <p:sldSz cx="12192000" cy="6858000"/>
   <p:notesSz cx="6858000" cy="9144000"/>
@@ -1582,7 +1582,7 @@
           <a:lstStyle xmlns:a="http://schemas.openxmlformats.org/drawingml/2006/main"/>
           <a:p xmlns:a="http://schemas.openxmlformats.org/drawingml/2006/main">
             <a:r>
-              <a:t>Sources: reports/foundation_expansion_review/fullpanel_summary.csv/fullpanel_matched_predictions.parquet; same60700pairs full eligiblepanel, 2031/2031/2029/2023MO. Earlier251MOtable is superseded here. MainfullcohortselectedMAE932/1272/1371/1321 in report; This table and grouped-bar chart use the full matched panel. Bar control is the minimum MAE of the three Prophet variants separately at each horizon, including disabled at h12 (2906) instead of fixed profile (2989). directHGBh12 onlyfallback excluded. Covariate rowchronos2_profile notgroupedmodel; separate grouped2177to1589sourcefoundation_covariate_review. WithinMO R2pooledSSE overwithinactualvariation, notmeanlocalR2, notYoYR2. h12 denominator0, no R2.</a:t>
+              <a:t>Sources: reports/foundation_expansion_review/fullpanel_summary.csv/fullpanel_matched_predictions.parquet; same60700pairs full eligiblepanel, 2031/2031/2029/2023MO. Earlier251MOtable is superseded here. MainfullcohortselectedMAE932/1272/1371/1321 in report; This table and grouped-bar chart use the full matched panel. Bar control is the fixed Prophet pooled profile at every horizon, matching slides2/6 and README; h12 control2989 and gain55.8percent. directHGBh12 onlyfallback excluded. Covariate rowchronos2_profile notgroupedmodel; separate grouped2177to1589sourcefoundation_covariate_review. WithinMO R2pooledSSE overwithinactualvariation, notmeanlocalR2, notYoYR2. h12 denominator0, no R2.</a:t>
             </a:r>
           </a:p>
         </p:txBody>
@@ -1930,7 +1930,7 @@
   </p:cSld>
   <p:clrMap bg1="lt1" tx1="dk1" bg2="lt2" tx2="dk2" accent1="accent1" accent2="accent2" accent3="accent3" accent4="accent4" accent5="accent5" accent6="accent6" hlink="hlink" folHlink="folHlink"/>
   <p:sldLayoutIdLst>
-    <p:sldLayoutId xmlns:r="http://schemas.openxmlformats.org/officeDocument/2006/relationships" id="2147483649" r:id="R38a8eda69e2249bf"/>
+    <p:sldLayoutId xmlns:r="http://schemas.openxmlformats.org/officeDocument/2006/relationships" id="2147483649" r:id="R7673fcf828144471"/>
   </p:sldLayoutIdLst>
   <p:txStyles>
     <p:titleStyle>
@@ -2681,7 +2681,7 @@
           <c:idx val="1"/>
           <c:order val="1"/>
           <c:tx>
-            <c:v>Лучший Prophet</c:v>
+            <c:v>Prophet с профилем</c:v>
           </c:tx>
           <c:spPr>
             <a:solidFill xmlns:a="http://schemas.openxmlformats.org/drawingml/2006/main">
@@ -2819,7 +2819,7 @@
                         <a:ea typeface="Noto Sans"/>
                         <a:cs typeface="Noto Sans"/>
                       </a:rPr>
-                      <a:t>2 906</a:t>
+                      <a:t>2 989</a:t>
                     </a:r>
                   </a:p>
                 </c:rich>
@@ -2882,7 +2882,7 @@
                   <c:v>1916.648</c:v>
                 </c:pt>
                 <c:pt idx="3">
-                  <c:v>2905.799</c:v>
+                  <c:v>2989.26</c:v>
                 </c:pt>
               </c:numCache>
             </c:numRef>
@@ -5775,7 +5775,7 @@
           <p:cNvPr id="12" name="">
             <a:extLst xmlns:a="http://schemas.openxmlformats.org/drawingml/2006/main">
               <a:ext uri="{FF2B5EF4-FFF2-40B4-BE49-F238E27FC236}">
-                <a16:creationId xmlns:a16="http://schemas.microsoft.com/office/drawing/2014/main" id="{D2BC9502-882E-400C-ACDB-B25FE7C413FB}"/>
+                <a16:creationId xmlns:a16="http://schemas.microsoft.com/office/drawing/2014/main" id="{48F6DDF0-A114-4F9B-8AF0-2522D670A296}"/>
               </a:ext>
             </a:extLst>
           </p:cNvPr>
@@ -5855,7 +5855,7 @@
           <p:cNvPr id="2" name="">
             <a:extLst xmlns:a="http://schemas.openxmlformats.org/drawingml/2006/main">
               <a:ext uri="{FF2B5EF4-FFF2-40B4-BE49-F238E27FC236}">
-                <a16:creationId xmlns:a16="http://schemas.microsoft.com/office/drawing/2014/main" id="{1694A96F-64DA-40CB-BE50-AF888D76E32F}"/>
+                <a16:creationId xmlns:a16="http://schemas.microsoft.com/office/drawing/2014/main" id="{1D7A3F92-A3FF-4A9D-B6AE-F9AA1C61BF1F}"/>
               </a:ext>
             </a:extLst>
           </p:cNvPr>
@@ -5912,7 +5912,7 @@
           <p:cNvPr id="3" name="">
             <a:extLst xmlns:a="http://schemas.openxmlformats.org/drawingml/2006/main">
               <a:ext uri="{FF2B5EF4-FFF2-40B4-BE49-F238E27FC236}">
-                <a16:creationId xmlns:a16="http://schemas.microsoft.com/office/drawing/2014/main" id="{1E40E393-D8EF-4738-A693-97D442D529D5}"/>
+                <a16:creationId xmlns:a16="http://schemas.microsoft.com/office/drawing/2014/main" id="{2A52DD71-BDFF-4776-BFD2-A6768ADDCD99}"/>
               </a:ext>
             </a:extLst>
           </p:cNvPr>
@@ -5969,7 +5969,7 @@
           <p:cNvPr id="4" name="">
             <a:extLst xmlns:a="http://schemas.openxmlformats.org/drawingml/2006/main">
               <a:ext uri="{FF2B5EF4-FFF2-40B4-BE49-F238E27FC236}">
-                <a16:creationId xmlns:a16="http://schemas.microsoft.com/office/drawing/2014/main" id="{F1F49271-1947-40D8-9942-0342DC0C46AC}"/>
+                <a16:creationId xmlns:a16="http://schemas.microsoft.com/office/drawing/2014/main" id="{1EB0C12A-2880-476A-BF52-5F8CD4D4EDA5}"/>
               </a:ext>
             </a:extLst>
           </p:cNvPr>
@@ -6026,7 +6026,7 @@
           <p:cNvPr id="5" name="">
             <a:extLst xmlns:a="http://schemas.openxmlformats.org/drawingml/2006/main">
               <a:ext uri="{FF2B5EF4-FFF2-40B4-BE49-F238E27FC236}">
-                <a16:creationId xmlns:a16="http://schemas.microsoft.com/office/drawing/2014/main" id="{B44CC1EE-DB27-4375-9D67-1CC6EFE37FF8}"/>
+                <a16:creationId xmlns:a16="http://schemas.microsoft.com/office/drawing/2014/main" id="{98AA101B-E527-42AC-ADDD-9FCBF8B20287}"/>
               </a:ext>
             </a:extLst>
           </p:cNvPr>
@@ -6083,7 +6083,7 @@
           <p:cNvPr id="6" name="">
             <a:extLst xmlns:a="http://schemas.openxmlformats.org/drawingml/2006/main">
               <a:ext uri="{FF2B5EF4-FFF2-40B4-BE49-F238E27FC236}">
-                <a16:creationId xmlns:a16="http://schemas.microsoft.com/office/drawing/2014/main" id="{7615CB8F-5C7F-469D-ACEE-6027D233A4D9}"/>
+                <a16:creationId xmlns:a16="http://schemas.microsoft.com/office/drawing/2014/main" id="{BFBC08D5-0EF1-4288-B213-13B7D1E871BF}"/>
               </a:ext>
             </a:extLst>
           </p:cNvPr>
@@ -6163,7 +6163,7 @@
           <p:cNvPr id="7" name="">
             <a:extLst xmlns:a="http://schemas.openxmlformats.org/drawingml/2006/main">
               <a:ext uri="{FF2B5EF4-FFF2-40B4-BE49-F238E27FC236}">
-                <a16:creationId xmlns:a16="http://schemas.microsoft.com/office/drawing/2014/main" id="{6F1F746B-C1C7-472F-A708-B6FEE35D15A1}"/>
+                <a16:creationId xmlns:a16="http://schemas.microsoft.com/office/drawing/2014/main" id="{8791ADD8-AC4E-48A4-937C-278861AA2D8E}"/>
               </a:ext>
             </a:extLst>
           </p:cNvPr>
@@ -6209,7 +6209,7 @@
                 <a:latin typeface="Noto Sans"/>
                 <a:ea typeface="Noto Sans"/>
                 <a:cs typeface="Noto Sans"/>
-                <a:hlinkClick xmlns:r="http://schemas.openxmlformats.org/officeDocument/2006/relationships" r:id="R3da645c196bb461d"/>
+                <a:hlinkClick xmlns:r="http://schemas.openxmlformats.org/officeDocument/2006/relationships" r:id="Rc46484955b9447b8"/>
               </a:rPr>
               <a:t>github.com/NikitaMeshDS/sberindex-task2</a:t>
             </a:r>
@@ -6221,7 +6221,7 @@
           <p:cNvPr id="8" name="">
             <a:extLst xmlns:a="http://schemas.openxmlformats.org/drawingml/2006/main">
               <a:ext uri="{FF2B5EF4-FFF2-40B4-BE49-F238E27FC236}">
-                <a16:creationId xmlns:a16="http://schemas.microsoft.com/office/drawing/2014/main" id="{58B9927C-0C2F-4DA5-B216-131CEC9D4B3E}"/>
+                <a16:creationId xmlns:a16="http://schemas.microsoft.com/office/drawing/2014/main" id="{5841C003-AA78-4855-9884-54313B6F3F29}"/>
               </a:ext>
             </a:extLst>
           </p:cNvPr>
@@ -6267,7 +6267,7 @@
                 <a:latin typeface="Noto Sans"/>
                 <a:ea typeface="Noto Sans"/>
                 <a:cs typeface="Noto Sans"/>
-                <a:hlinkClick xmlns:r="http://schemas.openxmlformats.org/officeDocument/2006/relationships" r:id="R0f2c5e177e37467e"/>
+                <a:hlinkClick xmlns:r="http://schemas.openxmlformats.org/officeDocument/2006/relationships" r:id="R4ccbbe2cfd60433f"/>
               </a:rPr>
               <a:t>nikitameshds.github.io/sberindex-task2</a:t>
             </a:r>
@@ -6283,7 +6283,7 @@
           <p:nvPr/>
         </p:nvPicPr>
         <p:blipFill>
-          <a:blip xmlns:r="http://schemas.openxmlformats.org/officeDocument/2006/relationships" xmlns:a="http://schemas.openxmlformats.org/drawingml/2006/main" r:embed="R241e595257f744bf"/>
+          <a:blip xmlns:r="http://schemas.openxmlformats.org/officeDocument/2006/relationships" xmlns:a="http://schemas.openxmlformats.org/drawingml/2006/main" r:embed="R2caf6fc97860496d"/>
           <a:stretch xmlns:a="http://schemas.openxmlformats.org/drawingml/2006/main"/>
         </p:blipFill>
         <p:spPr>
@@ -6301,7 +6301,7 @@
           <p:cNvPr id="10" name="">
             <a:extLst xmlns:a="http://schemas.openxmlformats.org/drawingml/2006/main">
               <a:ext uri="{FF2B5EF4-FFF2-40B4-BE49-F238E27FC236}">
-                <a16:creationId xmlns:a16="http://schemas.microsoft.com/office/drawing/2014/main" id="{917B3310-253E-4BC0-87B7-FC2AE0B34310}"/>
+                <a16:creationId xmlns:a16="http://schemas.microsoft.com/office/drawing/2014/main" id="{81F62DF4-55FE-4DE3-834E-328D9F70B752}"/>
               </a:ext>
             </a:extLst>
           </p:cNvPr>
@@ -6358,7 +6358,7 @@
           <p:cNvPr id="11" name="">
             <a:extLst xmlns:a="http://schemas.openxmlformats.org/drawingml/2006/main">
               <a:ext uri="{FF2B5EF4-FFF2-40B4-BE49-F238E27FC236}">
-                <a16:creationId xmlns:a16="http://schemas.microsoft.com/office/drawing/2014/main" id="{6ED6DFE6-C489-4C1D-A235-8A36AA367873}"/>
+                <a16:creationId xmlns:a16="http://schemas.microsoft.com/office/drawing/2014/main" id="{45E6FCAA-8FA9-4139-B558-09F58C81AA8D}"/>
               </a:ext>
             </a:extLst>
           </p:cNvPr>
@@ -6413,7 +6413,7 @@
     </p:spTree>
     <p:extLst>
       <p:ext uri="{BB962C8B-B14F-4D97-AF65-F5344CB8AC3E}">
-        <p14:creationId xmlns:p14="http://schemas.microsoft.com/office/powerpoint/2010/main" val="26586559"/>
+        <p14:creationId xmlns:p14="http://schemas.microsoft.com/office/powerpoint/2010/main" val="423088871"/>
       </p:ext>
     </p:extLst>
   </p:cSld>
@@ -6444,7 +6444,7 @@
           <p:cNvPr id="6" name="">
             <a:extLst xmlns:a="http://schemas.openxmlformats.org/drawingml/2006/main">
               <a:ext uri="{FF2B5EF4-FFF2-40B4-BE49-F238E27FC236}">
-                <a16:creationId xmlns:a16="http://schemas.microsoft.com/office/drawing/2014/main" id="{5EB0ECCD-4983-42D6-BB63-6B2574954660}"/>
+                <a16:creationId xmlns:a16="http://schemas.microsoft.com/office/drawing/2014/main" id="{CC17F88F-0C50-481F-8F4A-39382648C72F}"/>
               </a:ext>
             </a:extLst>
           </p:cNvPr>
@@ -6501,7 +6501,7 @@
           <p:cNvPr id="2" name="">
             <a:extLst xmlns:a="http://schemas.openxmlformats.org/drawingml/2006/main">
               <a:ext uri="{FF2B5EF4-FFF2-40B4-BE49-F238E27FC236}">
-                <a16:creationId xmlns:a16="http://schemas.microsoft.com/office/drawing/2014/main" id="{4F04D7C5-DC06-4825-8690-0E7A373BFF96}"/>
+                <a16:creationId xmlns:a16="http://schemas.microsoft.com/office/drawing/2014/main" id="{F936730E-A1B1-48CA-B171-E63FD15891AD}"/>
               </a:ext>
             </a:extLst>
           </p:cNvPr>
@@ -6558,7 +6558,7 @@
           <p:cNvPr id="3" name="">
             <a:extLst xmlns:a="http://schemas.openxmlformats.org/drawingml/2006/main">
               <a:ext uri="{FF2B5EF4-FFF2-40B4-BE49-F238E27FC236}">
-                <a16:creationId xmlns:a16="http://schemas.microsoft.com/office/drawing/2014/main" id="{58DC75CF-F8EB-403A-A313-E472222DAB26}"/>
+                <a16:creationId xmlns:a16="http://schemas.microsoft.com/office/drawing/2014/main" id="{605D8F6B-358C-4204-90AB-1EB8D7EAE0C7}"/>
               </a:ext>
             </a:extLst>
           </p:cNvPr>
@@ -7982,7 +7982,7 @@
           <p:cNvPr id="5" name="">
             <a:extLst xmlns:a="http://schemas.openxmlformats.org/drawingml/2006/main">
               <a:ext uri="{FF2B5EF4-FFF2-40B4-BE49-F238E27FC236}">
-                <a16:creationId xmlns:a16="http://schemas.microsoft.com/office/drawing/2014/main" id="{5BAA9258-5F78-4326-A895-66A302EE3FFC}"/>
+                <a16:creationId xmlns:a16="http://schemas.microsoft.com/office/drawing/2014/main" id="{F94A898A-138B-4F19-BF19-25CBB49086B6}"/>
               </a:ext>
             </a:extLst>
           </p:cNvPr>
@@ -8060,7 +8060,7 @@
     </p:spTree>
     <p:extLst>
       <p:ext uri="{BB962C8B-B14F-4D97-AF65-F5344CB8AC3E}">
-        <p14:creationId xmlns:p14="http://schemas.microsoft.com/office/powerpoint/2010/main" val="1059606114"/>
+        <p14:creationId xmlns:p14="http://schemas.microsoft.com/office/powerpoint/2010/main" val="468173533"/>
       </p:ext>
     </p:extLst>
   </p:cSld>
@@ -8091,7 +8091,7 @@
           <p:cNvPr id="8" name="">
             <a:extLst xmlns:a="http://schemas.openxmlformats.org/drawingml/2006/main">
               <a:ext uri="{FF2B5EF4-FFF2-40B4-BE49-F238E27FC236}">
-                <a16:creationId xmlns:a16="http://schemas.microsoft.com/office/drawing/2014/main" id="{2F6E93E4-3A05-4147-896D-94E6615A4AFB}"/>
+                <a16:creationId xmlns:a16="http://schemas.microsoft.com/office/drawing/2014/main" id="{0F44F672-0BC0-4511-89D2-62AA6C9FD19F}"/>
               </a:ext>
             </a:extLst>
           </p:cNvPr>
@@ -8148,7 +8148,7 @@
           <p:cNvPr id="2" name="">
             <a:extLst xmlns:a="http://schemas.openxmlformats.org/drawingml/2006/main">
               <a:ext uri="{FF2B5EF4-FFF2-40B4-BE49-F238E27FC236}">
-                <a16:creationId xmlns:a16="http://schemas.microsoft.com/office/drawing/2014/main" id="{ADD0CA2C-0657-4974-97EC-AFB55746314C}"/>
+                <a16:creationId xmlns:a16="http://schemas.microsoft.com/office/drawing/2014/main" id="{32D4F2D1-B9C4-4CAA-B25F-D127D42D0A98}"/>
               </a:ext>
             </a:extLst>
           </p:cNvPr>
@@ -8205,7 +8205,7 @@
           <p:cNvPr id="3" name="">
             <a:extLst xmlns:a="http://schemas.openxmlformats.org/drawingml/2006/main">
               <a:ext uri="{FF2B5EF4-FFF2-40B4-BE49-F238E27FC236}">
-                <a16:creationId xmlns:a16="http://schemas.microsoft.com/office/drawing/2014/main" id="{51089756-6954-4099-BD14-9040D5FB8C25}"/>
+                <a16:creationId xmlns:a16="http://schemas.microsoft.com/office/drawing/2014/main" id="{E4C59730-0F36-4127-AD0E-B662C4349F70}"/>
               </a:ext>
             </a:extLst>
           </p:cNvPr>
@@ -8262,7 +8262,7 @@
           <p:cNvPr id="4" name="">
             <a:extLst xmlns:a="http://schemas.openxmlformats.org/drawingml/2006/main">
               <a:ext uri="{FF2B5EF4-FFF2-40B4-BE49-F238E27FC236}">
-                <a16:creationId xmlns:a16="http://schemas.microsoft.com/office/drawing/2014/main" id="{EDF1D3A9-952F-46B3-B522-21E39CEE07C9}"/>
+                <a16:creationId xmlns:a16="http://schemas.microsoft.com/office/drawing/2014/main" id="{E818C236-D4BD-46B8-AA68-0E09DD798FA6}"/>
               </a:ext>
             </a:extLst>
           </p:cNvPr>
@@ -8319,7 +8319,7 @@
           <p:cNvPr id="5" name="">
             <a:extLst xmlns:a="http://schemas.openxmlformats.org/drawingml/2006/main">
               <a:ext uri="{FF2B5EF4-FFF2-40B4-BE49-F238E27FC236}">
-                <a16:creationId xmlns:a16="http://schemas.microsoft.com/office/drawing/2014/main" id="{4A2CD585-7343-4CF7-93E3-02A51F8910BA}"/>
+                <a16:creationId xmlns:a16="http://schemas.microsoft.com/office/drawing/2014/main" id="{DF236B98-315B-4E11-BB46-EA9317BAE068}"/>
               </a:ext>
             </a:extLst>
           </p:cNvPr>
@@ -8483,7 +8483,7 @@
           <p:cNvPr id="6" name="">
             <a:extLst xmlns:a="http://schemas.openxmlformats.org/drawingml/2006/main">
               <a:ext uri="{FF2B5EF4-FFF2-40B4-BE49-F238E27FC236}">
-                <a16:creationId xmlns:a16="http://schemas.microsoft.com/office/drawing/2014/main" id="{3B58F9BB-0B47-46E1-9078-B00A64E20B93}"/>
+                <a16:creationId xmlns:a16="http://schemas.microsoft.com/office/drawing/2014/main" id="{A12583D1-B50A-4810-981C-8DDD225C2F05}"/>
               </a:ext>
             </a:extLst>
           </p:cNvPr>
@@ -8540,7 +8540,7 @@
           <p:cNvPr id="7" name="">
             <a:extLst xmlns:a="http://schemas.openxmlformats.org/drawingml/2006/main">
               <a:ext uri="{FF2B5EF4-FFF2-40B4-BE49-F238E27FC236}">
-                <a16:creationId xmlns:a16="http://schemas.microsoft.com/office/drawing/2014/main" id="{F51EDBA5-3046-4E51-B787-5CCBE0CB9287}"/>
+                <a16:creationId xmlns:a16="http://schemas.microsoft.com/office/drawing/2014/main" id="{8340414C-7EEC-4048-A25D-8A7F5F0A7C02}"/>
               </a:ext>
             </a:extLst>
           </p:cNvPr>
@@ -8702,7 +8702,7 @@
     </p:spTree>
     <p:extLst>
       <p:ext uri="{BB962C8B-B14F-4D97-AF65-F5344CB8AC3E}">
-        <p14:creationId xmlns:p14="http://schemas.microsoft.com/office/powerpoint/2010/main" val="1389702177"/>
+        <p14:creationId xmlns:p14="http://schemas.microsoft.com/office/powerpoint/2010/main" val="420725632"/>
       </p:ext>
     </p:extLst>
   </p:cSld>
@@ -8733,7 +8733,7 @@
           <p:cNvPr id="16" name="">
             <a:extLst xmlns:a="http://schemas.openxmlformats.org/drawingml/2006/main">
               <a:ext uri="{FF2B5EF4-FFF2-40B4-BE49-F238E27FC236}">
-                <a16:creationId xmlns:a16="http://schemas.microsoft.com/office/drawing/2014/main" id="{D2D0EAD5-AC4B-4947-A716-6086642B4686}"/>
+                <a16:creationId xmlns:a16="http://schemas.microsoft.com/office/drawing/2014/main" id="{D0F35E62-B833-4321-AE78-ABC144C103AA}"/>
               </a:ext>
             </a:extLst>
           </p:cNvPr>
@@ -8790,7 +8790,7 @@
           <p:cNvPr id="2" name="">
             <a:extLst xmlns:a="http://schemas.openxmlformats.org/drawingml/2006/main">
               <a:ext uri="{FF2B5EF4-FFF2-40B4-BE49-F238E27FC236}">
-                <a16:creationId xmlns:a16="http://schemas.microsoft.com/office/drawing/2014/main" id="{F24BB519-D773-45B9-A40C-CDF68EF70E89}"/>
+                <a16:creationId xmlns:a16="http://schemas.microsoft.com/office/drawing/2014/main" id="{112FA9C3-8EC9-41A7-8569-58661E42B2FC}"/>
               </a:ext>
             </a:extLst>
           </p:cNvPr>
@@ -8847,7 +8847,7 @@
           <p:cNvPr id="3" name="">
             <a:extLst xmlns:a="http://schemas.openxmlformats.org/drawingml/2006/main">
               <a:ext uri="{FF2B5EF4-FFF2-40B4-BE49-F238E27FC236}">
-                <a16:creationId xmlns:a16="http://schemas.microsoft.com/office/drawing/2014/main" id="{D92FCF46-EF91-4D13-9B10-954FF789CD44}"/>
+                <a16:creationId xmlns:a16="http://schemas.microsoft.com/office/drawing/2014/main" id="{6D671369-DF27-45C7-8F9E-038E377FD754}"/>
               </a:ext>
             </a:extLst>
           </p:cNvPr>
@@ -8904,7 +8904,7 @@
           <p:cNvPr id="4" name="">
             <a:extLst xmlns:a="http://schemas.openxmlformats.org/drawingml/2006/main">
               <a:ext uri="{FF2B5EF4-FFF2-40B4-BE49-F238E27FC236}">
-                <a16:creationId xmlns:a16="http://schemas.microsoft.com/office/drawing/2014/main" id="{5AD00206-1A92-4457-8D43-7860B80B5890}"/>
+                <a16:creationId xmlns:a16="http://schemas.microsoft.com/office/drawing/2014/main" id="{FC5A8028-D58B-4280-9334-B141925E1CC0}"/>
               </a:ext>
             </a:extLst>
           </p:cNvPr>
@@ -8961,7 +8961,7 @@
           <p:cNvPr id="5" name="">
             <a:extLst xmlns:a="http://schemas.openxmlformats.org/drawingml/2006/main">
               <a:ext uri="{FF2B5EF4-FFF2-40B4-BE49-F238E27FC236}">
-                <a16:creationId xmlns:a16="http://schemas.microsoft.com/office/drawing/2014/main" id="{F1428185-B17C-435E-BBDF-914168489BBE}"/>
+                <a16:creationId xmlns:a16="http://schemas.microsoft.com/office/drawing/2014/main" id="{CEBFB54C-C0B5-4507-A2CE-0D728EF62013}"/>
               </a:ext>
             </a:extLst>
           </p:cNvPr>
@@ -9025,7 +9025,7 @@
         </p:xfrm>
         <a:graphic xmlns:a="http://schemas.openxmlformats.org/drawingml/2006/main">
           <a:graphicData uri="http://schemas.openxmlformats.org/drawingml/2006/chart">
-            <c:chart xmlns:r="http://schemas.openxmlformats.org/officeDocument/2006/relationships" xmlns:c="http://schemas.openxmlformats.org/drawingml/2006/chart" r:id="R1df8ec3a6c8c4bec"/>
+            <c:chart xmlns:r="http://schemas.openxmlformats.org/officeDocument/2006/relationships" xmlns:c="http://schemas.openxmlformats.org/drawingml/2006/chart" r:id="R314967f50148430d"/>
           </a:graphicData>
         </a:graphic>
       </p:graphicFrame>
@@ -9034,7 +9034,7 @@
           <p:cNvPr id="7" name="">
             <a:extLst xmlns:a="http://schemas.openxmlformats.org/drawingml/2006/main">
               <a:ext uri="{FF2B5EF4-FFF2-40B4-BE49-F238E27FC236}">
-                <a16:creationId xmlns:a16="http://schemas.microsoft.com/office/drawing/2014/main" id="{6F3BAAFE-E625-4D48-9AC8-E7AE226B2BC7}"/>
+                <a16:creationId xmlns:a16="http://schemas.microsoft.com/office/drawing/2014/main" id="{F4F649ED-20F2-4CD1-A661-629DB0256364}"/>
               </a:ext>
             </a:extLst>
           </p:cNvPr>
@@ -9091,7 +9091,7 @@
           <p:cNvPr id="8" name="">
             <a:extLst xmlns:a="http://schemas.openxmlformats.org/drawingml/2006/main">
               <a:ext uri="{FF2B5EF4-FFF2-40B4-BE49-F238E27FC236}">
-                <a16:creationId xmlns:a16="http://schemas.microsoft.com/office/drawing/2014/main" id="{87B19E78-8EAD-4C78-A8F5-1759F7E4C03A}"/>
+                <a16:creationId xmlns:a16="http://schemas.microsoft.com/office/drawing/2014/main" id="{70A9F71C-83CC-4333-8CF3-F4BDAA092758}"/>
               </a:ext>
             </a:extLst>
           </p:cNvPr>
@@ -9155,7 +9155,7 @@
         </p:xfrm>
         <a:graphic xmlns:a="http://schemas.openxmlformats.org/drawingml/2006/main">
           <a:graphicData uri="http://schemas.openxmlformats.org/drawingml/2006/chart">
-            <c:chart xmlns:r="http://schemas.openxmlformats.org/officeDocument/2006/relationships" xmlns:c="http://schemas.openxmlformats.org/drawingml/2006/chart" r:id="R4adbdb617bcd468c"/>
+            <c:chart xmlns:r="http://schemas.openxmlformats.org/officeDocument/2006/relationships" xmlns:c="http://schemas.openxmlformats.org/drawingml/2006/chart" r:id="R7c8b7646f8344f30"/>
           </a:graphicData>
         </a:graphic>
       </p:graphicFrame>
@@ -9164,7 +9164,7 @@
           <p:cNvPr id="10" name="">
             <a:extLst xmlns:a="http://schemas.openxmlformats.org/drawingml/2006/main">
               <a:ext uri="{FF2B5EF4-FFF2-40B4-BE49-F238E27FC236}">
-                <a16:creationId xmlns:a16="http://schemas.microsoft.com/office/drawing/2014/main" id="{A9102223-6376-46AD-B9AD-9CE4CB4CE72E}"/>
+                <a16:creationId xmlns:a16="http://schemas.microsoft.com/office/drawing/2014/main" id="{4F0C7815-1F64-455C-BC12-188AAA05EE14}"/>
               </a:ext>
             </a:extLst>
           </p:cNvPr>
@@ -9221,7 +9221,7 @@
           <p:cNvPr id="11" name="">
             <a:extLst xmlns:a="http://schemas.openxmlformats.org/drawingml/2006/main">
               <a:ext uri="{FF2B5EF4-FFF2-40B4-BE49-F238E27FC236}">
-                <a16:creationId xmlns:a16="http://schemas.microsoft.com/office/drawing/2014/main" id="{6C4110E2-09C0-4EFD-896B-72183D930712}"/>
+                <a16:creationId xmlns:a16="http://schemas.microsoft.com/office/drawing/2014/main" id="{54CE2ED1-CAF1-4D6A-84BB-E4BB44CECB48}"/>
               </a:ext>
             </a:extLst>
           </p:cNvPr>
@@ -9285,7 +9285,7 @@
         </p:xfrm>
         <a:graphic xmlns:a="http://schemas.openxmlformats.org/drawingml/2006/main">
           <a:graphicData uri="http://schemas.openxmlformats.org/drawingml/2006/chart">
-            <c:chart xmlns:r="http://schemas.openxmlformats.org/officeDocument/2006/relationships" xmlns:c="http://schemas.openxmlformats.org/drawingml/2006/chart" r:id="Rca50398878014bd3"/>
+            <c:chart xmlns:r="http://schemas.openxmlformats.org/officeDocument/2006/relationships" xmlns:c="http://schemas.openxmlformats.org/drawingml/2006/chart" r:id="Re028683c8ac14231"/>
           </a:graphicData>
         </a:graphic>
       </p:graphicFrame>
@@ -9294,7 +9294,7 @@
           <p:cNvPr id="13" name="">
             <a:extLst xmlns:a="http://schemas.openxmlformats.org/drawingml/2006/main">
               <a:ext uri="{FF2B5EF4-FFF2-40B4-BE49-F238E27FC236}">
-                <a16:creationId xmlns:a16="http://schemas.microsoft.com/office/drawing/2014/main" id="{A4A0ACE5-34CA-4F5A-B64A-1A51F386737A}"/>
+                <a16:creationId xmlns:a16="http://schemas.microsoft.com/office/drawing/2014/main" id="{5846937D-9F72-489B-AE57-6BAA713B0589}"/>
               </a:ext>
             </a:extLst>
           </p:cNvPr>
@@ -9324,7 +9324,7 @@
           <p:cNvPr id="14" name="">
             <a:extLst xmlns:a="http://schemas.openxmlformats.org/drawingml/2006/main">
               <a:ext uri="{FF2B5EF4-FFF2-40B4-BE49-F238E27FC236}">
-                <a16:creationId xmlns:a16="http://schemas.microsoft.com/office/drawing/2014/main" id="{4E57F157-CCB4-4FF9-9858-E7C5057B2BBD}"/>
+                <a16:creationId xmlns:a16="http://schemas.microsoft.com/office/drawing/2014/main" id="{52268BF4-39A1-412F-9745-AEEAEEA3107C}"/>
               </a:ext>
             </a:extLst>
           </p:cNvPr>
@@ -9381,7 +9381,7 @@
           <p:cNvPr id="15" name="">
             <a:extLst xmlns:a="http://schemas.openxmlformats.org/drawingml/2006/main">
               <a:ext uri="{FF2B5EF4-FFF2-40B4-BE49-F238E27FC236}">
-                <a16:creationId xmlns:a16="http://schemas.microsoft.com/office/drawing/2014/main" id="{E129CDD3-1D30-4CC1-A19E-0DCE8154EF48}"/>
+                <a16:creationId xmlns:a16="http://schemas.microsoft.com/office/drawing/2014/main" id="{32CDC249-02B6-44B5-9B8E-3B8450FFCF34}"/>
               </a:ext>
             </a:extLst>
           </p:cNvPr>
@@ -9436,7 +9436,7 @@
     </p:spTree>
     <p:extLst>
       <p:ext uri="{BB962C8B-B14F-4D97-AF65-F5344CB8AC3E}">
-        <p14:creationId xmlns:p14="http://schemas.microsoft.com/office/powerpoint/2010/main" val="2140975395"/>
+        <p14:creationId xmlns:p14="http://schemas.microsoft.com/office/powerpoint/2010/main" val="653710919"/>
       </p:ext>
     </p:extLst>
   </p:cSld>
@@ -9467,7 +9467,7 @@
           <p:cNvPr id="8" name="">
             <a:extLst xmlns:a="http://schemas.openxmlformats.org/drawingml/2006/main">
               <a:ext uri="{FF2B5EF4-FFF2-40B4-BE49-F238E27FC236}">
-                <a16:creationId xmlns:a16="http://schemas.microsoft.com/office/drawing/2014/main" id="{51F20E0E-2FA9-41C4-85AA-74F3BB4A58B1}"/>
+                <a16:creationId xmlns:a16="http://schemas.microsoft.com/office/drawing/2014/main" id="{CBC2E274-A030-4AF4-A8F5-92630DDD7C14}"/>
               </a:ext>
             </a:extLst>
           </p:cNvPr>
@@ -9524,7 +9524,7 @@
           <p:cNvPr id="2" name="">
             <a:extLst xmlns:a="http://schemas.openxmlformats.org/drawingml/2006/main">
               <a:ext uri="{FF2B5EF4-FFF2-40B4-BE49-F238E27FC236}">
-                <a16:creationId xmlns:a16="http://schemas.microsoft.com/office/drawing/2014/main" id="{65C91F21-E162-4173-9954-53E9FEF16D63}"/>
+                <a16:creationId xmlns:a16="http://schemas.microsoft.com/office/drawing/2014/main" id="{7391AF1C-9402-4A82-93D9-D43F03850039}"/>
               </a:ext>
             </a:extLst>
           </p:cNvPr>
@@ -9581,7 +9581,7 @@
           <p:cNvPr id="3" name="">
             <a:extLst xmlns:a="http://schemas.openxmlformats.org/drawingml/2006/main">
               <a:ext uri="{FF2B5EF4-FFF2-40B4-BE49-F238E27FC236}">
-                <a16:creationId xmlns:a16="http://schemas.microsoft.com/office/drawing/2014/main" id="{7376BC35-9A0D-45AB-9A0B-4B5A7CE428EE}"/>
+                <a16:creationId xmlns:a16="http://schemas.microsoft.com/office/drawing/2014/main" id="{E2D598AF-3A20-4346-8178-F31D9CCDF8E4}"/>
               </a:ext>
             </a:extLst>
           </p:cNvPr>
@@ -9645,7 +9645,7 @@
         </p:xfrm>
         <a:graphic xmlns:a="http://schemas.openxmlformats.org/drawingml/2006/main">
           <a:graphicData uri="http://schemas.openxmlformats.org/drawingml/2006/chart">
-            <c:chart xmlns:r="http://schemas.openxmlformats.org/officeDocument/2006/relationships" xmlns:c="http://schemas.openxmlformats.org/drawingml/2006/chart" r:id="Re9be293dfe3d4979"/>
+            <c:chart xmlns:r="http://schemas.openxmlformats.org/officeDocument/2006/relationships" xmlns:c="http://schemas.openxmlformats.org/drawingml/2006/chart" r:id="R29dd2b272e194129"/>
           </a:graphicData>
         </a:graphic>
       </p:graphicFrame>
@@ -10560,7 +10560,7 @@
           <p:cNvPr id="6" name="">
             <a:extLst xmlns:a="http://schemas.openxmlformats.org/drawingml/2006/main">
               <a:ext uri="{FF2B5EF4-FFF2-40B4-BE49-F238E27FC236}">
-                <a16:creationId xmlns:a16="http://schemas.microsoft.com/office/drawing/2014/main" id="{F61DA409-D24A-4395-B098-596343E42C05}"/>
+                <a16:creationId xmlns:a16="http://schemas.microsoft.com/office/drawing/2014/main" id="{EFC18465-8519-4FE5-924F-7332EE646C1F}"/>
               </a:ext>
             </a:extLst>
           </p:cNvPr>
@@ -10617,7 +10617,7 @@
           <p:cNvPr id="7" name="">
             <a:extLst xmlns:a="http://schemas.openxmlformats.org/drawingml/2006/main">
               <a:ext uri="{FF2B5EF4-FFF2-40B4-BE49-F238E27FC236}">
-                <a16:creationId xmlns:a16="http://schemas.microsoft.com/office/drawing/2014/main" id="{53BEC9D8-E7C1-4865-8864-02686829A095}"/>
+                <a16:creationId xmlns:a16="http://schemas.microsoft.com/office/drawing/2014/main" id="{6F1D9C5E-E513-4A71-AE86-8A2534A867F1}"/>
               </a:ext>
             </a:extLst>
           </p:cNvPr>
@@ -10695,7 +10695,7 @@
     </p:spTree>
     <p:extLst>
       <p:ext uri="{BB962C8B-B14F-4D97-AF65-F5344CB8AC3E}">
-        <p14:creationId xmlns:p14="http://schemas.microsoft.com/office/powerpoint/2010/main" val="730259725"/>
+        <p14:creationId xmlns:p14="http://schemas.microsoft.com/office/powerpoint/2010/main" val="1030765572"/>
       </p:ext>
     </p:extLst>
   </p:cSld>
@@ -10726,7 +10726,7 @@
           <p:cNvPr id="7" name="">
             <a:extLst xmlns:a="http://schemas.openxmlformats.org/drawingml/2006/main">
               <a:ext uri="{FF2B5EF4-FFF2-40B4-BE49-F238E27FC236}">
-                <a16:creationId xmlns:a16="http://schemas.microsoft.com/office/drawing/2014/main" id="{D77844E3-7A96-457E-9A72-7384BFDFFFCC}"/>
+                <a16:creationId xmlns:a16="http://schemas.microsoft.com/office/drawing/2014/main" id="{D2CB547E-BD97-4CFC-BEB8-A85F5D7A0F05}"/>
               </a:ext>
             </a:extLst>
           </p:cNvPr>
@@ -10783,7 +10783,7 @@
           <p:cNvPr id="2" name="">
             <a:extLst xmlns:a="http://schemas.openxmlformats.org/drawingml/2006/main">
               <a:ext uri="{FF2B5EF4-FFF2-40B4-BE49-F238E27FC236}">
-                <a16:creationId xmlns:a16="http://schemas.microsoft.com/office/drawing/2014/main" id="{EE459B12-53E5-45BE-B057-3EB842C49E1D}"/>
+                <a16:creationId xmlns:a16="http://schemas.microsoft.com/office/drawing/2014/main" id="{CBCA2758-905B-4BEB-8EC1-70F69F3C86C6}"/>
               </a:ext>
             </a:extLst>
           </p:cNvPr>
@@ -10840,7 +10840,7 @@
           <p:cNvPr id="3" name="">
             <a:extLst xmlns:a="http://schemas.openxmlformats.org/drawingml/2006/main">
               <a:ext uri="{FF2B5EF4-FFF2-40B4-BE49-F238E27FC236}">
-                <a16:creationId xmlns:a16="http://schemas.microsoft.com/office/drawing/2014/main" id="{56346796-6855-4134-A142-A0A806A15D33}"/>
+                <a16:creationId xmlns:a16="http://schemas.microsoft.com/office/drawing/2014/main" id="{3827D382-9009-46BB-9797-BF169998723E}"/>
               </a:ext>
             </a:extLst>
           </p:cNvPr>
@@ -10901,7 +10901,7 @@
           <p:nvPr/>
         </p:nvPicPr>
         <p:blipFill>
-          <a:blip xmlns:r="http://schemas.openxmlformats.org/officeDocument/2006/relationships" xmlns:a="http://schemas.openxmlformats.org/drawingml/2006/main" r:embed="R0f9c29864032476f"/>
+          <a:blip xmlns:r="http://schemas.openxmlformats.org/officeDocument/2006/relationships" xmlns:a="http://schemas.openxmlformats.org/drawingml/2006/main" r:embed="R72e9089b437e4e9c"/>
           <a:stretch xmlns:a="http://schemas.openxmlformats.org/drawingml/2006/main"/>
         </p:blipFill>
         <p:spPr>
@@ -10919,7 +10919,7 @@
           <p:cNvPr id="5" name="">
             <a:extLst xmlns:a="http://schemas.openxmlformats.org/drawingml/2006/main">
               <a:ext uri="{FF2B5EF4-FFF2-40B4-BE49-F238E27FC236}">
-                <a16:creationId xmlns:a16="http://schemas.microsoft.com/office/drawing/2014/main" id="{E637DC90-8D6C-4D26-8097-C1CC08495EDC}"/>
+                <a16:creationId xmlns:a16="http://schemas.microsoft.com/office/drawing/2014/main" id="{D0D02F92-EC33-4CEF-A951-01DBB51E3151}"/>
               </a:ext>
             </a:extLst>
           </p:cNvPr>
@@ -11315,7 +11315,7 @@
     </p:spTree>
     <p:extLst>
       <p:ext uri="{BB962C8B-B14F-4D97-AF65-F5344CB8AC3E}">
-        <p14:creationId xmlns:p14="http://schemas.microsoft.com/office/powerpoint/2010/main" val="475497104"/>
+        <p14:creationId xmlns:p14="http://schemas.microsoft.com/office/powerpoint/2010/main" val="345825310"/>
       </p:ext>
     </p:extLst>
   </p:cSld>
@@ -11346,7 +11346,7 @@
           <p:cNvPr id="6" name="">
             <a:extLst xmlns:a="http://schemas.openxmlformats.org/drawingml/2006/main">
               <a:ext uri="{FF2B5EF4-FFF2-40B4-BE49-F238E27FC236}">
-                <a16:creationId xmlns:a16="http://schemas.microsoft.com/office/drawing/2014/main" id="{25FC4A4D-7571-438C-BE56-AE4B037D5326}"/>
+                <a16:creationId xmlns:a16="http://schemas.microsoft.com/office/drawing/2014/main" id="{39A80459-A078-4B38-8656-382071D04A7B}"/>
               </a:ext>
             </a:extLst>
           </p:cNvPr>
@@ -11403,7 +11403,7 @@
           <p:cNvPr id="2" name="">
             <a:extLst xmlns:a="http://schemas.openxmlformats.org/drawingml/2006/main">
               <a:ext uri="{FF2B5EF4-FFF2-40B4-BE49-F238E27FC236}">
-                <a16:creationId xmlns:a16="http://schemas.microsoft.com/office/drawing/2014/main" id="{797B628F-BD8D-4D59-B0D1-62688F1D1639}"/>
+                <a16:creationId xmlns:a16="http://schemas.microsoft.com/office/drawing/2014/main" id="{F75D930F-F7EA-46DC-B213-010DE913D231}"/>
               </a:ext>
             </a:extLst>
           </p:cNvPr>
@@ -11460,7 +11460,7 @@
           <p:cNvPr id="3" name="">
             <a:extLst xmlns:a="http://schemas.openxmlformats.org/drawingml/2006/main">
               <a:ext uri="{FF2B5EF4-FFF2-40B4-BE49-F238E27FC236}">
-                <a16:creationId xmlns:a16="http://schemas.microsoft.com/office/drawing/2014/main" id="{948D1DFB-6ED6-460A-BF31-32FEAD5FECAE}"/>
+                <a16:creationId xmlns:a16="http://schemas.microsoft.com/office/drawing/2014/main" id="{B48F074B-EC8E-4FAF-8779-E02C05373F0B}"/>
               </a:ext>
             </a:extLst>
           </p:cNvPr>
@@ -11524,7 +11524,7 @@
         </p:xfrm>
         <a:graphic xmlns:a="http://schemas.openxmlformats.org/drawingml/2006/main">
           <a:graphicData uri="http://schemas.openxmlformats.org/drawingml/2006/chart">
-            <c:chart xmlns:r="http://schemas.openxmlformats.org/officeDocument/2006/relationships" xmlns:c="http://schemas.openxmlformats.org/drawingml/2006/chart" r:id="R60991e05db2b4b77"/>
+            <c:chart xmlns:r="http://schemas.openxmlformats.org/officeDocument/2006/relationships" xmlns:c="http://schemas.openxmlformats.org/drawingml/2006/chart" r:id="Ra086b668a28e4ddc"/>
           </a:graphicData>
         </a:graphic>
       </p:graphicFrame>
@@ -11533,7 +11533,7 @@
           <p:cNvPr id="5" name="">
             <a:extLst xmlns:a="http://schemas.openxmlformats.org/drawingml/2006/main">
               <a:ext uri="{FF2B5EF4-FFF2-40B4-BE49-F238E27FC236}">
-                <a16:creationId xmlns:a16="http://schemas.microsoft.com/office/drawing/2014/main" id="{9621850F-9BE4-4B2E-8122-506844DB018A}"/>
+                <a16:creationId xmlns:a16="http://schemas.microsoft.com/office/drawing/2014/main" id="{C22B09C1-CAD3-4EC2-B643-1BE3F683EF9E}"/>
               </a:ext>
             </a:extLst>
           </p:cNvPr>
@@ -11611,7 +11611,7 @@
     </p:spTree>
     <p:extLst>
       <p:ext uri="{BB962C8B-B14F-4D97-AF65-F5344CB8AC3E}">
-        <p14:creationId xmlns:p14="http://schemas.microsoft.com/office/powerpoint/2010/main" val="1962985092"/>
+        <p14:creationId xmlns:p14="http://schemas.microsoft.com/office/powerpoint/2010/main" val="60407636"/>
       </p:ext>
     </p:extLst>
   </p:cSld>
@@ -11642,7 +11642,7 @@
           <p:cNvPr id="20" name="">
             <a:extLst xmlns:a="http://schemas.openxmlformats.org/drawingml/2006/main">
               <a:ext uri="{FF2B5EF4-FFF2-40B4-BE49-F238E27FC236}">
-                <a16:creationId xmlns:a16="http://schemas.microsoft.com/office/drawing/2014/main" id="{D6C79CC6-37C0-4A3D-A6F9-FBF36C0011F1}"/>
+                <a16:creationId xmlns:a16="http://schemas.microsoft.com/office/drawing/2014/main" id="{8655E1CA-E3A3-4328-848B-01E147220C52}"/>
               </a:ext>
             </a:extLst>
           </p:cNvPr>
@@ -11699,7 +11699,7 @@
           <p:cNvPr id="2" name="">
             <a:extLst xmlns:a="http://schemas.openxmlformats.org/drawingml/2006/main">
               <a:ext uri="{FF2B5EF4-FFF2-40B4-BE49-F238E27FC236}">
-                <a16:creationId xmlns:a16="http://schemas.microsoft.com/office/drawing/2014/main" id="{D1CAB4D8-AED9-4754-B2D5-B67AE8DD2EFF}"/>
+                <a16:creationId xmlns:a16="http://schemas.microsoft.com/office/drawing/2014/main" id="{08B9406D-327E-4455-917A-E12405B2C6B4}"/>
               </a:ext>
             </a:extLst>
           </p:cNvPr>
@@ -11756,7 +11756,7 @@
           <p:cNvPr id="3" name="">
             <a:extLst xmlns:a="http://schemas.openxmlformats.org/drawingml/2006/main">
               <a:ext uri="{FF2B5EF4-FFF2-40B4-BE49-F238E27FC236}">
-                <a16:creationId xmlns:a16="http://schemas.microsoft.com/office/drawing/2014/main" id="{9208AE32-1436-4217-B9BD-DF53E735A32C}"/>
+                <a16:creationId xmlns:a16="http://schemas.microsoft.com/office/drawing/2014/main" id="{25A07B72-DF5F-4B7E-A559-CD60FFA1E82C}"/>
               </a:ext>
             </a:extLst>
           </p:cNvPr>
@@ -11813,7 +11813,7 @@
           <p:cNvPr id="4" name="">
             <a:extLst xmlns:a="http://schemas.openxmlformats.org/drawingml/2006/main">
               <a:ext uri="{FF2B5EF4-FFF2-40B4-BE49-F238E27FC236}">
-                <a16:creationId xmlns:a16="http://schemas.microsoft.com/office/drawing/2014/main" id="{7CBE7CB3-C609-4BAD-9BBB-819C3842FB27}"/>
+                <a16:creationId xmlns:a16="http://schemas.microsoft.com/office/drawing/2014/main" id="{BA1D0940-5357-4CCA-98BB-A789A464FD76}"/>
               </a:ext>
             </a:extLst>
           </p:cNvPr>
@@ -11897,7 +11897,7 @@
           <p:cNvPr id="5" name="">
             <a:extLst xmlns:a="http://schemas.openxmlformats.org/drawingml/2006/main">
               <a:ext uri="{FF2B5EF4-FFF2-40B4-BE49-F238E27FC236}">
-                <a16:creationId xmlns:a16="http://schemas.microsoft.com/office/drawing/2014/main" id="{A127BFAA-D26F-4469-BE71-4B3D8EDF1D69}"/>
+                <a16:creationId xmlns:a16="http://schemas.microsoft.com/office/drawing/2014/main" id="{C1234AD8-86F0-4800-9959-18DE63F04188}"/>
               </a:ext>
             </a:extLst>
           </p:cNvPr>
@@ -11927,7 +11927,7 @@
           <p:cNvPr id="6" name="">
             <a:extLst xmlns:a="http://schemas.openxmlformats.org/drawingml/2006/main">
               <a:ext uri="{FF2B5EF4-FFF2-40B4-BE49-F238E27FC236}">
-                <a16:creationId xmlns:a16="http://schemas.microsoft.com/office/drawing/2014/main" id="{3F4E04B8-8081-487D-B06F-7F347A427151}"/>
+                <a16:creationId xmlns:a16="http://schemas.microsoft.com/office/drawing/2014/main" id="{D437E956-C411-4BFE-AC4F-8DD15FB755B7}"/>
               </a:ext>
             </a:extLst>
           </p:cNvPr>
@@ -12011,7 +12011,7 @@
           <p:cNvPr id="7" name="">
             <a:extLst xmlns:a="http://schemas.openxmlformats.org/drawingml/2006/main">
               <a:ext uri="{FF2B5EF4-FFF2-40B4-BE49-F238E27FC236}">
-                <a16:creationId xmlns:a16="http://schemas.microsoft.com/office/drawing/2014/main" id="{032EFA28-1145-4F25-98CB-87FB3C20873D}"/>
+                <a16:creationId xmlns:a16="http://schemas.microsoft.com/office/drawing/2014/main" id="{88AEB2AA-223F-4955-8990-94ACA0CFED4C}"/>
               </a:ext>
             </a:extLst>
           </p:cNvPr>
@@ -12041,7 +12041,7 @@
           <p:cNvPr id="8" name="">
             <a:extLst xmlns:a="http://schemas.openxmlformats.org/drawingml/2006/main">
               <a:ext uri="{FF2B5EF4-FFF2-40B4-BE49-F238E27FC236}">
-                <a16:creationId xmlns:a16="http://schemas.microsoft.com/office/drawing/2014/main" id="{DEAE3695-BC69-42D4-9558-F0C66511F33B}"/>
+                <a16:creationId xmlns:a16="http://schemas.microsoft.com/office/drawing/2014/main" id="{648F3521-07F7-4D07-85F2-8192E66373AF}"/>
               </a:ext>
             </a:extLst>
           </p:cNvPr>
@@ -12125,7 +12125,7 @@
           <p:cNvPr id="9" name="">
             <a:extLst xmlns:a="http://schemas.openxmlformats.org/drawingml/2006/main">
               <a:ext uri="{FF2B5EF4-FFF2-40B4-BE49-F238E27FC236}">
-                <a16:creationId xmlns:a16="http://schemas.microsoft.com/office/drawing/2014/main" id="{A0870624-F081-41F4-A7FA-D403FF434B4A}"/>
+                <a16:creationId xmlns:a16="http://schemas.microsoft.com/office/drawing/2014/main" id="{E905984E-3ED9-4E86-BB3B-908AC3D83629}"/>
               </a:ext>
             </a:extLst>
           </p:cNvPr>
@@ -12155,7 +12155,7 @@
           <p:cNvPr id="10" name="">
             <a:extLst xmlns:a="http://schemas.openxmlformats.org/drawingml/2006/main">
               <a:ext uri="{FF2B5EF4-FFF2-40B4-BE49-F238E27FC236}">
-                <a16:creationId xmlns:a16="http://schemas.microsoft.com/office/drawing/2014/main" id="{145AD593-2D6E-4B3D-8C0F-E0875FE29CA2}"/>
+                <a16:creationId xmlns:a16="http://schemas.microsoft.com/office/drawing/2014/main" id="{32781812-4557-46CF-8149-D5A8C61C0015}"/>
               </a:ext>
             </a:extLst>
           </p:cNvPr>
@@ -12239,7 +12239,7 @@
           <p:cNvPr id="11" name="">
             <a:extLst xmlns:a="http://schemas.openxmlformats.org/drawingml/2006/main">
               <a:ext uri="{FF2B5EF4-FFF2-40B4-BE49-F238E27FC236}">
-                <a16:creationId xmlns:a16="http://schemas.microsoft.com/office/drawing/2014/main" id="{CFA0D8BE-3F4B-4709-976C-469ED01EF02B}"/>
+                <a16:creationId xmlns:a16="http://schemas.microsoft.com/office/drawing/2014/main" id="{22029622-EDB8-4FC4-9981-C888347020AD}"/>
               </a:ext>
             </a:extLst>
           </p:cNvPr>
@@ -12269,7 +12269,7 @@
           <p:cNvPr id="12" name="">
             <a:extLst xmlns:a="http://schemas.openxmlformats.org/drawingml/2006/main">
               <a:ext uri="{FF2B5EF4-FFF2-40B4-BE49-F238E27FC236}">
-                <a16:creationId xmlns:a16="http://schemas.microsoft.com/office/drawing/2014/main" id="{1FE77E10-2570-4177-BBD4-0BCC31F0AFD5}"/>
+                <a16:creationId xmlns:a16="http://schemas.microsoft.com/office/drawing/2014/main" id="{74DBC4A9-F6E9-441D-B62B-C5C884AAFAF3}"/>
               </a:ext>
             </a:extLst>
           </p:cNvPr>
@@ -12353,7 +12353,7 @@
           <p:cNvPr id="13" name="">
             <a:extLst xmlns:a="http://schemas.openxmlformats.org/drawingml/2006/main">
               <a:ext uri="{FF2B5EF4-FFF2-40B4-BE49-F238E27FC236}">
-                <a16:creationId xmlns:a16="http://schemas.microsoft.com/office/drawing/2014/main" id="{9F1AC702-63FA-444F-94FC-C8D2F7204E1D}"/>
+                <a16:creationId xmlns:a16="http://schemas.microsoft.com/office/drawing/2014/main" id="{07A1C8E5-E636-41E9-9A2F-5E0BC02E6E12}"/>
               </a:ext>
             </a:extLst>
           </p:cNvPr>
@@ -12410,7 +12410,7 @@
           <p:cNvPr id="14" name="">
             <a:extLst xmlns:a="http://schemas.openxmlformats.org/drawingml/2006/main">
               <a:ext uri="{FF2B5EF4-FFF2-40B4-BE49-F238E27FC236}">
-                <a16:creationId xmlns:a16="http://schemas.microsoft.com/office/drawing/2014/main" id="{836EB8C4-2C56-45B9-BA37-21C8D7CE738B}"/>
+                <a16:creationId xmlns:a16="http://schemas.microsoft.com/office/drawing/2014/main" id="{5869FF54-E78F-423E-BCF8-BF5FE1C03333}"/>
               </a:ext>
             </a:extLst>
           </p:cNvPr>
@@ -12467,7 +12467,7 @@
           <p:cNvPr id="15" name="">
             <a:extLst xmlns:a="http://schemas.openxmlformats.org/drawingml/2006/main">
               <a:ext uri="{FF2B5EF4-FFF2-40B4-BE49-F238E27FC236}">
-                <a16:creationId xmlns:a16="http://schemas.microsoft.com/office/drawing/2014/main" id="{AB72FEAD-F3B5-4791-B120-2D86A41E46E5}"/>
+                <a16:creationId xmlns:a16="http://schemas.microsoft.com/office/drawing/2014/main" id="{5C836B25-A7EE-438B-90B9-9AA0C7341D67}"/>
               </a:ext>
             </a:extLst>
           </p:cNvPr>
@@ -12639,7 +12639,7 @@
           <p:cNvPr id="16" name="">
             <a:extLst xmlns:a="http://schemas.openxmlformats.org/drawingml/2006/main">
               <a:ext uri="{FF2B5EF4-FFF2-40B4-BE49-F238E27FC236}">
-                <a16:creationId xmlns:a16="http://schemas.microsoft.com/office/drawing/2014/main" id="{D2C6682B-D7AA-4217-9E88-0AAE2FE37189}"/>
+                <a16:creationId xmlns:a16="http://schemas.microsoft.com/office/drawing/2014/main" id="{8D6C9977-E076-42C6-9FAE-1F32D6399022}"/>
               </a:ext>
             </a:extLst>
           </p:cNvPr>
@@ -12696,7 +12696,7 @@
           <p:cNvPr id="17" name="">
             <a:extLst xmlns:a="http://schemas.openxmlformats.org/drawingml/2006/main">
               <a:ext uri="{FF2B5EF4-FFF2-40B4-BE49-F238E27FC236}">
-                <a16:creationId xmlns:a16="http://schemas.microsoft.com/office/drawing/2014/main" id="{3D81F8E1-BB8A-4D89-BF4A-CA73C225DB2E}"/>
+                <a16:creationId xmlns:a16="http://schemas.microsoft.com/office/drawing/2014/main" id="{0A0E3D7C-7988-4000-A31E-8BF847BC17CD}"/>
               </a:ext>
             </a:extLst>
           </p:cNvPr>
@@ -12845,7 +12845,7 @@
           <p:cNvPr id="18" name="">
             <a:extLst xmlns:a="http://schemas.openxmlformats.org/drawingml/2006/main">
               <a:ext uri="{FF2B5EF4-FFF2-40B4-BE49-F238E27FC236}">
-                <a16:creationId xmlns:a16="http://schemas.microsoft.com/office/drawing/2014/main" id="{2CB41325-3DEE-423B-A9A6-830E1AA0C70B}"/>
+                <a16:creationId xmlns:a16="http://schemas.microsoft.com/office/drawing/2014/main" id="{3EB5CAAA-FF65-49F6-947C-7DDF2D33A39F}"/>
               </a:ext>
             </a:extLst>
           </p:cNvPr>
@@ -12902,7 +12902,7 @@
           <p:cNvPr id="19" name="">
             <a:extLst xmlns:a="http://schemas.openxmlformats.org/drawingml/2006/main">
               <a:ext uri="{FF2B5EF4-FFF2-40B4-BE49-F238E27FC236}">
-                <a16:creationId xmlns:a16="http://schemas.microsoft.com/office/drawing/2014/main" id="{6CF6B053-F9CF-4CD4-8E42-F29E5B8E9AAA}"/>
+                <a16:creationId xmlns:a16="http://schemas.microsoft.com/office/drawing/2014/main" id="{0CC427DE-BA65-47AE-B81F-218A7B11C16C}"/>
               </a:ext>
             </a:extLst>
           </p:cNvPr>
@@ -12957,7 +12957,7 @@
     </p:spTree>
     <p:extLst>
       <p:ext uri="{BB962C8B-B14F-4D97-AF65-F5344CB8AC3E}">
-        <p14:creationId xmlns:p14="http://schemas.microsoft.com/office/powerpoint/2010/main" val="244062213"/>
+        <p14:creationId xmlns:p14="http://schemas.microsoft.com/office/powerpoint/2010/main" val="1820478969"/>
       </p:ext>
     </p:extLst>
   </p:cSld>
@@ -12988,7 +12988,7 @@
           <p:cNvPr id="16" name="">
             <a:extLst xmlns:a="http://schemas.openxmlformats.org/drawingml/2006/main">
               <a:ext uri="{FF2B5EF4-FFF2-40B4-BE49-F238E27FC236}">
-                <a16:creationId xmlns:a16="http://schemas.microsoft.com/office/drawing/2014/main" id="{C444AC3B-FA01-4286-A214-F4E564F19B97}"/>
+                <a16:creationId xmlns:a16="http://schemas.microsoft.com/office/drawing/2014/main" id="{3C7AAAB0-71ED-46C3-A093-FA0A7529395C}"/>
               </a:ext>
             </a:extLst>
           </p:cNvPr>
@@ -13045,7 +13045,7 @@
           <p:cNvPr id="2" name="">
             <a:extLst xmlns:a="http://schemas.openxmlformats.org/drawingml/2006/main">
               <a:ext uri="{FF2B5EF4-FFF2-40B4-BE49-F238E27FC236}">
-                <a16:creationId xmlns:a16="http://schemas.microsoft.com/office/drawing/2014/main" id="{8C2D687A-A95C-48DA-B835-251174FACC6A}"/>
+                <a16:creationId xmlns:a16="http://schemas.microsoft.com/office/drawing/2014/main" id="{28C131D7-5778-4B46-8F14-64E5CC89F837}"/>
               </a:ext>
             </a:extLst>
           </p:cNvPr>
@@ -13102,7 +13102,7 @@
           <p:cNvPr id="3" name="">
             <a:extLst xmlns:a="http://schemas.openxmlformats.org/drawingml/2006/main">
               <a:ext uri="{FF2B5EF4-FFF2-40B4-BE49-F238E27FC236}">
-                <a16:creationId xmlns:a16="http://schemas.microsoft.com/office/drawing/2014/main" id="{9C8F9AF4-1048-4C22-A85D-F18513A3346B}"/>
+                <a16:creationId xmlns:a16="http://schemas.microsoft.com/office/drawing/2014/main" id="{05751847-323E-4776-A7D2-172751ED3BDF}"/>
               </a:ext>
             </a:extLst>
           </p:cNvPr>
@@ -13159,7 +13159,7 @@
           <p:cNvPr id="4" name="">
             <a:extLst xmlns:a="http://schemas.openxmlformats.org/drawingml/2006/main">
               <a:ext uri="{FF2B5EF4-FFF2-40B4-BE49-F238E27FC236}">
-                <a16:creationId xmlns:a16="http://schemas.microsoft.com/office/drawing/2014/main" id="{867E47AE-764D-469F-9BCB-2658AB437545}"/>
+                <a16:creationId xmlns:a16="http://schemas.microsoft.com/office/drawing/2014/main" id="{C03599EF-0216-420E-87B3-287058E7FDEF}"/>
               </a:ext>
             </a:extLst>
           </p:cNvPr>
@@ -13243,7 +13243,7 @@
           <p:cNvPr id="5" name="">
             <a:extLst xmlns:a="http://schemas.openxmlformats.org/drawingml/2006/main">
               <a:ext uri="{FF2B5EF4-FFF2-40B4-BE49-F238E27FC236}">
-                <a16:creationId xmlns:a16="http://schemas.microsoft.com/office/drawing/2014/main" id="{7A817C4F-71BC-4D08-BFB9-263BC7CFFA86}"/>
+                <a16:creationId xmlns:a16="http://schemas.microsoft.com/office/drawing/2014/main" id="{7A341509-B507-4886-9C2F-A82F5C5994AB}"/>
               </a:ext>
             </a:extLst>
           </p:cNvPr>
@@ -13273,7 +13273,7 @@
           <p:cNvPr id="6" name="">
             <a:extLst xmlns:a="http://schemas.openxmlformats.org/drawingml/2006/main">
               <a:ext uri="{FF2B5EF4-FFF2-40B4-BE49-F238E27FC236}">
-                <a16:creationId xmlns:a16="http://schemas.microsoft.com/office/drawing/2014/main" id="{8B255CFB-CDA4-443E-BA22-85402995FDD0}"/>
+                <a16:creationId xmlns:a16="http://schemas.microsoft.com/office/drawing/2014/main" id="{AC929634-C010-4424-994D-7291175F9051}"/>
               </a:ext>
             </a:extLst>
           </p:cNvPr>
@@ -13357,7 +13357,7 @@
           <p:cNvPr id="7" name="">
             <a:extLst xmlns:a="http://schemas.openxmlformats.org/drawingml/2006/main">
               <a:ext uri="{FF2B5EF4-FFF2-40B4-BE49-F238E27FC236}">
-                <a16:creationId xmlns:a16="http://schemas.microsoft.com/office/drawing/2014/main" id="{7C1C9CFA-55B9-45BF-9977-80DF61363982}"/>
+                <a16:creationId xmlns:a16="http://schemas.microsoft.com/office/drawing/2014/main" id="{256CBFAF-267F-41CB-A029-807491504F90}"/>
               </a:ext>
             </a:extLst>
           </p:cNvPr>
@@ -13387,7 +13387,7 @@
           <p:cNvPr id="8" name="">
             <a:extLst xmlns:a="http://schemas.openxmlformats.org/drawingml/2006/main">
               <a:ext uri="{FF2B5EF4-FFF2-40B4-BE49-F238E27FC236}">
-                <a16:creationId xmlns:a16="http://schemas.microsoft.com/office/drawing/2014/main" id="{D8A1F677-A5FD-4B9F-9233-D7370A72E497}"/>
+                <a16:creationId xmlns:a16="http://schemas.microsoft.com/office/drawing/2014/main" id="{2E28B35D-E8CD-407E-AF42-8422DE8EE364}"/>
               </a:ext>
             </a:extLst>
           </p:cNvPr>
@@ -13471,7 +13471,7 @@
           <p:cNvPr id="9" name="">
             <a:extLst xmlns:a="http://schemas.openxmlformats.org/drawingml/2006/main">
               <a:ext uri="{FF2B5EF4-FFF2-40B4-BE49-F238E27FC236}">
-                <a16:creationId xmlns:a16="http://schemas.microsoft.com/office/drawing/2014/main" id="{3C662AA1-5705-4AAC-AE3C-ABFF28AD38BD}"/>
+                <a16:creationId xmlns:a16="http://schemas.microsoft.com/office/drawing/2014/main" id="{3EE10FFC-DEE6-4BC4-9C44-4E0D7D63DCD4}"/>
               </a:ext>
             </a:extLst>
           </p:cNvPr>
@@ -13501,7 +13501,7 @@
           <p:cNvPr id="10" name="">
             <a:extLst xmlns:a="http://schemas.openxmlformats.org/drawingml/2006/main">
               <a:ext uri="{FF2B5EF4-FFF2-40B4-BE49-F238E27FC236}">
-                <a16:creationId xmlns:a16="http://schemas.microsoft.com/office/drawing/2014/main" id="{602CDE52-6E7A-47DB-96AE-0ACD48E41B13}"/>
+                <a16:creationId xmlns:a16="http://schemas.microsoft.com/office/drawing/2014/main" id="{E81DA573-4F75-45A3-A079-950D4B7866B9}"/>
               </a:ext>
             </a:extLst>
           </p:cNvPr>
@@ -13585,7 +13585,7 @@
           <p:cNvPr id="11" name="">
             <a:extLst xmlns:a="http://schemas.openxmlformats.org/drawingml/2006/main">
               <a:ext uri="{FF2B5EF4-FFF2-40B4-BE49-F238E27FC236}">
-                <a16:creationId xmlns:a16="http://schemas.microsoft.com/office/drawing/2014/main" id="{93A89D4C-8185-4214-8921-01B7BF44139D}"/>
+                <a16:creationId xmlns:a16="http://schemas.microsoft.com/office/drawing/2014/main" id="{B6A65DF9-545D-4DEE-AE21-E7956F0215C6}"/>
               </a:ext>
             </a:extLst>
           </p:cNvPr>
@@ -13615,7 +13615,7 @@
           <p:cNvPr id="12" name="">
             <a:extLst xmlns:a="http://schemas.openxmlformats.org/drawingml/2006/main">
               <a:ext uri="{FF2B5EF4-FFF2-40B4-BE49-F238E27FC236}">
-                <a16:creationId xmlns:a16="http://schemas.microsoft.com/office/drawing/2014/main" id="{8C99AB67-1483-4B4C-BC07-EE9844DC2DC9}"/>
+                <a16:creationId xmlns:a16="http://schemas.microsoft.com/office/drawing/2014/main" id="{57DBBCDE-641A-44AF-B9D4-9C5B1B699FB7}"/>
               </a:ext>
             </a:extLst>
           </p:cNvPr>
@@ -13699,7 +13699,7 @@
           <p:cNvPr id="13" name="">
             <a:extLst xmlns:a="http://schemas.openxmlformats.org/drawingml/2006/main">
               <a:ext uri="{FF2B5EF4-FFF2-40B4-BE49-F238E27FC236}">
-                <a16:creationId xmlns:a16="http://schemas.microsoft.com/office/drawing/2014/main" id="{5D3ECB07-F1CD-45F8-BB2F-949E26A61464}"/>
+                <a16:creationId xmlns:a16="http://schemas.microsoft.com/office/drawing/2014/main" id="{6EAE27D5-28C3-4094-B520-AD49B250D140}"/>
               </a:ext>
             </a:extLst>
           </p:cNvPr>
@@ -13756,7 +13756,7 @@
           <p:cNvPr id="14" name="">
             <a:extLst xmlns:a="http://schemas.openxmlformats.org/drawingml/2006/main">
               <a:ext uri="{FF2B5EF4-FFF2-40B4-BE49-F238E27FC236}">
-                <a16:creationId xmlns:a16="http://schemas.microsoft.com/office/drawing/2014/main" id="{590896BC-7DA3-43A0-9152-5450B9D5FBE0}"/>
+                <a16:creationId xmlns:a16="http://schemas.microsoft.com/office/drawing/2014/main" id="{0D4CF290-FDBD-4508-8920-ACB1F6B2891F}"/>
               </a:ext>
             </a:extLst>
           </p:cNvPr>
@@ -13813,7 +13813,7 @@
           <p:cNvPr id="15" name="">
             <a:extLst xmlns:a="http://schemas.openxmlformats.org/drawingml/2006/main">
               <a:ext uri="{FF2B5EF4-FFF2-40B4-BE49-F238E27FC236}">
-                <a16:creationId xmlns:a16="http://schemas.microsoft.com/office/drawing/2014/main" id="{DB8197E3-B833-4DEB-9BD1-74642633CFA7}"/>
+                <a16:creationId xmlns:a16="http://schemas.microsoft.com/office/drawing/2014/main" id="{23EC6653-461B-40EF-86CC-3B8143DD04A8}"/>
               </a:ext>
             </a:extLst>
           </p:cNvPr>
@@ -13891,7 +13891,7 @@
     </p:spTree>
     <p:extLst>
       <p:ext uri="{BB962C8B-B14F-4D97-AF65-F5344CB8AC3E}">
-        <p14:creationId xmlns:p14="http://schemas.microsoft.com/office/powerpoint/2010/main" val="802223194"/>
+        <p14:creationId xmlns:p14="http://schemas.microsoft.com/office/powerpoint/2010/main" val="164389694"/>
       </p:ext>
     </p:extLst>
   </p:cSld>
@@ -13922,7 +13922,7 @@
           <p:cNvPr id="8" name="">
             <a:extLst xmlns:a="http://schemas.openxmlformats.org/drawingml/2006/main">
               <a:ext uri="{FF2B5EF4-FFF2-40B4-BE49-F238E27FC236}">
-                <a16:creationId xmlns:a16="http://schemas.microsoft.com/office/drawing/2014/main" id="{75600D97-4F39-4161-A6DF-1BF633A88A62}"/>
+                <a16:creationId xmlns:a16="http://schemas.microsoft.com/office/drawing/2014/main" id="{AED390F8-D446-4535-BE70-37860E443259}"/>
               </a:ext>
             </a:extLst>
           </p:cNvPr>
@@ -13979,7 +13979,7 @@
           <p:cNvPr id="2" name="">
             <a:extLst xmlns:a="http://schemas.openxmlformats.org/drawingml/2006/main">
               <a:ext uri="{FF2B5EF4-FFF2-40B4-BE49-F238E27FC236}">
-                <a16:creationId xmlns:a16="http://schemas.microsoft.com/office/drawing/2014/main" id="{ADC1D3A5-3F25-4DA5-AF84-69F5E3E8F9DC}"/>
+                <a16:creationId xmlns:a16="http://schemas.microsoft.com/office/drawing/2014/main" id="{D5601682-6D92-45F2-AFC4-A7572DEEDA30}"/>
               </a:ext>
             </a:extLst>
           </p:cNvPr>
@@ -14036,7 +14036,7 @@
           <p:cNvPr id="3" name="">
             <a:extLst xmlns:a="http://schemas.openxmlformats.org/drawingml/2006/main">
               <a:ext uri="{FF2B5EF4-FFF2-40B4-BE49-F238E27FC236}">
-                <a16:creationId xmlns:a16="http://schemas.microsoft.com/office/drawing/2014/main" id="{21CB0E3E-BAB1-43FC-9A00-09C22A43C391}"/>
+                <a16:creationId xmlns:a16="http://schemas.microsoft.com/office/drawing/2014/main" id="{685C25C0-5520-43E6-8617-A18403959F1C}"/>
               </a:ext>
             </a:extLst>
           </p:cNvPr>
@@ -14093,7 +14093,7 @@
           <p:cNvPr id="4" name="">
             <a:extLst xmlns:a="http://schemas.openxmlformats.org/drawingml/2006/main">
               <a:ext uri="{FF2B5EF4-FFF2-40B4-BE49-F238E27FC236}">
-                <a16:creationId xmlns:a16="http://schemas.microsoft.com/office/drawing/2014/main" id="{F227DF82-F9FD-443D-88D1-D5BCC33817BC}"/>
+                <a16:creationId xmlns:a16="http://schemas.microsoft.com/office/drawing/2014/main" id="{23A61DE9-8A92-40E4-B096-0E282C7D41F3}"/>
               </a:ext>
             </a:extLst>
           </p:cNvPr>
@@ -14395,7 +14395,7 @@
           <p:cNvPr id="6" name="">
             <a:extLst xmlns:a="http://schemas.openxmlformats.org/drawingml/2006/main">
               <a:ext uri="{FF2B5EF4-FFF2-40B4-BE49-F238E27FC236}">
-                <a16:creationId xmlns:a16="http://schemas.microsoft.com/office/drawing/2014/main" id="{2AC94CB7-EAF4-4AAC-8E33-A0D6AFCDA8C4}"/>
+                <a16:creationId xmlns:a16="http://schemas.microsoft.com/office/drawing/2014/main" id="{148FC13D-7D61-47DB-9DCD-BD067E447462}"/>
               </a:ext>
             </a:extLst>
           </p:cNvPr>
@@ -14475,7 +14475,7 @@
           <p:cNvPr id="7" name="">
             <a:extLst xmlns:a="http://schemas.openxmlformats.org/drawingml/2006/main">
               <a:ext uri="{FF2B5EF4-FFF2-40B4-BE49-F238E27FC236}">
-                <a16:creationId xmlns:a16="http://schemas.microsoft.com/office/drawing/2014/main" id="{36FB4D07-45A7-47C4-B04C-CA3AA90AA390}"/>
+                <a16:creationId xmlns:a16="http://schemas.microsoft.com/office/drawing/2014/main" id="{756CDCD8-8A46-49E9-B7D7-A44D2E03A4AC}"/>
               </a:ext>
             </a:extLst>
           </p:cNvPr>
@@ -14553,7 +14553,7 @@
     </p:spTree>
     <p:extLst>
       <p:ext uri="{BB962C8B-B14F-4D97-AF65-F5344CB8AC3E}">
-        <p14:creationId xmlns:p14="http://schemas.microsoft.com/office/powerpoint/2010/main" val="1933995683"/>
+        <p14:creationId xmlns:p14="http://schemas.microsoft.com/office/powerpoint/2010/main" val="2089340210"/>
       </p:ext>
     </p:extLst>
   </p:cSld>
@@ -14584,7 +14584,7 @@
           <p:cNvPr id="7" name="">
             <a:extLst xmlns:a="http://schemas.openxmlformats.org/drawingml/2006/main">
               <a:ext uri="{FF2B5EF4-FFF2-40B4-BE49-F238E27FC236}">
-                <a16:creationId xmlns:a16="http://schemas.microsoft.com/office/drawing/2014/main" id="{73BCB76C-7AA4-474B-B874-6F01D5F2D316}"/>
+                <a16:creationId xmlns:a16="http://schemas.microsoft.com/office/drawing/2014/main" id="{737E31AB-FB1F-4F63-9E4E-EB82E9DC3949}"/>
               </a:ext>
             </a:extLst>
           </p:cNvPr>
@@ -14641,7 +14641,7 @@
           <p:cNvPr id="2" name="">
             <a:extLst xmlns:a="http://schemas.openxmlformats.org/drawingml/2006/main">
               <a:ext uri="{FF2B5EF4-FFF2-40B4-BE49-F238E27FC236}">
-                <a16:creationId xmlns:a16="http://schemas.microsoft.com/office/drawing/2014/main" id="{443DDA62-9309-4F82-A866-AAF6DABCC6D1}"/>
+                <a16:creationId xmlns:a16="http://schemas.microsoft.com/office/drawing/2014/main" id="{219BB540-7445-466E-8E38-B9034DD9C825}"/>
               </a:ext>
             </a:extLst>
           </p:cNvPr>
@@ -14698,7 +14698,7 @@
           <p:cNvPr id="3" name="">
             <a:extLst xmlns:a="http://schemas.openxmlformats.org/drawingml/2006/main">
               <a:ext uri="{FF2B5EF4-FFF2-40B4-BE49-F238E27FC236}">
-                <a16:creationId xmlns:a16="http://schemas.microsoft.com/office/drawing/2014/main" id="{A12C429C-CAC9-4E90-93D7-CB93AE05ABB9}"/>
+                <a16:creationId xmlns:a16="http://schemas.microsoft.com/office/drawing/2014/main" id="{85913E72-7BCC-491B-8083-252A7E785641}"/>
               </a:ext>
             </a:extLst>
           </p:cNvPr>
@@ -14755,7 +14755,7 @@
           <p:cNvPr id="4" name="">
             <a:extLst xmlns:a="http://schemas.openxmlformats.org/drawingml/2006/main">
               <a:ext uri="{FF2B5EF4-FFF2-40B4-BE49-F238E27FC236}">
-                <a16:creationId xmlns:a16="http://schemas.microsoft.com/office/drawing/2014/main" id="{D74A7DB8-2138-4507-B140-3328429C45B1}"/>
+                <a16:creationId xmlns:a16="http://schemas.microsoft.com/office/drawing/2014/main" id="{1B8935AC-0370-479A-B4CE-32BFF3CE7F6A}"/>
               </a:ext>
             </a:extLst>
           </p:cNvPr>
@@ -14835,7 +14835,7 @@
           <p:cNvPr id="5" name="">
             <a:extLst xmlns:a="http://schemas.openxmlformats.org/drawingml/2006/main">
               <a:ext uri="{FF2B5EF4-FFF2-40B4-BE49-F238E27FC236}">
-                <a16:creationId xmlns:a16="http://schemas.microsoft.com/office/drawing/2014/main" id="{C095524A-C5D4-4288-ADBC-9D36EB368ABA}"/>
+                <a16:creationId xmlns:a16="http://schemas.microsoft.com/office/drawing/2014/main" id="{63DD9CCF-458B-4986-A3AF-46A877DBD8F3}"/>
               </a:ext>
             </a:extLst>
           </p:cNvPr>
@@ -14892,7 +14892,7 @@
           <p:cNvPr id="6" name="">
             <a:extLst xmlns:a="http://schemas.openxmlformats.org/drawingml/2006/main">
               <a:ext uri="{FF2B5EF4-FFF2-40B4-BE49-F238E27FC236}">
-                <a16:creationId xmlns:a16="http://schemas.microsoft.com/office/drawing/2014/main" id="{4FAB9B74-4E52-4F48-8FF5-6239F27943A0}"/>
+                <a16:creationId xmlns:a16="http://schemas.microsoft.com/office/drawing/2014/main" id="{BFBE7DCD-6B54-4846-87E5-59DD0D39EB32}"/>
               </a:ext>
             </a:extLst>
           </p:cNvPr>
@@ -15016,7 +15016,7 @@
     </p:spTree>
     <p:extLst>
       <p:ext uri="{BB962C8B-B14F-4D97-AF65-F5344CB8AC3E}">
-        <p14:creationId xmlns:p14="http://schemas.microsoft.com/office/powerpoint/2010/main" val="1875752549"/>
+        <p14:creationId xmlns:p14="http://schemas.microsoft.com/office/powerpoint/2010/main" val="430720217"/>
       </p:ext>
     </p:extLst>
   </p:cSld>
@@ -15047,7 +15047,7 @@
           <p:cNvPr id="6" name="">
             <a:extLst xmlns:a="http://schemas.openxmlformats.org/drawingml/2006/main">
               <a:ext uri="{FF2B5EF4-FFF2-40B4-BE49-F238E27FC236}">
-                <a16:creationId xmlns:a16="http://schemas.microsoft.com/office/drawing/2014/main" id="{71E93540-4E74-4FAD-8386-AAF8E6919986}"/>
+                <a16:creationId xmlns:a16="http://schemas.microsoft.com/office/drawing/2014/main" id="{FB8E2FE3-A69F-4A28-9598-CD9B7CE8B7CD}"/>
               </a:ext>
             </a:extLst>
           </p:cNvPr>
@@ -15104,7 +15104,7 @@
           <p:cNvPr id="2" name="">
             <a:extLst xmlns:a="http://schemas.openxmlformats.org/drawingml/2006/main">
               <a:ext uri="{FF2B5EF4-FFF2-40B4-BE49-F238E27FC236}">
-                <a16:creationId xmlns:a16="http://schemas.microsoft.com/office/drawing/2014/main" id="{6B54CA37-C6B1-4B7B-88E0-8BA7CA86904E}"/>
+                <a16:creationId xmlns:a16="http://schemas.microsoft.com/office/drawing/2014/main" id="{ECDA7C0C-604F-4877-A494-41CF4E9E15EF}"/>
               </a:ext>
             </a:extLst>
           </p:cNvPr>
@@ -15161,7 +15161,7 @@
           <p:cNvPr id="3" name="">
             <a:extLst xmlns:a="http://schemas.openxmlformats.org/drawingml/2006/main">
               <a:ext uri="{FF2B5EF4-FFF2-40B4-BE49-F238E27FC236}">
-                <a16:creationId xmlns:a16="http://schemas.microsoft.com/office/drawing/2014/main" id="{BE3C5C04-87D9-4C4F-9E79-20E253A9D4E9}"/>
+                <a16:creationId xmlns:a16="http://schemas.microsoft.com/office/drawing/2014/main" id="{90B86B53-4835-48BD-B16B-820E2441A72C}"/>
               </a:ext>
             </a:extLst>
           </p:cNvPr>
@@ -15218,7 +15218,7 @@
           <p:cNvPr id="4" name="">
             <a:extLst xmlns:a="http://schemas.openxmlformats.org/drawingml/2006/main">
               <a:ext uri="{FF2B5EF4-FFF2-40B4-BE49-F238E27FC236}">
-                <a16:creationId xmlns:a16="http://schemas.microsoft.com/office/drawing/2014/main" id="{CB08A171-649E-4B70-8F86-39CC4F8C9F1D}"/>
+                <a16:creationId xmlns:a16="http://schemas.microsoft.com/office/drawing/2014/main" id="{86306B76-BAF6-4597-95F1-0DF588DB1DEC}"/>
               </a:ext>
             </a:extLst>
           </p:cNvPr>
@@ -16081,7 +16081,7 @@
     </p:spTree>
     <p:extLst>
       <p:ext uri="{BB962C8B-B14F-4D97-AF65-F5344CB8AC3E}">
-        <p14:creationId xmlns:p14="http://schemas.microsoft.com/office/powerpoint/2010/main" val="730520308"/>
+        <p14:creationId xmlns:p14="http://schemas.microsoft.com/office/powerpoint/2010/main" val="308132298"/>
       </p:ext>
     </p:extLst>
   </p:cSld>
@@ -16112,7 +16112,7 @@
           <p:cNvPr id="13" name="">
             <a:extLst xmlns:a="http://schemas.openxmlformats.org/drawingml/2006/main">
               <a:ext uri="{FF2B5EF4-FFF2-40B4-BE49-F238E27FC236}">
-                <a16:creationId xmlns:a16="http://schemas.microsoft.com/office/drawing/2014/main" id="{C61F4F13-E108-4EF4-8DB1-E5222868AFEE}"/>
+                <a16:creationId xmlns:a16="http://schemas.microsoft.com/office/drawing/2014/main" id="{B91AA868-5745-491E-B69B-8DDD56993B8E}"/>
               </a:ext>
             </a:extLst>
           </p:cNvPr>
@@ -16169,7 +16169,7 @@
           <p:cNvPr id="2" name="">
             <a:extLst xmlns:a="http://schemas.openxmlformats.org/drawingml/2006/main">
               <a:ext uri="{FF2B5EF4-FFF2-40B4-BE49-F238E27FC236}">
-                <a16:creationId xmlns:a16="http://schemas.microsoft.com/office/drawing/2014/main" id="{3A3B9257-C33B-46B7-B715-A72BC46B06D1}"/>
+                <a16:creationId xmlns:a16="http://schemas.microsoft.com/office/drawing/2014/main" id="{3FA0319F-A0DB-4A6F-AA71-07D440515FD1}"/>
               </a:ext>
             </a:extLst>
           </p:cNvPr>
@@ -16226,7 +16226,7 @@
           <p:cNvPr id="3" name="">
             <a:extLst xmlns:a="http://schemas.openxmlformats.org/drawingml/2006/main">
               <a:ext uri="{FF2B5EF4-FFF2-40B4-BE49-F238E27FC236}">
-                <a16:creationId xmlns:a16="http://schemas.microsoft.com/office/drawing/2014/main" id="{924B5FD0-2DB6-4121-AB72-869538552E39}"/>
+                <a16:creationId xmlns:a16="http://schemas.microsoft.com/office/drawing/2014/main" id="{DF24904B-2140-4FC9-A660-6F1741235A41}"/>
               </a:ext>
             </a:extLst>
           </p:cNvPr>
@@ -16283,7 +16283,7 @@
           <p:cNvPr id="4" name="">
             <a:extLst xmlns:a="http://schemas.openxmlformats.org/drawingml/2006/main">
               <a:ext uri="{FF2B5EF4-FFF2-40B4-BE49-F238E27FC236}">
-                <a16:creationId xmlns:a16="http://schemas.microsoft.com/office/drawing/2014/main" id="{0786F892-9B85-4E89-AC97-F1E3E94FB4E9}"/>
+                <a16:creationId xmlns:a16="http://schemas.microsoft.com/office/drawing/2014/main" id="{0808B5CC-2084-4511-8384-2F4D2C88AC62}"/>
               </a:ext>
             </a:extLst>
           </p:cNvPr>
@@ -16340,7 +16340,7 @@
           <p:cNvPr id="5" name="">
             <a:extLst xmlns:a="http://schemas.openxmlformats.org/drawingml/2006/main">
               <a:ext uri="{FF2B5EF4-FFF2-40B4-BE49-F238E27FC236}">
-                <a16:creationId xmlns:a16="http://schemas.microsoft.com/office/drawing/2014/main" id="{8F9168BD-1838-486C-8136-0656CAC7279A}"/>
+                <a16:creationId xmlns:a16="http://schemas.microsoft.com/office/drawing/2014/main" id="{C7938744-E39C-4D54-8361-B626701565D5}"/>
               </a:ext>
             </a:extLst>
           </p:cNvPr>
@@ -16397,7 +16397,7 @@
           <p:cNvPr id="6" name="">
             <a:extLst xmlns:a="http://schemas.openxmlformats.org/drawingml/2006/main">
               <a:ext uri="{FF2B5EF4-FFF2-40B4-BE49-F238E27FC236}">
-                <a16:creationId xmlns:a16="http://schemas.microsoft.com/office/drawing/2014/main" id="{53DF27B1-70F0-4779-8DD8-403D0C20BBC2}"/>
+                <a16:creationId xmlns:a16="http://schemas.microsoft.com/office/drawing/2014/main" id="{B87D56C7-8914-481B-92D4-427FE363313E}"/>
               </a:ext>
             </a:extLst>
           </p:cNvPr>
@@ -16454,7 +16454,7 @@
           <p:cNvPr id="7" name="">
             <a:extLst xmlns:a="http://schemas.openxmlformats.org/drawingml/2006/main">
               <a:ext uri="{FF2B5EF4-FFF2-40B4-BE49-F238E27FC236}">
-                <a16:creationId xmlns:a16="http://schemas.microsoft.com/office/drawing/2014/main" id="{664C36A6-DFE3-4A82-B5E9-DB798AB9F61C}"/>
+                <a16:creationId xmlns:a16="http://schemas.microsoft.com/office/drawing/2014/main" id="{F010472B-6CD9-472F-A714-81C94643A2DB}"/>
               </a:ext>
             </a:extLst>
           </p:cNvPr>
@@ -16511,7 +16511,7 @@
           <p:cNvPr id="8" name="">
             <a:extLst xmlns:a="http://schemas.openxmlformats.org/drawingml/2006/main">
               <a:ext uri="{FF2B5EF4-FFF2-40B4-BE49-F238E27FC236}">
-                <a16:creationId xmlns:a16="http://schemas.microsoft.com/office/drawing/2014/main" id="{5397F54C-E8B0-4A3D-A23B-040EFBA5793B}"/>
+                <a16:creationId xmlns:a16="http://schemas.microsoft.com/office/drawing/2014/main" id="{B5446AA0-4229-4DDE-88B2-868290B95253}"/>
               </a:ext>
             </a:extLst>
           </p:cNvPr>
@@ -16568,7 +16568,7 @@
           <p:cNvPr id="9" name="">
             <a:extLst xmlns:a="http://schemas.openxmlformats.org/drawingml/2006/main">
               <a:ext uri="{FF2B5EF4-FFF2-40B4-BE49-F238E27FC236}">
-                <a16:creationId xmlns:a16="http://schemas.microsoft.com/office/drawing/2014/main" id="{B6BC158A-D639-40E7-8BE8-F4252F818B05}"/>
+                <a16:creationId xmlns:a16="http://schemas.microsoft.com/office/drawing/2014/main" id="{985E7C62-FFEE-43F5-B951-D450F76B2E81}"/>
               </a:ext>
             </a:extLst>
           </p:cNvPr>
@@ -16625,7 +16625,7 @@
           <p:cNvPr id="10" name="">
             <a:extLst xmlns:a="http://schemas.openxmlformats.org/drawingml/2006/main">
               <a:ext uri="{FF2B5EF4-FFF2-40B4-BE49-F238E27FC236}">
-                <a16:creationId xmlns:a16="http://schemas.microsoft.com/office/drawing/2014/main" id="{411BDE14-F524-4B6C-B1B2-5E8AB01E17CD}"/>
+                <a16:creationId xmlns:a16="http://schemas.microsoft.com/office/drawing/2014/main" id="{633634C4-14EF-4BA4-9DA9-5B20AECDA191}"/>
               </a:ext>
             </a:extLst>
           </p:cNvPr>
@@ -16682,7 +16682,7 @@
           <p:cNvPr id="11" name="">
             <a:extLst xmlns:a="http://schemas.openxmlformats.org/drawingml/2006/main">
               <a:ext uri="{FF2B5EF4-FFF2-40B4-BE49-F238E27FC236}">
-                <a16:creationId xmlns:a16="http://schemas.microsoft.com/office/drawing/2014/main" id="{C4B0B57F-876F-4E34-8DFE-793AD382D064}"/>
+                <a16:creationId xmlns:a16="http://schemas.microsoft.com/office/drawing/2014/main" id="{B7AC6C77-A3A1-4A2D-AB52-72DE1AA4650B}"/>
               </a:ext>
             </a:extLst>
           </p:cNvPr>
@@ -16739,7 +16739,7 @@
           <p:cNvPr id="12" name="">
             <a:extLst xmlns:a="http://schemas.openxmlformats.org/drawingml/2006/main">
               <a:ext uri="{FF2B5EF4-FFF2-40B4-BE49-F238E27FC236}">
-                <a16:creationId xmlns:a16="http://schemas.microsoft.com/office/drawing/2014/main" id="{AC7A821E-482B-46AF-BCD7-9D1954536683}"/>
+                <a16:creationId xmlns:a16="http://schemas.microsoft.com/office/drawing/2014/main" id="{70767E2B-C36E-4B4A-B125-CCD9B73D4142}"/>
               </a:ext>
             </a:extLst>
           </p:cNvPr>
@@ -16794,7 +16794,7 @@
     </p:spTree>
     <p:extLst>
       <p:ext uri="{BB962C8B-B14F-4D97-AF65-F5344CB8AC3E}">
-        <p14:creationId xmlns:p14="http://schemas.microsoft.com/office/powerpoint/2010/main" val="1862473702"/>
+        <p14:creationId xmlns:p14="http://schemas.microsoft.com/office/powerpoint/2010/main" val="1199435076"/>
       </p:ext>
     </p:extLst>
   </p:cSld>
@@ -16825,7 +16825,7 @@
           <p:cNvPr id="7" name="">
             <a:extLst xmlns:a="http://schemas.openxmlformats.org/drawingml/2006/main">
               <a:ext uri="{FF2B5EF4-FFF2-40B4-BE49-F238E27FC236}">
-                <a16:creationId xmlns:a16="http://schemas.microsoft.com/office/drawing/2014/main" id="{5AC57EE7-86C0-45FC-BD8C-CB68CB1E61E5}"/>
+                <a16:creationId xmlns:a16="http://schemas.microsoft.com/office/drawing/2014/main" id="{639826D3-23A7-4A4D-82AD-2244F3E8C763}"/>
               </a:ext>
             </a:extLst>
           </p:cNvPr>
@@ -16882,7 +16882,7 @@
           <p:cNvPr id="2" name="">
             <a:extLst xmlns:a="http://schemas.openxmlformats.org/drawingml/2006/main">
               <a:ext uri="{FF2B5EF4-FFF2-40B4-BE49-F238E27FC236}">
-                <a16:creationId xmlns:a16="http://schemas.microsoft.com/office/drawing/2014/main" id="{C3E881ED-2C7D-4A41-80A2-0FA23E68B377}"/>
+                <a16:creationId xmlns:a16="http://schemas.microsoft.com/office/drawing/2014/main" id="{FA09901D-CFD8-4F69-8982-EA9048840FEF}"/>
               </a:ext>
             </a:extLst>
           </p:cNvPr>
@@ -16939,7 +16939,7 @@
           <p:cNvPr id="3" name="">
             <a:extLst xmlns:a="http://schemas.openxmlformats.org/drawingml/2006/main">
               <a:ext uri="{FF2B5EF4-FFF2-40B4-BE49-F238E27FC236}">
-                <a16:creationId xmlns:a16="http://schemas.microsoft.com/office/drawing/2014/main" id="{33B8B9D6-1B71-4DA0-8D04-9E96A68F5992}"/>
+                <a16:creationId xmlns:a16="http://schemas.microsoft.com/office/drawing/2014/main" id="{A94F3911-06BC-4741-AE87-5259ED0D813D}"/>
               </a:ext>
             </a:extLst>
           </p:cNvPr>
@@ -17314,7 +17314,7 @@
           <p:cNvPr id="5" name="">
             <a:extLst xmlns:a="http://schemas.openxmlformats.org/drawingml/2006/main">
               <a:ext uri="{FF2B5EF4-FFF2-40B4-BE49-F238E27FC236}">
-                <a16:creationId xmlns:a16="http://schemas.microsoft.com/office/drawing/2014/main" id="{E9BA61B4-B235-4F4A-9885-9A44927FCF91}"/>
+                <a16:creationId xmlns:a16="http://schemas.microsoft.com/office/drawing/2014/main" id="{06A28B57-9FEF-4DD3-9812-3F153D7B290C}"/>
               </a:ext>
             </a:extLst>
           </p:cNvPr>
@@ -17394,7 +17394,7 @@
           <p:cNvPr id="6" name="">
             <a:extLst xmlns:a="http://schemas.openxmlformats.org/drawingml/2006/main">
               <a:ext uri="{FF2B5EF4-FFF2-40B4-BE49-F238E27FC236}">
-                <a16:creationId xmlns:a16="http://schemas.microsoft.com/office/drawing/2014/main" id="{8D900C55-A55A-4444-895D-66E8F8EC73A8}"/>
+                <a16:creationId xmlns:a16="http://schemas.microsoft.com/office/drawing/2014/main" id="{5D4E0E9C-400D-49A5-9916-43EF4D40D7E2}"/>
               </a:ext>
             </a:extLst>
           </p:cNvPr>
@@ -17472,7 +17472,7 @@
     </p:spTree>
     <p:extLst>
       <p:ext uri="{BB962C8B-B14F-4D97-AF65-F5344CB8AC3E}">
-        <p14:creationId xmlns:p14="http://schemas.microsoft.com/office/powerpoint/2010/main" val="2083766265"/>
+        <p14:creationId xmlns:p14="http://schemas.microsoft.com/office/powerpoint/2010/main" val="1592329215"/>
       </p:ext>
     </p:extLst>
   </p:cSld>
@@ -17503,7 +17503,7 @@
           <p:cNvPr id="14" name="">
             <a:extLst xmlns:a="http://schemas.openxmlformats.org/drawingml/2006/main">
               <a:ext uri="{FF2B5EF4-FFF2-40B4-BE49-F238E27FC236}">
-                <a16:creationId xmlns:a16="http://schemas.microsoft.com/office/drawing/2014/main" id="{9D594B9A-8257-4835-80CB-C900CC9CBBB8}"/>
+                <a16:creationId xmlns:a16="http://schemas.microsoft.com/office/drawing/2014/main" id="{14CBF922-42EC-48E8-A1E5-E047B6424234}"/>
               </a:ext>
             </a:extLst>
           </p:cNvPr>
@@ -17560,7 +17560,7 @@
           <p:cNvPr id="2" name="">
             <a:extLst xmlns:a="http://schemas.openxmlformats.org/drawingml/2006/main">
               <a:ext uri="{FF2B5EF4-FFF2-40B4-BE49-F238E27FC236}">
-                <a16:creationId xmlns:a16="http://schemas.microsoft.com/office/drawing/2014/main" id="{C21F4026-4CF5-4BF7-92A2-23932191281D}"/>
+                <a16:creationId xmlns:a16="http://schemas.microsoft.com/office/drawing/2014/main" id="{D8836220-3B37-4F08-8D8B-838BBADAA721}"/>
               </a:ext>
             </a:extLst>
           </p:cNvPr>
@@ -17617,7 +17617,7 @@
           <p:cNvPr id="3" name="">
             <a:extLst xmlns:a="http://schemas.openxmlformats.org/drawingml/2006/main">
               <a:ext uri="{FF2B5EF4-FFF2-40B4-BE49-F238E27FC236}">
-                <a16:creationId xmlns:a16="http://schemas.microsoft.com/office/drawing/2014/main" id="{C82AA480-C0B2-415A-A458-D94660F0A11F}"/>
+                <a16:creationId xmlns:a16="http://schemas.microsoft.com/office/drawing/2014/main" id="{B6FCB86A-B240-4050-99F3-846E2BF5C4A6}"/>
               </a:ext>
             </a:extLst>
           </p:cNvPr>
@@ -17674,7 +17674,7 @@
           <p:cNvPr id="4" name="">
             <a:extLst xmlns:a="http://schemas.openxmlformats.org/drawingml/2006/main">
               <a:ext uri="{FF2B5EF4-FFF2-40B4-BE49-F238E27FC236}">
-                <a16:creationId xmlns:a16="http://schemas.microsoft.com/office/drawing/2014/main" id="{33CD7F64-B4D5-4DFC-AE7F-FD78B1B21927}"/>
+                <a16:creationId xmlns:a16="http://schemas.microsoft.com/office/drawing/2014/main" id="{58C403C3-9499-4100-9E38-15E1FFC1575A}"/>
               </a:ext>
             </a:extLst>
           </p:cNvPr>
@@ -17731,7 +17731,7 @@
           <p:cNvPr id="5" name="">
             <a:extLst xmlns:a="http://schemas.openxmlformats.org/drawingml/2006/main">
               <a:ext uri="{FF2B5EF4-FFF2-40B4-BE49-F238E27FC236}">
-                <a16:creationId xmlns:a16="http://schemas.microsoft.com/office/drawing/2014/main" id="{5671A225-644E-4B0A-AF34-527385C35B11}"/>
+                <a16:creationId xmlns:a16="http://schemas.microsoft.com/office/drawing/2014/main" id="{1062CDC3-9BBB-4FC2-A3E6-E010C9DFE5C9}"/>
               </a:ext>
             </a:extLst>
           </p:cNvPr>
@@ -17788,7 +17788,7 @@
           <p:cNvPr id="6" name="">
             <a:extLst xmlns:a="http://schemas.openxmlformats.org/drawingml/2006/main">
               <a:ext uri="{FF2B5EF4-FFF2-40B4-BE49-F238E27FC236}">
-                <a16:creationId xmlns:a16="http://schemas.microsoft.com/office/drawing/2014/main" id="{37496443-3969-4822-BC2F-99BC49F70D4B}"/>
+                <a16:creationId xmlns:a16="http://schemas.microsoft.com/office/drawing/2014/main" id="{98B274EC-4BB3-42DD-AB18-EBD24C592202}"/>
               </a:ext>
             </a:extLst>
           </p:cNvPr>
@@ -17868,7 +17868,7 @@
           <p:cNvPr id="7" name="">
             <a:extLst xmlns:a="http://schemas.openxmlformats.org/drawingml/2006/main">
               <a:ext uri="{FF2B5EF4-FFF2-40B4-BE49-F238E27FC236}">
-                <a16:creationId xmlns:a16="http://schemas.microsoft.com/office/drawing/2014/main" id="{CBA49FB3-E256-4827-AEE6-7F4F675A99EC}"/>
+                <a16:creationId xmlns:a16="http://schemas.microsoft.com/office/drawing/2014/main" id="{465F1BD8-8F62-4B28-BB5A-F3C42C05E89B}"/>
               </a:ext>
             </a:extLst>
           </p:cNvPr>
@@ -17925,7 +17925,7 @@
           <p:cNvPr id="8" name="">
             <a:extLst xmlns:a="http://schemas.openxmlformats.org/drawingml/2006/main">
               <a:ext uri="{FF2B5EF4-FFF2-40B4-BE49-F238E27FC236}">
-                <a16:creationId xmlns:a16="http://schemas.microsoft.com/office/drawing/2014/main" id="{15D98876-032A-40BB-8661-80D6085D3179}"/>
+                <a16:creationId xmlns:a16="http://schemas.microsoft.com/office/drawing/2014/main" id="{2CA6A5E0-33E8-4A21-A308-06A21490004B}"/>
               </a:ext>
             </a:extLst>
           </p:cNvPr>
@@ -17982,7 +17982,7 @@
           <p:cNvPr id="9" name="">
             <a:extLst xmlns:a="http://schemas.openxmlformats.org/drawingml/2006/main">
               <a:ext uri="{FF2B5EF4-FFF2-40B4-BE49-F238E27FC236}">
-                <a16:creationId xmlns:a16="http://schemas.microsoft.com/office/drawing/2014/main" id="{108EB495-4CBB-48C1-AAE3-F832ECD2E608}"/>
+                <a16:creationId xmlns:a16="http://schemas.microsoft.com/office/drawing/2014/main" id="{21421B83-8277-4C2A-9736-304527C834C6}"/>
               </a:ext>
             </a:extLst>
           </p:cNvPr>
@@ -18062,7 +18062,7 @@
           <p:cNvPr id="10" name="">
             <a:extLst xmlns:a="http://schemas.openxmlformats.org/drawingml/2006/main">
               <a:ext uri="{FF2B5EF4-FFF2-40B4-BE49-F238E27FC236}">
-                <a16:creationId xmlns:a16="http://schemas.microsoft.com/office/drawing/2014/main" id="{FFB306C9-3C03-4C9D-A78B-43668EA5025A}"/>
+                <a16:creationId xmlns:a16="http://schemas.microsoft.com/office/drawing/2014/main" id="{71C6AF39-97E8-4E7B-9B57-0AFF60BA1EA0}"/>
               </a:ext>
             </a:extLst>
           </p:cNvPr>
@@ -18119,7 +18119,7 @@
           <p:cNvPr id="11" name="">
             <a:extLst xmlns:a="http://schemas.openxmlformats.org/drawingml/2006/main">
               <a:ext uri="{FF2B5EF4-FFF2-40B4-BE49-F238E27FC236}">
-                <a16:creationId xmlns:a16="http://schemas.microsoft.com/office/drawing/2014/main" id="{81C7F2BE-16E4-4CB1-9D97-4D230074FD33}"/>
+                <a16:creationId xmlns:a16="http://schemas.microsoft.com/office/drawing/2014/main" id="{C49A2728-66E9-4AEE-8211-A4F0C0E29836}"/>
               </a:ext>
             </a:extLst>
           </p:cNvPr>
@@ -18176,7 +18176,7 @@
           <p:cNvPr id="12" name="">
             <a:extLst xmlns:a="http://schemas.openxmlformats.org/drawingml/2006/main">
               <a:ext uri="{FF2B5EF4-FFF2-40B4-BE49-F238E27FC236}">
-                <a16:creationId xmlns:a16="http://schemas.microsoft.com/office/drawing/2014/main" id="{B8B73319-BF2B-42F1-98B9-4B23C6CD18B4}"/>
+                <a16:creationId xmlns:a16="http://schemas.microsoft.com/office/drawing/2014/main" id="{937B7776-C125-4673-8E8E-E2CF0C09E349}"/>
               </a:ext>
             </a:extLst>
           </p:cNvPr>
@@ -18256,7 +18256,7 @@
           <p:cNvPr id="13" name="">
             <a:extLst xmlns:a="http://schemas.openxmlformats.org/drawingml/2006/main">
               <a:ext uri="{FF2B5EF4-FFF2-40B4-BE49-F238E27FC236}">
-                <a16:creationId xmlns:a16="http://schemas.microsoft.com/office/drawing/2014/main" id="{4B9A9D73-689A-4DDE-959B-4D1C1F3030F9}"/>
+                <a16:creationId xmlns:a16="http://schemas.microsoft.com/office/drawing/2014/main" id="{DBC3E99E-BA3E-409D-94B8-BC60F312B8E7}"/>
               </a:ext>
             </a:extLst>
           </p:cNvPr>
@@ -18334,7 +18334,7 @@
     </p:spTree>
     <p:extLst>
       <p:ext uri="{BB962C8B-B14F-4D97-AF65-F5344CB8AC3E}">
-        <p14:creationId xmlns:p14="http://schemas.microsoft.com/office/powerpoint/2010/main" val="1322244297"/>
+        <p14:creationId xmlns:p14="http://schemas.microsoft.com/office/powerpoint/2010/main" val="1650053841"/>
       </p:ext>
     </p:extLst>
   </p:cSld>
@@ -18365,7 +18365,7 @@
           <p:cNvPr id="8" name="">
             <a:extLst xmlns:a="http://schemas.openxmlformats.org/drawingml/2006/main">
               <a:ext uri="{FF2B5EF4-FFF2-40B4-BE49-F238E27FC236}">
-                <a16:creationId xmlns:a16="http://schemas.microsoft.com/office/drawing/2014/main" id="{5A67C52A-5428-4268-A6C6-5E4F4863F137}"/>
+                <a16:creationId xmlns:a16="http://schemas.microsoft.com/office/drawing/2014/main" id="{8406342E-C36A-405E-A7BD-3D1456659AA4}"/>
               </a:ext>
             </a:extLst>
           </p:cNvPr>
@@ -18422,7 +18422,7 @@
           <p:cNvPr id="2" name="">
             <a:extLst xmlns:a="http://schemas.openxmlformats.org/drawingml/2006/main">
               <a:ext uri="{FF2B5EF4-FFF2-40B4-BE49-F238E27FC236}">
-                <a16:creationId xmlns:a16="http://schemas.microsoft.com/office/drawing/2014/main" id="{75FC7AB3-85AD-4FEC-88F1-11DF6DC6285E}"/>
+                <a16:creationId xmlns:a16="http://schemas.microsoft.com/office/drawing/2014/main" id="{49A3929B-C782-4E7F-BF43-10B08FC88678}"/>
               </a:ext>
             </a:extLst>
           </p:cNvPr>
@@ -18479,7 +18479,7 @@
           <p:cNvPr id="3" name="">
             <a:extLst xmlns:a="http://schemas.openxmlformats.org/drawingml/2006/main">
               <a:ext uri="{FF2B5EF4-FFF2-40B4-BE49-F238E27FC236}">
-                <a16:creationId xmlns:a16="http://schemas.microsoft.com/office/drawing/2014/main" id="{7FB2C6EB-A166-4AAF-8594-F8AD0DBF3831}"/>
+                <a16:creationId xmlns:a16="http://schemas.microsoft.com/office/drawing/2014/main" id="{EF1395CC-40C3-4951-8033-B628359B4F03}"/>
               </a:ext>
             </a:extLst>
           </p:cNvPr>
@@ -18540,7 +18540,7 @@
           <p:nvPr/>
         </p:nvPicPr>
         <p:blipFill>
-          <a:blip xmlns:r="http://schemas.openxmlformats.org/officeDocument/2006/relationships" xmlns:a="http://schemas.openxmlformats.org/drawingml/2006/main" r:embed="R1c3d600e6b5f4f4c"/>
+          <a:blip xmlns:r="http://schemas.openxmlformats.org/officeDocument/2006/relationships" xmlns:a="http://schemas.openxmlformats.org/drawingml/2006/main" r:embed="R9760d1bf9d8442b2"/>
           <a:stretch xmlns:a="http://schemas.openxmlformats.org/drawingml/2006/main"/>
         </p:blipFill>
         <p:spPr>
@@ -18558,7 +18558,7 @@
           <p:cNvPr id="5" name="">
             <a:extLst xmlns:a="http://schemas.openxmlformats.org/drawingml/2006/main">
               <a:ext uri="{FF2B5EF4-FFF2-40B4-BE49-F238E27FC236}">
-                <a16:creationId xmlns:a16="http://schemas.microsoft.com/office/drawing/2014/main" id="{0DDCC22D-6D56-4DA5-926F-35319A512977}"/>
+                <a16:creationId xmlns:a16="http://schemas.microsoft.com/office/drawing/2014/main" id="{4121B817-3749-4F45-AE27-E0AC14297C4B}"/>
               </a:ext>
             </a:extLst>
           </p:cNvPr>
@@ -18638,7 +18638,7 @@
           <p:cNvPr id="6" name="">
             <a:extLst xmlns:a="http://schemas.openxmlformats.org/drawingml/2006/main">
               <a:ext uri="{FF2B5EF4-FFF2-40B4-BE49-F238E27FC236}">
-                <a16:creationId xmlns:a16="http://schemas.microsoft.com/office/drawing/2014/main" id="{386D6C43-1400-465A-96F9-CDFE85BDB6C3}"/>
+                <a16:creationId xmlns:a16="http://schemas.microsoft.com/office/drawing/2014/main" id="{CA96E9E7-7701-4FFF-AFCF-31F4FE99D2FE}"/>
               </a:ext>
             </a:extLst>
           </p:cNvPr>
@@ -18718,7 +18718,7 @@
           <p:cNvPr id="7" name="">
             <a:extLst xmlns:a="http://schemas.openxmlformats.org/drawingml/2006/main">
               <a:ext uri="{FF2B5EF4-FFF2-40B4-BE49-F238E27FC236}">
-                <a16:creationId xmlns:a16="http://schemas.microsoft.com/office/drawing/2014/main" id="{27C2DBFF-F278-410A-9CD7-4DA2B7A1064E}"/>
+                <a16:creationId xmlns:a16="http://schemas.microsoft.com/office/drawing/2014/main" id="{0E2C576D-8371-4E62-8379-D03CAABCCC24}"/>
               </a:ext>
             </a:extLst>
           </p:cNvPr>
@@ -18796,7 +18796,7 @@
     </p:spTree>
     <p:extLst>
       <p:ext uri="{BB962C8B-B14F-4D97-AF65-F5344CB8AC3E}">
-        <p14:creationId xmlns:p14="http://schemas.microsoft.com/office/powerpoint/2010/main" val="1896262695"/>
+        <p14:creationId xmlns:p14="http://schemas.microsoft.com/office/powerpoint/2010/main" val="1604107358"/>
       </p:ext>
     </p:extLst>
   </p:cSld>
@@ -18827,7 +18827,7 @@
           <p:cNvPr id="9" name="">
             <a:extLst xmlns:a="http://schemas.openxmlformats.org/drawingml/2006/main">
               <a:ext uri="{FF2B5EF4-FFF2-40B4-BE49-F238E27FC236}">
-                <a16:creationId xmlns:a16="http://schemas.microsoft.com/office/drawing/2014/main" id="{987AC979-5C9E-4711-BAD9-F6E85B2CF8E5}"/>
+                <a16:creationId xmlns:a16="http://schemas.microsoft.com/office/drawing/2014/main" id="{042C8FB8-7133-4AD3-BAEC-85FE72D4EA78}"/>
               </a:ext>
             </a:extLst>
           </p:cNvPr>
@@ -18884,7 +18884,7 @@
           <p:cNvPr id="2" name="">
             <a:extLst xmlns:a="http://schemas.openxmlformats.org/drawingml/2006/main">
               <a:ext uri="{FF2B5EF4-FFF2-40B4-BE49-F238E27FC236}">
-                <a16:creationId xmlns:a16="http://schemas.microsoft.com/office/drawing/2014/main" id="{69BEAC8F-CCE8-41AE-B7AF-86033696C2D9}"/>
+                <a16:creationId xmlns:a16="http://schemas.microsoft.com/office/drawing/2014/main" id="{6CB9D363-AC65-4FEC-B55F-DE28B13F4350}"/>
               </a:ext>
             </a:extLst>
           </p:cNvPr>
@@ -18941,7 +18941,7 @@
           <p:cNvPr id="3" name="">
             <a:extLst xmlns:a="http://schemas.openxmlformats.org/drawingml/2006/main">
               <a:ext uri="{FF2B5EF4-FFF2-40B4-BE49-F238E27FC236}">
-                <a16:creationId xmlns:a16="http://schemas.microsoft.com/office/drawing/2014/main" id="{049BDCE3-9B3A-4B96-98E0-B626103C1A7B}"/>
+                <a16:creationId xmlns:a16="http://schemas.microsoft.com/office/drawing/2014/main" id="{E46B5C33-0572-4C58-A714-C6F40CD5873F}"/>
               </a:ext>
             </a:extLst>
           </p:cNvPr>
@@ -18998,7 +18998,7 @@
           <p:cNvPr id="4" name="">
             <a:extLst xmlns:a="http://schemas.openxmlformats.org/drawingml/2006/main">
               <a:ext uri="{FF2B5EF4-FFF2-40B4-BE49-F238E27FC236}">
-                <a16:creationId xmlns:a16="http://schemas.microsoft.com/office/drawing/2014/main" id="{63B98A2D-31A5-4F1F-9173-8140F2686807}"/>
+                <a16:creationId xmlns:a16="http://schemas.microsoft.com/office/drawing/2014/main" id="{FF8C1CFA-46BA-4265-BDE4-B3281D21976F}"/>
               </a:ext>
             </a:extLst>
           </p:cNvPr>
@@ -19062,7 +19062,7 @@
         </p:xfrm>
         <a:graphic xmlns:a="http://schemas.openxmlformats.org/drawingml/2006/main">
           <a:graphicData uri="http://schemas.openxmlformats.org/drawingml/2006/chart">
-            <c:chart xmlns:r="http://schemas.openxmlformats.org/officeDocument/2006/relationships" xmlns:c="http://schemas.openxmlformats.org/drawingml/2006/chart" r:id="R270733d6103c4f6f"/>
+            <c:chart xmlns:r="http://schemas.openxmlformats.org/officeDocument/2006/relationships" xmlns:c="http://schemas.openxmlformats.org/drawingml/2006/chart" r:id="R4191729207474cd2"/>
           </a:graphicData>
         </a:graphic>
       </p:graphicFrame>
@@ -19071,7 +19071,7 @@
           <p:cNvPr id="6" name="">
             <a:extLst xmlns:a="http://schemas.openxmlformats.org/drawingml/2006/main">
               <a:ext uri="{FF2B5EF4-FFF2-40B4-BE49-F238E27FC236}">
-                <a16:creationId xmlns:a16="http://schemas.microsoft.com/office/drawing/2014/main" id="{9A303264-BFCF-4181-B539-4DEF57D89921}"/>
+                <a16:creationId xmlns:a16="http://schemas.microsoft.com/office/drawing/2014/main" id="{CAF5033B-B8A2-4046-8601-F5105AA9BBBC}"/>
               </a:ext>
             </a:extLst>
           </p:cNvPr>
@@ -20760,7 +20760,7 @@
           <p:cNvPr id="8" name="">
             <a:extLst xmlns:a="http://schemas.openxmlformats.org/drawingml/2006/main">
               <a:ext uri="{FF2B5EF4-FFF2-40B4-BE49-F238E27FC236}">
-                <a16:creationId xmlns:a16="http://schemas.microsoft.com/office/drawing/2014/main" id="{242F3DB8-C7E8-462C-AEF1-0F7835B86840}"/>
+                <a16:creationId xmlns:a16="http://schemas.microsoft.com/office/drawing/2014/main" id="{EC62B12B-B2BA-4544-AC62-6BCE8D6004B9}"/>
               </a:ext>
             </a:extLst>
           </p:cNvPr>
@@ -20807,7 +20807,7 @@
                 <a:ea typeface="Noto Sans"/>
                 <a:cs typeface="Noto Sans"/>
               </a:rPr>
-              <a:t>Контроль на графике: лучший Prophet отдельно для каждого горизонта.</a:t>
+              <a:t>Единый контроль на графике и в интервалах: Prophet с сезонным профилем.</a:t>
             </a:r>
           </a:p>
           <a:p xmlns:a="http://schemas.openxmlformats.org/drawingml/2006/main">
@@ -20830,7 +20830,7 @@
                 <a:ea typeface="Noto Sans"/>
                 <a:cs typeface="Noto Sans"/>
               </a:rPr>
-              <a:t>h12: базовый Prophet (2906), в слайде 6 единый Prophet с профилем (2989).</a:t>
+              <a:t>Снижение MAE: 42 / 23 / 28 / 56% на горизонтах 1 / 3 / 6 / 12 месяцев.</a:t>
             </a:r>
           </a:p>
         </p:txBody>
@@ -20838,7 +20838,7 @@
     </p:spTree>
     <p:extLst>
       <p:ext uri="{BB962C8B-B14F-4D97-AF65-F5344CB8AC3E}">
-        <p14:creationId xmlns:p14="http://schemas.microsoft.com/office/powerpoint/2010/main" val="1510088394"/>
+        <p14:creationId xmlns:p14="http://schemas.microsoft.com/office/powerpoint/2010/main" val="1290406625"/>
       </p:ext>
     </p:extLst>
   </p:cSld>
@@ -20869,7 +20869,7 @@
           <p:cNvPr id="7" name="">
             <a:extLst xmlns:a="http://schemas.openxmlformats.org/drawingml/2006/main">
               <a:ext uri="{FF2B5EF4-FFF2-40B4-BE49-F238E27FC236}">
-                <a16:creationId xmlns:a16="http://schemas.microsoft.com/office/drawing/2014/main" id="{6E402601-BD7A-4D19-BCBB-8BC25CF76A26}"/>
+                <a16:creationId xmlns:a16="http://schemas.microsoft.com/office/drawing/2014/main" id="{90C4A97E-E276-4DA7-8976-4E4C476E790F}"/>
               </a:ext>
             </a:extLst>
           </p:cNvPr>
@@ -20926,7 +20926,7 @@
           <p:cNvPr id="2" name="">
             <a:extLst xmlns:a="http://schemas.openxmlformats.org/drawingml/2006/main">
               <a:ext uri="{FF2B5EF4-FFF2-40B4-BE49-F238E27FC236}">
-                <a16:creationId xmlns:a16="http://schemas.microsoft.com/office/drawing/2014/main" id="{CC21F9FB-0301-45C5-BE2C-93FFE7A664F1}"/>
+                <a16:creationId xmlns:a16="http://schemas.microsoft.com/office/drawing/2014/main" id="{97ABA1BB-7D5D-4873-8FBB-90D4654E68B5}"/>
               </a:ext>
             </a:extLst>
           </p:cNvPr>
@@ -20983,7 +20983,7 @@
           <p:cNvPr id="3" name="">
             <a:extLst xmlns:a="http://schemas.openxmlformats.org/drawingml/2006/main">
               <a:ext uri="{FF2B5EF4-FFF2-40B4-BE49-F238E27FC236}">
-                <a16:creationId xmlns:a16="http://schemas.microsoft.com/office/drawing/2014/main" id="{CD62953D-C76B-4AE7-974A-37AB728F44FE}"/>
+                <a16:creationId xmlns:a16="http://schemas.microsoft.com/office/drawing/2014/main" id="{2AEC542A-D575-4292-819C-8EF0F3D89478}"/>
               </a:ext>
             </a:extLst>
           </p:cNvPr>
@@ -21433,7 +21433,7 @@
           <p:cNvPr id="5" name="">
             <a:extLst xmlns:a="http://schemas.openxmlformats.org/drawingml/2006/main">
               <a:ext uri="{FF2B5EF4-FFF2-40B4-BE49-F238E27FC236}">
-                <a16:creationId xmlns:a16="http://schemas.microsoft.com/office/drawing/2014/main" id="{FCC39A6F-BE2B-4C37-A689-3B37FE5F75CE}"/>
+                <a16:creationId xmlns:a16="http://schemas.microsoft.com/office/drawing/2014/main" id="{55089365-0F61-4834-977F-E7A3A6B27AB2}"/>
               </a:ext>
             </a:extLst>
           </p:cNvPr>
@@ -21513,7 +21513,7 @@
           <p:cNvPr id="6" name="">
             <a:extLst xmlns:a="http://schemas.openxmlformats.org/drawingml/2006/main">
               <a:ext uri="{FF2B5EF4-FFF2-40B4-BE49-F238E27FC236}">
-                <a16:creationId xmlns:a16="http://schemas.microsoft.com/office/drawing/2014/main" id="{D347592A-893B-4AF1-8853-012F14AEE449}"/>
+                <a16:creationId xmlns:a16="http://schemas.microsoft.com/office/drawing/2014/main" id="{0275B108-EA5B-48A9-9D55-8D3D8BF14E0A}"/>
               </a:ext>
             </a:extLst>
           </p:cNvPr>
@@ -21591,7 +21591,7 @@
     </p:spTree>
     <p:extLst>
       <p:ext uri="{BB962C8B-B14F-4D97-AF65-F5344CB8AC3E}">
-        <p14:creationId xmlns:p14="http://schemas.microsoft.com/office/powerpoint/2010/main" val="1062539304"/>
+        <p14:creationId xmlns:p14="http://schemas.microsoft.com/office/powerpoint/2010/main" val="1963953868"/>
       </p:ext>
     </p:extLst>
   </p:cSld>
@@ -21622,7 +21622,7 @@
           <p:cNvPr id="5" name="">
             <a:extLst xmlns:a="http://schemas.openxmlformats.org/drawingml/2006/main">
               <a:ext uri="{FF2B5EF4-FFF2-40B4-BE49-F238E27FC236}">
-                <a16:creationId xmlns:a16="http://schemas.microsoft.com/office/drawing/2014/main" id="{FCB3CDF0-48E2-4B48-94F4-B52F12CB02E0}"/>
+                <a16:creationId xmlns:a16="http://schemas.microsoft.com/office/drawing/2014/main" id="{47F96064-9343-40AC-853F-58005B40A290}"/>
               </a:ext>
             </a:extLst>
           </p:cNvPr>
@@ -21679,7 +21679,7 @@
           <p:cNvPr id="2" name="">
             <a:extLst xmlns:a="http://schemas.openxmlformats.org/drawingml/2006/main">
               <a:ext uri="{FF2B5EF4-FFF2-40B4-BE49-F238E27FC236}">
-                <a16:creationId xmlns:a16="http://schemas.microsoft.com/office/drawing/2014/main" id="{4BFBA59C-2E65-46BD-9948-3ED5C390314B}"/>
+                <a16:creationId xmlns:a16="http://schemas.microsoft.com/office/drawing/2014/main" id="{BE5FFED3-F52A-42AA-A9D7-860F962A8AD5}"/>
               </a:ext>
             </a:extLst>
           </p:cNvPr>
@@ -21736,7 +21736,7 @@
           <p:cNvPr id="3" name="">
             <a:extLst xmlns:a="http://schemas.openxmlformats.org/drawingml/2006/main">
               <a:ext uri="{FF2B5EF4-FFF2-40B4-BE49-F238E27FC236}">
-                <a16:creationId xmlns:a16="http://schemas.microsoft.com/office/drawing/2014/main" id="{B1286410-972B-43F7-9A37-9ECA19F154A8}"/>
+                <a16:creationId xmlns:a16="http://schemas.microsoft.com/office/drawing/2014/main" id="{FE1B6490-5203-4D4B-9641-D8E27978662C}"/>
               </a:ext>
             </a:extLst>
           </p:cNvPr>
@@ -22406,7 +22406,7 @@
     </p:spTree>
     <p:extLst>
       <p:ext uri="{BB962C8B-B14F-4D97-AF65-F5344CB8AC3E}">
-        <p14:creationId xmlns:p14="http://schemas.microsoft.com/office/powerpoint/2010/main" val="1831644432"/>
+        <p14:creationId xmlns:p14="http://schemas.microsoft.com/office/powerpoint/2010/main" val="806228499"/>
       </p:ext>
     </p:extLst>
   </p:cSld>
@@ -22437,7 +22437,7 @@
           <p:cNvPr id="7" name="">
             <a:extLst xmlns:a="http://schemas.openxmlformats.org/drawingml/2006/main">
               <a:ext uri="{FF2B5EF4-FFF2-40B4-BE49-F238E27FC236}">
-                <a16:creationId xmlns:a16="http://schemas.microsoft.com/office/drawing/2014/main" id="{518FC84D-5301-491C-AD2B-FC8D2D2A3D0A}"/>
+                <a16:creationId xmlns:a16="http://schemas.microsoft.com/office/drawing/2014/main" id="{9D7430EE-DF31-40AC-ABC8-B0E5FB5D24A6}"/>
               </a:ext>
             </a:extLst>
           </p:cNvPr>
@@ -22494,7 +22494,7 @@
           <p:cNvPr id="2" name="">
             <a:extLst xmlns:a="http://schemas.openxmlformats.org/drawingml/2006/main">
               <a:ext uri="{FF2B5EF4-FFF2-40B4-BE49-F238E27FC236}">
-                <a16:creationId xmlns:a16="http://schemas.microsoft.com/office/drawing/2014/main" id="{80AC6F39-8373-4069-AA9E-25FFA78EF869}"/>
+                <a16:creationId xmlns:a16="http://schemas.microsoft.com/office/drawing/2014/main" id="{83668297-91C0-466F-9FAC-CB75F7704339}"/>
               </a:ext>
             </a:extLst>
           </p:cNvPr>
@@ -22551,7 +22551,7 @@
           <p:cNvPr id="3" name="">
             <a:extLst xmlns:a="http://schemas.openxmlformats.org/drawingml/2006/main">
               <a:ext uri="{FF2B5EF4-FFF2-40B4-BE49-F238E27FC236}">
-                <a16:creationId xmlns:a16="http://schemas.microsoft.com/office/drawing/2014/main" id="{1B1EBAC8-50ED-4BC2-8DB1-2D48FB78D6E2}"/>
+                <a16:creationId xmlns:a16="http://schemas.microsoft.com/office/drawing/2014/main" id="{7DF72130-AE74-448A-875E-4B55C80AF827}"/>
               </a:ext>
             </a:extLst>
           </p:cNvPr>
@@ -23121,7 +23121,7 @@
           <p:cNvPr id="5" name="">
             <a:extLst xmlns:a="http://schemas.openxmlformats.org/drawingml/2006/main">
               <a:ext uri="{FF2B5EF4-FFF2-40B4-BE49-F238E27FC236}">
-                <a16:creationId xmlns:a16="http://schemas.microsoft.com/office/drawing/2014/main" id="{95EBA93E-0A65-4DE5-B961-9B344E070689}"/>
+                <a16:creationId xmlns:a16="http://schemas.microsoft.com/office/drawing/2014/main" id="{3837AE45-33DE-4D90-84D0-B87C575FEDD5}"/>
               </a:ext>
             </a:extLst>
           </p:cNvPr>
@@ -23201,7 +23201,7 @@
           <p:cNvPr id="6" name="">
             <a:extLst xmlns:a="http://schemas.openxmlformats.org/drawingml/2006/main">
               <a:ext uri="{FF2B5EF4-FFF2-40B4-BE49-F238E27FC236}">
-                <a16:creationId xmlns:a16="http://schemas.microsoft.com/office/drawing/2014/main" id="{F5469904-4C8D-427F-8986-BF301FA3F98D}"/>
+                <a16:creationId xmlns:a16="http://schemas.microsoft.com/office/drawing/2014/main" id="{AD5720B3-C2CE-4A65-BD2C-7F77063655BE}"/>
               </a:ext>
             </a:extLst>
           </p:cNvPr>
@@ -23256,7 +23256,7 @@
     </p:spTree>
     <p:extLst>
       <p:ext uri="{BB962C8B-B14F-4D97-AF65-F5344CB8AC3E}">
-        <p14:creationId xmlns:p14="http://schemas.microsoft.com/office/powerpoint/2010/main" val="1917149247"/>
+        <p14:creationId xmlns:p14="http://schemas.microsoft.com/office/powerpoint/2010/main" val="930968548"/>
       </p:ext>
     </p:extLst>
   </p:cSld>
@@ -23287,7 +23287,7 @@
           <p:cNvPr id="6" name="">
             <a:extLst xmlns:a="http://schemas.openxmlformats.org/drawingml/2006/main">
               <a:ext uri="{FF2B5EF4-FFF2-40B4-BE49-F238E27FC236}">
-                <a16:creationId xmlns:a16="http://schemas.microsoft.com/office/drawing/2014/main" id="{54083156-7E25-4BCB-AE02-1D30CF887AA2}"/>
+                <a16:creationId xmlns:a16="http://schemas.microsoft.com/office/drawing/2014/main" id="{C320A42B-AC34-4FDA-A746-7CB2A205C2D3}"/>
               </a:ext>
             </a:extLst>
           </p:cNvPr>
@@ -23344,7 +23344,7 @@
           <p:cNvPr id="2" name="">
             <a:extLst xmlns:a="http://schemas.openxmlformats.org/drawingml/2006/main">
               <a:ext uri="{FF2B5EF4-FFF2-40B4-BE49-F238E27FC236}">
-                <a16:creationId xmlns:a16="http://schemas.microsoft.com/office/drawing/2014/main" id="{9BB4294D-0F80-4527-A53D-3C2AD1523F76}"/>
+                <a16:creationId xmlns:a16="http://schemas.microsoft.com/office/drawing/2014/main" id="{F0A32E9B-C690-470B-B86A-64F8C2EEB1A0}"/>
               </a:ext>
             </a:extLst>
           </p:cNvPr>
@@ -23401,7 +23401,7 @@
           <p:cNvPr id="3" name="">
             <a:extLst xmlns:a="http://schemas.openxmlformats.org/drawingml/2006/main">
               <a:ext uri="{FF2B5EF4-FFF2-40B4-BE49-F238E27FC236}">
-                <a16:creationId xmlns:a16="http://schemas.microsoft.com/office/drawing/2014/main" id="{7AACE898-EF07-44A1-A812-2AE4D4BA3FE9}"/>
+                <a16:creationId xmlns:a16="http://schemas.microsoft.com/office/drawing/2014/main" id="{F54A5A02-C261-4CCA-BF46-50E479E419FE}"/>
               </a:ext>
             </a:extLst>
           </p:cNvPr>
@@ -24337,7 +24337,7 @@
           <p:cNvPr id="5" name="">
             <a:extLst xmlns:a="http://schemas.openxmlformats.org/drawingml/2006/main">
               <a:ext uri="{FF2B5EF4-FFF2-40B4-BE49-F238E27FC236}">
-                <a16:creationId xmlns:a16="http://schemas.microsoft.com/office/drawing/2014/main" id="{DC721950-3EF3-4C85-8533-B42AF142656D}"/>
+                <a16:creationId xmlns:a16="http://schemas.microsoft.com/office/drawing/2014/main" id="{8B0DD39E-B05F-44EE-98C7-8BF1574145BE}"/>
               </a:ext>
             </a:extLst>
           </p:cNvPr>
@@ -24415,7 +24415,7 @@
     </p:spTree>
     <p:extLst>
       <p:ext uri="{BB962C8B-B14F-4D97-AF65-F5344CB8AC3E}">
-        <p14:creationId xmlns:p14="http://schemas.microsoft.com/office/powerpoint/2010/main" val="2094945734"/>
+        <p14:creationId xmlns:p14="http://schemas.microsoft.com/office/powerpoint/2010/main" val="1115216777"/>
       </p:ext>
     </p:extLst>
   </p:cSld>

--- a/artifacts/presentation.pptx
+++ b/artifacts/presentation.pptx
@@ -2,33 +2,33 @@
 <file path=ppt/presentation.xml><?xml version="1.0" encoding="utf-8"?>
 <p:presentation xmlns:p="http://schemas.openxmlformats.org/presentationml/2006/main">
   <p:sldMasterIdLst>
-    <p:sldMasterId xmlns:r="http://schemas.openxmlformats.org/officeDocument/2006/relationships" id="2147483648" r:id="R98ef870035fc42e4"/>
+    <p:sldMasterId xmlns:r="http://schemas.openxmlformats.org/officeDocument/2006/relationships" id="2147483648" r:id="R4c7e7d2928fa4e20"/>
   </p:sldMasterIdLst>
   <p:notesMasterIdLst>
-    <p:notesMasterId xmlns:r="http://schemas.openxmlformats.org/officeDocument/2006/relationships" r:id="R84c98e8b6bf5400a"/>
+    <p:notesMasterId xmlns:r="http://schemas.openxmlformats.org/officeDocument/2006/relationships" r:id="R0c92a5ab789743be"/>
   </p:notesMasterIdLst>
   <p:sldIdLst>
-    <p:sldId xmlns:r="http://schemas.openxmlformats.org/officeDocument/2006/relationships" id="256" r:id="Rf8ebda1a42bb48c9"/>
-    <p:sldId xmlns:r="http://schemas.openxmlformats.org/officeDocument/2006/relationships" id="257" r:id="Re7b84f4af578402b"/>
-    <p:sldId xmlns:r="http://schemas.openxmlformats.org/officeDocument/2006/relationships" id="258" r:id="R2cbf895420fa4e90"/>
-    <p:sldId xmlns:r="http://schemas.openxmlformats.org/officeDocument/2006/relationships" id="259" r:id="Rdad5bd3d1c9f44b0"/>
-    <p:sldId xmlns:r="http://schemas.openxmlformats.org/officeDocument/2006/relationships" id="260" r:id="R78f5f5132bf84cf0"/>
-    <p:sldId xmlns:r="http://schemas.openxmlformats.org/officeDocument/2006/relationships" id="261" r:id="R36af2381c15645ca"/>
-    <p:sldId xmlns:r="http://schemas.openxmlformats.org/officeDocument/2006/relationships" id="262" r:id="R47c65a55e0614c37"/>
-    <p:sldId xmlns:r="http://schemas.openxmlformats.org/officeDocument/2006/relationships" id="263" r:id="Rdd3fe14dc3d04130"/>
-    <p:sldId xmlns:r="http://schemas.openxmlformats.org/officeDocument/2006/relationships" id="264" r:id="R3addeb948c4e42f5"/>
-    <p:sldId xmlns:r="http://schemas.openxmlformats.org/officeDocument/2006/relationships" id="265" r:id="Rfddbf0e01d3240f4"/>
-    <p:sldId xmlns:r="http://schemas.openxmlformats.org/officeDocument/2006/relationships" id="266" r:id="R2814f1d58d934808"/>
-    <p:sldId xmlns:r="http://schemas.openxmlformats.org/officeDocument/2006/relationships" id="267" r:id="Rdad4fb2045ca4e99"/>
-    <p:sldId xmlns:r="http://schemas.openxmlformats.org/officeDocument/2006/relationships" id="268" r:id="Rc605a90195f64f12"/>
-    <p:sldId xmlns:r="http://schemas.openxmlformats.org/officeDocument/2006/relationships" id="269" r:id="R79aa823696b04154"/>
-    <p:sldId xmlns:r="http://schemas.openxmlformats.org/officeDocument/2006/relationships" id="270" r:id="Rddd47e7d64724d1a"/>
-    <p:sldId xmlns:r="http://schemas.openxmlformats.org/officeDocument/2006/relationships" id="271" r:id="R14d80aee8ef34f89"/>
-    <p:sldId xmlns:r="http://schemas.openxmlformats.org/officeDocument/2006/relationships" id="272" r:id="Rf26f2e712d5f4c01"/>
-    <p:sldId xmlns:r="http://schemas.openxmlformats.org/officeDocument/2006/relationships" id="273" r:id="Re2ecdbac0a6646f5"/>
-    <p:sldId xmlns:r="http://schemas.openxmlformats.org/officeDocument/2006/relationships" id="274" r:id="Rfdeb7863339c4d6c"/>
-    <p:sldId xmlns:r="http://schemas.openxmlformats.org/officeDocument/2006/relationships" id="275" r:id="Rc9233dc61f8b421e"/>
-    <p:sldId xmlns:r="http://schemas.openxmlformats.org/officeDocument/2006/relationships" id="276" r:id="R96c53e52a6b441be"/>
+    <p:sldId xmlns:r="http://schemas.openxmlformats.org/officeDocument/2006/relationships" id="256" r:id="Rdd0b1771827c4eb6"/>
+    <p:sldId xmlns:r="http://schemas.openxmlformats.org/officeDocument/2006/relationships" id="257" r:id="R528689f63080452e"/>
+    <p:sldId xmlns:r="http://schemas.openxmlformats.org/officeDocument/2006/relationships" id="258" r:id="Re8e1728634734800"/>
+    <p:sldId xmlns:r="http://schemas.openxmlformats.org/officeDocument/2006/relationships" id="259" r:id="R5b7d03fa755d4767"/>
+    <p:sldId xmlns:r="http://schemas.openxmlformats.org/officeDocument/2006/relationships" id="260" r:id="R22f80406ce204296"/>
+    <p:sldId xmlns:r="http://schemas.openxmlformats.org/officeDocument/2006/relationships" id="261" r:id="Rf11c78988a3847b3"/>
+    <p:sldId xmlns:r="http://schemas.openxmlformats.org/officeDocument/2006/relationships" id="262" r:id="R076844d28bda4cee"/>
+    <p:sldId xmlns:r="http://schemas.openxmlformats.org/officeDocument/2006/relationships" id="263" r:id="R21c8f8d9a6f94e66"/>
+    <p:sldId xmlns:r="http://schemas.openxmlformats.org/officeDocument/2006/relationships" id="264" r:id="Ra2235403e02b4579"/>
+    <p:sldId xmlns:r="http://schemas.openxmlformats.org/officeDocument/2006/relationships" id="265" r:id="Rc8c232c0b931452c"/>
+    <p:sldId xmlns:r="http://schemas.openxmlformats.org/officeDocument/2006/relationships" id="266" r:id="Rebf4944cdcd84f5f"/>
+    <p:sldId xmlns:r="http://schemas.openxmlformats.org/officeDocument/2006/relationships" id="267" r:id="R1852a9ea7e8f4e69"/>
+    <p:sldId xmlns:r="http://schemas.openxmlformats.org/officeDocument/2006/relationships" id="268" r:id="Rd7c2ad14052e4986"/>
+    <p:sldId xmlns:r="http://schemas.openxmlformats.org/officeDocument/2006/relationships" id="269" r:id="Rc74a251e7fb34178"/>
+    <p:sldId xmlns:r="http://schemas.openxmlformats.org/officeDocument/2006/relationships" id="270" r:id="Rbd72c80095ea4638"/>
+    <p:sldId xmlns:r="http://schemas.openxmlformats.org/officeDocument/2006/relationships" id="271" r:id="R4e202b32bde643be"/>
+    <p:sldId xmlns:r="http://schemas.openxmlformats.org/officeDocument/2006/relationships" id="272" r:id="Ra202f9c1572d443d"/>
+    <p:sldId xmlns:r="http://schemas.openxmlformats.org/officeDocument/2006/relationships" id="273" r:id="Rac3e482d46d34ac7"/>
+    <p:sldId xmlns:r="http://schemas.openxmlformats.org/officeDocument/2006/relationships" id="274" r:id="R18454d994fd34d4f"/>
+    <p:sldId xmlns:r="http://schemas.openxmlformats.org/officeDocument/2006/relationships" id="275" r:id="Radd40b418c21405f"/>
+    <p:sldId xmlns:r="http://schemas.openxmlformats.org/officeDocument/2006/relationships" id="276" r:id="R41e3bfe151f5405f"/>
   </p:sldIdLst>
   <p:sldSz cx="12192000" cy="6858000"/>
   <p:notesSz cx="6858000" cy="9144000"/>
@@ -462,7 +462,7 @@
           <a:lstStyle xmlns:a="http://schemas.openxmlformats.org/drawingml/2006/main"/>
           <a:p xmlns:a="http://schemas.openxmlformats.org/drawingml/2006/main">
             <a:r>
-              <a:t>Author handle from repositoryowner, no additionalteamidentityclaimed. QR and native hyperlink target the public single-root submission repository. Viewer hyperlink targets GitHub Pages. Private research repository history is not published. Sources: jury_guide.json andreport. Retrospectivearchive2024, no independent2025facts.</a:t>
+              <a:t>Team identity provided by the user: MISIS X; participants Мещеряков Никита and Соколова Юлия. QR and native hyperlink target the public single-root submission repository. Viewer hyperlink targets GitHub Pages. Private research repository history is not published. Sources: jury_guide.json andreport. Retrospectivearchive2024, no independent2025facts.</a:t>
             </a:r>
           </a:p>
         </p:txBody>
@@ -1930,7 +1930,7 @@
   </p:cSld>
   <p:clrMap bg1="lt1" tx1="dk1" bg2="lt2" tx2="dk2" accent1="accent1" accent2="accent2" accent3="accent3" accent4="accent4" accent5="accent5" accent6="accent6" hlink="hlink" folHlink="folHlink"/>
   <p:sldLayoutIdLst>
-    <p:sldLayoutId xmlns:r="http://schemas.openxmlformats.org/officeDocument/2006/relationships" id="2147483649" r:id="R7673fcf828144471"/>
+    <p:sldLayoutId xmlns:r="http://schemas.openxmlformats.org/officeDocument/2006/relationships" id="2147483649" r:id="R9b4d6219b5d74a93"/>
   </p:sldLayoutIdLst>
   <p:txStyles>
     <p:titleStyle>
@@ -5772,10 +5772,10 @@
       </p:grpSpPr>
       <p:sp>
         <p:nvSpPr>
-          <p:cNvPr id="12" name="">
+          <p:cNvPr id="13" name="">
             <a:extLst xmlns:a="http://schemas.openxmlformats.org/drawingml/2006/main">
               <a:ext uri="{FF2B5EF4-FFF2-40B4-BE49-F238E27FC236}">
-                <a16:creationId xmlns:a16="http://schemas.microsoft.com/office/drawing/2014/main" id="{48F6DDF0-A114-4F9B-8AF0-2522D670A296}"/>
+                <a16:creationId xmlns:a16="http://schemas.microsoft.com/office/drawing/2014/main" id="{60708A03-320E-40EF-A73C-2A929D62CCF1}"/>
               </a:ext>
             </a:extLst>
           </p:cNvPr>
@@ -5855,7 +5855,7 @@
           <p:cNvPr id="2" name="">
             <a:extLst xmlns:a="http://schemas.openxmlformats.org/drawingml/2006/main">
               <a:ext uri="{FF2B5EF4-FFF2-40B4-BE49-F238E27FC236}">
-                <a16:creationId xmlns:a16="http://schemas.microsoft.com/office/drawing/2014/main" id="{1D7A3F92-A3FF-4A9D-B6AE-F9AA1C61BF1F}"/>
+                <a16:creationId xmlns:a16="http://schemas.microsoft.com/office/drawing/2014/main" id="{27B58016-07B8-41FF-82FD-6E78AA247533}"/>
               </a:ext>
             </a:extLst>
           </p:cNvPr>
@@ -5912,7 +5912,7 @@
           <p:cNvPr id="3" name="">
             <a:extLst xmlns:a="http://schemas.openxmlformats.org/drawingml/2006/main">
               <a:ext uri="{FF2B5EF4-FFF2-40B4-BE49-F238E27FC236}">
-                <a16:creationId xmlns:a16="http://schemas.microsoft.com/office/drawing/2014/main" id="{2A52DD71-BDFF-4776-BFD2-A6768ADDCD99}"/>
+                <a16:creationId xmlns:a16="http://schemas.microsoft.com/office/drawing/2014/main" id="{EBC27D95-0E2F-437D-B363-823C18F2B0A1}"/>
               </a:ext>
             </a:extLst>
           </p:cNvPr>
@@ -5969,7 +5969,7 @@
           <p:cNvPr id="4" name="">
             <a:extLst xmlns:a="http://schemas.openxmlformats.org/drawingml/2006/main">
               <a:ext uri="{FF2B5EF4-FFF2-40B4-BE49-F238E27FC236}">
-                <a16:creationId xmlns:a16="http://schemas.microsoft.com/office/drawing/2014/main" id="{1EB0C12A-2880-476A-BF52-5F8CD4D4EDA5}"/>
+                <a16:creationId xmlns:a16="http://schemas.microsoft.com/office/drawing/2014/main" id="{76D1B231-A66E-47F0-8C41-2E668740E7CC}"/>
               </a:ext>
             </a:extLst>
           </p:cNvPr>
@@ -5981,7 +5981,7 @@
         <p:spPr>
           <a:xfrm xmlns:a="http://schemas.openxmlformats.org/drawingml/2006/main">
             <a:off x="609600" y="2333625"/>
-            <a:ext cx="8858250" cy="419100"/>
+            <a:ext cx="8858250" cy="381000"/>
           </a:xfrm>
           <a:prstGeom xmlns:a="http://schemas.openxmlformats.org/drawingml/2006/main" prst="rect">
             <a:avLst/>
@@ -5998,7 +5998,7 @@
           <a:lstStyle xmlns:a="http://schemas.openxmlformats.org/drawingml/2006/main"/>
           <a:p xmlns:a="http://schemas.openxmlformats.org/drawingml/2006/main">
             <a:pPr>
-              <a:defRPr sz="1875" b="0">
+              <a:defRPr sz="2100" b="1">
                 <a:solidFill>
                   <a:srgbClr val="183B32"/>
                 </a:solidFill>
@@ -6008,7 +6008,7 @@
               </a:defRPr>
             </a:pPr>
             <a:r>
-              <a:rPr sz="1875" b="0">
+              <a:rPr sz="2100" b="1">
                 <a:solidFill>
                   <a:srgbClr val="183B32"/>
                 </a:solidFill>
@@ -6016,7 +6016,7 @@
                 <a:ea typeface="Noto Sans"/>
                 <a:cs typeface="Noto Sans"/>
               </a:rPr>
-              <a:t>Автор проекта: NikitaMeshDS</a:t>
+              <a:t>Команда MISIS X</a:t>
             </a:r>
           </a:p>
         </p:txBody>
@@ -6026,7 +6026,64 @@
           <p:cNvPr id="5" name="">
             <a:extLst xmlns:a="http://schemas.openxmlformats.org/drawingml/2006/main">
               <a:ext uri="{FF2B5EF4-FFF2-40B4-BE49-F238E27FC236}">
-                <a16:creationId xmlns:a16="http://schemas.microsoft.com/office/drawing/2014/main" id="{98AA101B-E527-42AC-ADDD-9FCBF8B20287}"/>
+                <a16:creationId xmlns:a16="http://schemas.microsoft.com/office/drawing/2014/main" id="{F059652C-3200-411D-ABFE-8A8DE2BD3595}"/>
+              </a:ext>
+            </a:extLst>
+          </p:cNvPr>
+          <p:cNvSpPr>
+            <a:spLocks xmlns:a="http://schemas.openxmlformats.org/drawingml/2006/main" noGrp="1"/>
+          </p:cNvSpPr>
+          <p:nvPr/>
+        </p:nvSpPr>
+        <p:spPr>
+          <a:xfrm xmlns:a="http://schemas.openxmlformats.org/drawingml/2006/main">
+            <a:off x="609600" y="2733675"/>
+            <a:ext cx="8858250" cy="323850"/>
+          </a:xfrm>
+          <a:prstGeom xmlns:a="http://schemas.openxmlformats.org/drawingml/2006/main" prst="rect">
+            <a:avLst/>
+          </a:prstGeom>
+          <a:noFill xmlns:a="http://schemas.openxmlformats.org/drawingml/2006/main"/>
+          <a:ln xmlns:a="http://schemas.openxmlformats.org/drawingml/2006/main" w="0">
+            <a:noFill/>
+          </a:ln>
+        </p:spPr>
+        <p:txBody>
+          <a:bodyPr xmlns:a="http://schemas.openxmlformats.org/drawingml/2006/main">
+            <a:noAutofit/>
+          </a:bodyPr>
+          <a:lstStyle xmlns:a="http://schemas.openxmlformats.org/drawingml/2006/main"/>
+          <a:p xmlns:a="http://schemas.openxmlformats.org/drawingml/2006/main">
+            <a:pPr>
+              <a:defRPr sz="1725" b="0">
+                <a:solidFill>
+                  <a:srgbClr val="183B32"/>
+                </a:solidFill>
+                <a:latin typeface="Noto Sans"/>
+                <a:ea typeface="Noto Sans"/>
+                <a:cs typeface="Noto Sans"/>
+              </a:defRPr>
+            </a:pPr>
+            <a:r>
+              <a:rPr sz="1725" b="0">
+                <a:solidFill>
+                  <a:srgbClr val="183B32"/>
+                </a:solidFill>
+                <a:latin typeface="Noto Sans"/>
+                <a:ea typeface="Noto Sans"/>
+                <a:cs typeface="Noto Sans"/>
+              </a:rPr>
+              <a:t>Участники: Мещеряков Никита · Соколова Юлия</a:t>
+            </a:r>
+          </a:p>
+        </p:txBody>
+      </p:sp>
+      <p:sp>
+        <p:nvSpPr>
+          <p:cNvPr id="6" name="">
+            <a:extLst xmlns:a="http://schemas.openxmlformats.org/drawingml/2006/main">
+              <a:ext uri="{FF2B5EF4-FFF2-40B4-BE49-F238E27FC236}">
+                <a16:creationId xmlns:a16="http://schemas.microsoft.com/office/drawing/2014/main" id="{2AE1326D-8F78-44C2-8E8D-7EE0AFFEE4DC}"/>
               </a:ext>
             </a:extLst>
           </p:cNvPr>
@@ -6080,10 +6137,10 @@
       </p:sp>
       <p:sp>
         <p:nvSpPr>
-          <p:cNvPr id="6" name="">
+          <p:cNvPr id="7" name="">
             <a:extLst xmlns:a="http://schemas.openxmlformats.org/drawingml/2006/main">
               <a:ext uri="{FF2B5EF4-FFF2-40B4-BE49-F238E27FC236}">
-                <a16:creationId xmlns:a16="http://schemas.microsoft.com/office/drawing/2014/main" id="{BFBC08D5-0EF1-4288-B213-13B7D1E871BF}"/>
+                <a16:creationId xmlns:a16="http://schemas.microsoft.com/office/drawing/2014/main" id="{A95A2CE8-5EC6-4B7E-B11B-D77B2646064D}"/>
               </a:ext>
             </a:extLst>
           </p:cNvPr>
@@ -6160,10 +6217,10 @@
       </p:sp>
       <p:sp>
         <p:nvSpPr>
-          <p:cNvPr id="7" name="">
+          <p:cNvPr id="8" name="">
             <a:extLst xmlns:a="http://schemas.openxmlformats.org/drawingml/2006/main">
               <a:ext uri="{FF2B5EF4-FFF2-40B4-BE49-F238E27FC236}">
-                <a16:creationId xmlns:a16="http://schemas.microsoft.com/office/drawing/2014/main" id="{8791ADD8-AC4E-48A4-937C-278861AA2D8E}"/>
+                <a16:creationId xmlns:a16="http://schemas.microsoft.com/office/drawing/2014/main" id="{B7C6D402-6A3C-4C45-888F-E75D53D5924E}"/>
               </a:ext>
             </a:extLst>
           </p:cNvPr>
@@ -6209,7 +6266,7 @@
                 <a:latin typeface="Noto Sans"/>
                 <a:ea typeface="Noto Sans"/>
                 <a:cs typeface="Noto Sans"/>
-                <a:hlinkClick xmlns:r="http://schemas.openxmlformats.org/officeDocument/2006/relationships" r:id="Rc46484955b9447b8"/>
+                <a:hlinkClick xmlns:r="http://schemas.openxmlformats.org/officeDocument/2006/relationships" r:id="R48d84175b0864ed1"/>
               </a:rPr>
               <a:t>github.com/NikitaMeshDS/sberindex-task2</a:t>
             </a:r>
@@ -6218,10 +6275,10 @@
       </p:sp>
       <p:sp>
         <p:nvSpPr>
-          <p:cNvPr id="8" name="">
+          <p:cNvPr id="9" name="">
             <a:extLst xmlns:a="http://schemas.openxmlformats.org/drawingml/2006/main">
               <a:ext uri="{FF2B5EF4-FFF2-40B4-BE49-F238E27FC236}">
-                <a16:creationId xmlns:a16="http://schemas.microsoft.com/office/drawing/2014/main" id="{5841C003-AA78-4855-9884-54313B6F3F29}"/>
+                <a16:creationId xmlns:a16="http://schemas.microsoft.com/office/drawing/2014/main" id="{87583243-40DF-4BB5-A4F2-020382499267}"/>
               </a:ext>
             </a:extLst>
           </p:cNvPr>
@@ -6267,7 +6324,7 @@
                 <a:latin typeface="Noto Sans"/>
                 <a:ea typeface="Noto Sans"/>
                 <a:cs typeface="Noto Sans"/>
-                <a:hlinkClick xmlns:r="http://schemas.openxmlformats.org/officeDocument/2006/relationships" r:id="R4ccbbe2cfd60433f"/>
+                <a:hlinkClick xmlns:r="http://schemas.openxmlformats.org/officeDocument/2006/relationships" r:id="R1417d7490870419a"/>
               </a:rPr>
               <a:t>nikitameshds.github.io/sberindex-task2</a:t>
             </a:r>
@@ -6276,14 +6333,14 @@
       </p:sp>
       <p:pic>
         <p:nvPicPr>
-          <p:cNvPr id="20" name=""/>
+          <p:cNvPr id="22" name=""/>
           <p:cNvPicPr>
             <a:picLocks xmlns:a="http://schemas.openxmlformats.org/drawingml/2006/main" noChangeAspect="1"/>
           </p:cNvPicPr>
           <p:nvPr/>
         </p:nvPicPr>
         <p:blipFill>
-          <a:blip xmlns:r="http://schemas.openxmlformats.org/officeDocument/2006/relationships" xmlns:a="http://schemas.openxmlformats.org/drawingml/2006/main" r:embed="R2caf6fc97860496d"/>
+          <a:blip xmlns:r="http://schemas.openxmlformats.org/officeDocument/2006/relationships" xmlns:a="http://schemas.openxmlformats.org/drawingml/2006/main" r:embed="Re09aa9e4fcbb4a48"/>
           <a:stretch xmlns:a="http://schemas.openxmlformats.org/drawingml/2006/main"/>
         </p:blipFill>
         <p:spPr>
@@ -6298,10 +6355,10 @@
       </p:pic>
       <p:sp>
         <p:nvSpPr>
-          <p:cNvPr id="10" name="">
+          <p:cNvPr id="11" name="">
             <a:extLst xmlns:a="http://schemas.openxmlformats.org/drawingml/2006/main">
               <a:ext uri="{FF2B5EF4-FFF2-40B4-BE49-F238E27FC236}">
-                <a16:creationId xmlns:a16="http://schemas.microsoft.com/office/drawing/2014/main" id="{81F62DF4-55FE-4DE3-834E-328D9F70B752}"/>
+                <a16:creationId xmlns:a16="http://schemas.microsoft.com/office/drawing/2014/main" id="{61D00252-13B9-47DF-9875-1B87A899343A}"/>
               </a:ext>
             </a:extLst>
           </p:cNvPr>
@@ -6355,10 +6412,10 @@
       </p:sp>
       <p:sp>
         <p:nvSpPr>
-          <p:cNvPr id="11" name="">
+          <p:cNvPr id="12" name="">
             <a:extLst xmlns:a="http://schemas.openxmlformats.org/drawingml/2006/main">
               <a:ext uri="{FF2B5EF4-FFF2-40B4-BE49-F238E27FC236}">
-                <a16:creationId xmlns:a16="http://schemas.microsoft.com/office/drawing/2014/main" id="{45E6FCAA-8FA9-4139-B558-09F58C81AA8D}"/>
+                <a16:creationId xmlns:a16="http://schemas.microsoft.com/office/drawing/2014/main" id="{77C6A4A1-5478-4FE7-906B-B61C8C64DB6E}"/>
               </a:ext>
             </a:extLst>
           </p:cNvPr>
@@ -6413,7 +6470,7 @@
     </p:spTree>
     <p:extLst>
       <p:ext uri="{BB962C8B-B14F-4D97-AF65-F5344CB8AC3E}">
-        <p14:creationId xmlns:p14="http://schemas.microsoft.com/office/powerpoint/2010/main" val="423088871"/>
+        <p14:creationId xmlns:p14="http://schemas.microsoft.com/office/powerpoint/2010/main" val="633032130"/>
       </p:ext>
     </p:extLst>
   </p:cSld>
@@ -6444,7 +6501,7 @@
           <p:cNvPr id="6" name="">
             <a:extLst xmlns:a="http://schemas.openxmlformats.org/drawingml/2006/main">
               <a:ext uri="{FF2B5EF4-FFF2-40B4-BE49-F238E27FC236}">
-                <a16:creationId xmlns:a16="http://schemas.microsoft.com/office/drawing/2014/main" id="{CC17F88F-0C50-481F-8F4A-39382648C72F}"/>
+                <a16:creationId xmlns:a16="http://schemas.microsoft.com/office/drawing/2014/main" id="{94FCCB5A-EF69-490D-8AC2-B92E8BC7FEEA}"/>
               </a:ext>
             </a:extLst>
           </p:cNvPr>
@@ -6501,7 +6558,7 @@
           <p:cNvPr id="2" name="">
             <a:extLst xmlns:a="http://schemas.openxmlformats.org/drawingml/2006/main">
               <a:ext uri="{FF2B5EF4-FFF2-40B4-BE49-F238E27FC236}">
-                <a16:creationId xmlns:a16="http://schemas.microsoft.com/office/drawing/2014/main" id="{F936730E-A1B1-48CA-B171-E63FD15891AD}"/>
+                <a16:creationId xmlns:a16="http://schemas.microsoft.com/office/drawing/2014/main" id="{1572480F-F508-49D5-A46B-9310A954DAB1}"/>
               </a:ext>
             </a:extLst>
           </p:cNvPr>
@@ -6558,7 +6615,7 @@
           <p:cNvPr id="3" name="">
             <a:extLst xmlns:a="http://schemas.openxmlformats.org/drawingml/2006/main">
               <a:ext uri="{FF2B5EF4-FFF2-40B4-BE49-F238E27FC236}">
-                <a16:creationId xmlns:a16="http://schemas.microsoft.com/office/drawing/2014/main" id="{605D8F6B-358C-4204-90AB-1EB8D7EAE0C7}"/>
+                <a16:creationId xmlns:a16="http://schemas.microsoft.com/office/drawing/2014/main" id="{D3CBC248-6406-48AF-BF98-17D493B80EF8}"/>
               </a:ext>
             </a:extLst>
           </p:cNvPr>
@@ -7982,7 +8039,7 @@
           <p:cNvPr id="5" name="">
             <a:extLst xmlns:a="http://schemas.openxmlformats.org/drawingml/2006/main">
               <a:ext uri="{FF2B5EF4-FFF2-40B4-BE49-F238E27FC236}">
-                <a16:creationId xmlns:a16="http://schemas.microsoft.com/office/drawing/2014/main" id="{F94A898A-138B-4F19-BF19-25CBB49086B6}"/>
+                <a16:creationId xmlns:a16="http://schemas.microsoft.com/office/drawing/2014/main" id="{9E6E5064-B6E4-4139-9502-8B1982F9F1A6}"/>
               </a:ext>
             </a:extLst>
           </p:cNvPr>
@@ -8060,7 +8117,7 @@
     </p:spTree>
     <p:extLst>
       <p:ext uri="{BB962C8B-B14F-4D97-AF65-F5344CB8AC3E}">
-        <p14:creationId xmlns:p14="http://schemas.microsoft.com/office/powerpoint/2010/main" val="468173533"/>
+        <p14:creationId xmlns:p14="http://schemas.microsoft.com/office/powerpoint/2010/main" val="415127506"/>
       </p:ext>
     </p:extLst>
   </p:cSld>
@@ -8091,7 +8148,7 @@
           <p:cNvPr id="8" name="">
             <a:extLst xmlns:a="http://schemas.openxmlformats.org/drawingml/2006/main">
               <a:ext uri="{FF2B5EF4-FFF2-40B4-BE49-F238E27FC236}">
-                <a16:creationId xmlns:a16="http://schemas.microsoft.com/office/drawing/2014/main" id="{0F44F672-0BC0-4511-89D2-62AA6C9FD19F}"/>
+                <a16:creationId xmlns:a16="http://schemas.microsoft.com/office/drawing/2014/main" id="{4A4DC368-BE63-47B8-BBD8-9DA278FEE1C4}"/>
               </a:ext>
             </a:extLst>
           </p:cNvPr>
@@ -8148,7 +8205,7 @@
           <p:cNvPr id="2" name="">
             <a:extLst xmlns:a="http://schemas.openxmlformats.org/drawingml/2006/main">
               <a:ext uri="{FF2B5EF4-FFF2-40B4-BE49-F238E27FC236}">
-                <a16:creationId xmlns:a16="http://schemas.microsoft.com/office/drawing/2014/main" id="{32D4F2D1-B9C4-4CAA-B25F-D127D42D0A98}"/>
+                <a16:creationId xmlns:a16="http://schemas.microsoft.com/office/drawing/2014/main" id="{4F3F17FC-0B82-4F80-8E57-2A0C17DD6CA2}"/>
               </a:ext>
             </a:extLst>
           </p:cNvPr>
@@ -8205,7 +8262,7 @@
           <p:cNvPr id="3" name="">
             <a:extLst xmlns:a="http://schemas.openxmlformats.org/drawingml/2006/main">
               <a:ext uri="{FF2B5EF4-FFF2-40B4-BE49-F238E27FC236}">
-                <a16:creationId xmlns:a16="http://schemas.microsoft.com/office/drawing/2014/main" id="{E4C59730-0F36-4127-AD0E-B662C4349F70}"/>
+                <a16:creationId xmlns:a16="http://schemas.microsoft.com/office/drawing/2014/main" id="{94ACAE73-1C23-47A8-BF72-B2C77D8E8FE2}"/>
               </a:ext>
             </a:extLst>
           </p:cNvPr>
@@ -8262,7 +8319,7 @@
           <p:cNvPr id="4" name="">
             <a:extLst xmlns:a="http://schemas.openxmlformats.org/drawingml/2006/main">
               <a:ext uri="{FF2B5EF4-FFF2-40B4-BE49-F238E27FC236}">
-                <a16:creationId xmlns:a16="http://schemas.microsoft.com/office/drawing/2014/main" id="{E818C236-D4BD-46B8-AA68-0E09DD798FA6}"/>
+                <a16:creationId xmlns:a16="http://schemas.microsoft.com/office/drawing/2014/main" id="{6B329667-9CB8-4AA2-BA8B-5F3D8CAE4E1F}"/>
               </a:ext>
             </a:extLst>
           </p:cNvPr>
@@ -8319,7 +8376,7 @@
           <p:cNvPr id="5" name="">
             <a:extLst xmlns:a="http://schemas.openxmlformats.org/drawingml/2006/main">
               <a:ext uri="{FF2B5EF4-FFF2-40B4-BE49-F238E27FC236}">
-                <a16:creationId xmlns:a16="http://schemas.microsoft.com/office/drawing/2014/main" id="{DF236B98-315B-4E11-BB46-EA9317BAE068}"/>
+                <a16:creationId xmlns:a16="http://schemas.microsoft.com/office/drawing/2014/main" id="{67E25411-E948-4239-9A68-CE6284F3ED98}"/>
               </a:ext>
             </a:extLst>
           </p:cNvPr>
@@ -8483,7 +8540,7 @@
           <p:cNvPr id="6" name="">
             <a:extLst xmlns:a="http://schemas.openxmlformats.org/drawingml/2006/main">
               <a:ext uri="{FF2B5EF4-FFF2-40B4-BE49-F238E27FC236}">
-                <a16:creationId xmlns:a16="http://schemas.microsoft.com/office/drawing/2014/main" id="{A12583D1-B50A-4810-981C-8DDD225C2F05}"/>
+                <a16:creationId xmlns:a16="http://schemas.microsoft.com/office/drawing/2014/main" id="{93B98B8A-2576-4ECA-B5F0-E803A327282F}"/>
               </a:ext>
             </a:extLst>
           </p:cNvPr>
@@ -8540,7 +8597,7 @@
           <p:cNvPr id="7" name="">
             <a:extLst xmlns:a="http://schemas.openxmlformats.org/drawingml/2006/main">
               <a:ext uri="{FF2B5EF4-FFF2-40B4-BE49-F238E27FC236}">
-                <a16:creationId xmlns:a16="http://schemas.microsoft.com/office/drawing/2014/main" id="{8340414C-7EEC-4048-A25D-8A7F5F0A7C02}"/>
+                <a16:creationId xmlns:a16="http://schemas.microsoft.com/office/drawing/2014/main" id="{5382C60B-D133-4906-A1AA-CC120C759EE9}"/>
               </a:ext>
             </a:extLst>
           </p:cNvPr>
@@ -8702,7 +8759,7 @@
     </p:spTree>
     <p:extLst>
       <p:ext uri="{BB962C8B-B14F-4D97-AF65-F5344CB8AC3E}">
-        <p14:creationId xmlns:p14="http://schemas.microsoft.com/office/powerpoint/2010/main" val="420725632"/>
+        <p14:creationId xmlns:p14="http://schemas.microsoft.com/office/powerpoint/2010/main" val="796232433"/>
       </p:ext>
     </p:extLst>
   </p:cSld>
@@ -8733,7 +8790,7 @@
           <p:cNvPr id="16" name="">
             <a:extLst xmlns:a="http://schemas.openxmlformats.org/drawingml/2006/main">
               <a:ext uri="{FF2B5EF4-FFF2-40B4-BE49-F238E27FC236}">
-                <a16:creationId xmlns:a16="http://schemas.microsoft.com/office/drawing/2014/main" id="{D0F35E62-B833-4321-AE78-ABC144C103AA}"/>
+                <a16:creationId xmlns:a16="http://schemas.microsoft.com/office/drawing/2014/main" id="{5AA9C3A1-E183-468F-B4EE-0AEBC2A58C67}"/>
               </a:ext>
             </a:extLst>
           </p:cNvPr>
@@ -8790,7 +8847,7 @@
           <p:cNvPr id="2" name="">
             <a:extLst xmlns:a="http://schemas.openxmlformats.org/drawingml/2006/main">
               <a:ext uri="{FF2B5EF4-FFF2-40B4-BE49-F238E27FC236}">
-                <a16:creationId xmlns:a16="http://schemas.microsoft.com/office/drawing/2014/main" id="{112FA9C3-8EC9-41A7-8569-58661E42B2FC}"/>
+                <a16:creationId xmlns:a16="http://schemas.microsoft.com/office/drawing/2014/main" id="{73C47CAF-5221-42F3-9CF5-7155FAC1BCE7}"/>
               </a:ext>
             </a:extLst>
           </p:cNvPr>
@@ -8847,7 +8904,7 @@
           <p:cNvPr id="3" name="">
             <a:extLst xmlns:a="http://schemas.openxmlformats.org/drawingml/2006/main">
               <a:ext uri="{FF2B5EF4-FFF2-40B4-BE49-F238E27FC236}">
-                <a16:creationId xmlns:a16="http://schemas.microsoft.com/office/drawing/2014/main" id="{6D671369-DF27-45C7-8F9E-038E377FD754}"/>
+                <a16:creationId xmlns:a16="http://schemas.microsoft.com/office/drawing/2014/main" id="{DD051AF4-AE03-4950-B1FD-FADA1AE54875}"/>
               </a:ext>
             </a:extLst>
           </p:cNvPr>
@@ -8904,7 +8961,7 @@
           <p:cNvPr id="4" name="">
             <a:extLst xmlns:a="http://schemas.openxmlformats.org/drawingml/2006/main">
               <a:ext uri="{FF2B5EF4-FFF2-40B4-BE49-F238E27FC236}">
-                <a16:creationId xmlns:a16="http://schemas.microsoft.com/office/drawing/2014/main" id="{FC5A8028-D58B-4280-9334-B141925E1CC0}"/>
+                <a16:creationId xmlns:a16="http://schemas.microsoft.com/office/drawing/2014/main" id="{50C13B8E-964F-4A20-9F05-653BEB47BC52}"/>
               </a:ext>
             </a:extLst>
           </p:cNvPr>
@@ -8961,7 +9018,7 @@
           <p:cNvPr id="5" name="">
             <a:extLst xmlns:a="http://schemas.openxmlformats.org/drawingml/2006/main">
               <a:ext uri="{FF2B5EF4-FFF2-40B4-BE49-F238E27FC236}">
-                <a16:creationId xmlns:a16="http://schemas.microsoft.com/office/drawing/2014/main" id="{CEBFB54C-C0B5-4507-A2CE-0D728EF62013}"/>
+                <a16:creationId xmlns:a16="http://schemas.microsoft.com/office/drawing/2014/main" id="{04848CDC-F089-4D0D-985E-2089E9190843}"/>
               </a:ext>
             </a:extLst>
           </p:cNvPr>
@@ -9025,7 +9082,7 @@
         </p:xfrm>
         <a:graphic xmlns:a="http://schemas.openxmlformats.org/drawingml/2006/main">
           <a:graphicData uri="http://schemas.openxmlformats.org/drawingml/2006/chart">
-            <c:chart xmlns:r="http://schemas.openxmlformats.org/officeDocument/2006/relationships" xmlns:c="http://schemas.openxmlformats.org/drawingml/2006/chart" r:id="R314967f50148430d"/>
+            <c:chart xmlns:r="http://schemas.openxmlformats.org/officeDocument/2006/relationships" xmlns:c="http://schemas.openxmlformats.org/drawingml/2006/chart" r:id="Rd765b13eea1347b7"/>
           </a:graphicData>
         </a:graphic>
       </p:graphicFrame>
@@ -9034,7 +9091,7 @@
           <p:cNvPr id="7" name="">
             <a:extLst xmlns:a="http://schemas.openxmlformats.org/drawingml/2006/main">
               <a:ext uri="{FF2B5EF4-FFF2-40B4-BE49-F238E27FC236}">
-                <a16:creationId xmlns:a16="http://schemas.microsoft.com/office/drawing/2014/main" id="{F4F649ED-20F2-4CD1-A661-629DB0256364}"/>
+                <a16:creationId xmlns:a16="http://schemas.microsoft.com/office/drawing/2014/main" id="{D4DC52FD-3FB8-4283-8293-7642700FD122}"/>
               </a:ext>
             </a:extLst>
           </p:cNvPr>
@@ -9091,7 +9148,7 @@
           <p:cNvPr id="8" name="">
             <a:extLst xmlns:a="http://schemas.openxmlformats.org/drawingml/2006/main">
               <a:ext uri="{FF2B5EF4-FFF2-40B4-BE49-F238E27FC236}">
-                <a16:creationId xmlns:a16="http://schemas.microsoft.com/office/drawing/2014/main" id="{70A9F71C-83CC-4333-8CF3-F4BDAA092758}"/>
+                <a16:creationId xmlns:a16="http://schemas.microsoft.com/office/drawing/2014/main" id="{63E7FEE9-D953-4D11-83AF-819250237195}"/>
               </a:ext>
             </a:extLst>
           </p:cNvPr>
@@ -9155,7 +9212,7 @@
         </p:xfrm>
         <a:graphic xmlns:a="http://schemas.openxmlformats.org/drawingml/2006/main">
           <a:graphicData uri="http://schemas.openxmlformats.org/drawingml/2006/chart">
-            <c:chart xmlns:r="http://schemas.openxmlformats.org/officeDocument/2006/relationships" xmlns:c="http://schemas.openxmlformats.org/drawingml/2006/chart" r:id="R7c8b7646f8344f30"/>
+            <c:chart xmlns:r="http://schemas.openxmlformats.org/officeDocument/2006/relationships" xmlns:c="http://schemas.openxmlformats.org/drawingml/2006/chart" r:id="R059fbba1b00642a2"/>
           </a:graphicData>
         </a:graphic>
       </p:graphicFrame>
@@ -9164,7 +9221,7 @@
           <p:cNvPr id="10" name="">
             <a:extLst xmlns:a="http://schemas.openxmlformats.org/drawingml/2006/main">
               <a:ext uri="{FF2B5EF4-FFF2-40B4-BE49-F238E27FC236}">
-                <a16:creationId xmlns:a16="http://schemas.microsoft.com/office/drawing/2014/main" id="{4F0C7815-1F64-455C-BC12-188AAA05EE14}"/>
+                <a16:creationId xmlns:a16="http://schemas.microsoft.com/office/drawing/2014/main" id="{38B955EB-A69C-49C9-AD92-7D6CEBC03AF5}"/>
               </a:ext>
             </a:extLst>
           </p:cNvPr>
@@ -9221,7 +9278,7 @@
           <p:cNvPr id="11" name="">
             <a:extLst xmlns:a="http://schemas.openxmlformats.org/drawingml/2006/main">
               <a:ext uri="{FF2B5EF4-FFF2-40B4-BE49-F238E27FC236}">
-                <a16:creationId xmlns:a16="http://schemas.microsoft.com/office/drawing/2014/main" id="{54CE2ED1-CAF1-4D6A-84BB-E4BB44CECB48}"/>
+                <a16:creationId xmlns:a16="http://schemas.microsoft.com/office/drawing/2014/main" id="{A837B176-3BA6-4FD9-82BA-95E30FBCA5EA}"/>
               </a:ext>
             </a:extLst>
           </p:cNvPr>
@@ -9285,7 +9342,7 @@
         </p:xfrm>
         <a:graphic xmlns:a="http://schemas.openxmlformats.org/drawingml/2006/main">
           <a:graphicData uri="http://schemas.openxmlformats.org/drawingml/2006/chart">
-            <c:chart xmlns:r="http://schemas.openxmlformats.org/officeDocument/2006/relationships" xmlns:c="http://schemas.openxmlformats.org/drawingml/2006/chart" r:id="Re028683c8ac14231"/>
+            <c:chart xmlns:r="http://schemas.openxmlformats.org/officeDocument/2006/relationships" xmlns:c="http://schemas.openxmlformats.org/drawingml/2006/chart" r:id="Rfff43c597ec04674"/>
           </a:graphicData>
         </a:graphic>
       </p:graphicFrame>
@@ -9294,7 +9351,7 @@
           <p:cNvPr id="13" name="">
             <a:extLst xmlns:a="http://schemas.openxmlformats.org/drawingml/2006/main">
               <a:ext uri="{FF2B5EF4-FFF2-40B4-BE49-F238E27FC236}">
-                <a16:creationId xmlns:a16="http://schemas.microsoft.com/office/drawing/2014/main" id="{5846937D-9F72-489B-AE57-6BAA713B0589}"/>
+                <a16:creationId xmlns:a16="http://schemas.microsoft.com/office/drawing/2014/main" id="{68082F84-A409-41E6-AACA-849F81C861BB}"/>
               </a:ext>
             </a:extLst>
           </p:cNvPr>
@@ -9324,7 +9381,7 @@
           <p:cNvPr id="14" name="">
             <a:extLst xmlns:a="http://schemas.openxmlformats.org/drawingml/2006/main">
               <a:ext uri="{FF2B5EF4-FFF2-40B4-BE49-F238E27FC236}">
-                <a16:creationId xmlns:a16="http://schemas.microsoft.com/office/drawing/2014/main" id="{52268BF4-39A1-412F-9745-AEEAEEA3107C}"/>
+                <a16:creationId xmlns:a16="http://schemas.microsoft.com/office/drawing/2014/main" id="{AB38786C-F92E-4D9A-832A-F572308F3DC9}"/>
               </a:ext>
             </a:extLst>
           </p:cNvPr>
@@ -9381,7 +9438,7 @@
           <p:cNvPr id="15" name="">
             <a:extLst xmlns:a="http://schemas.openxmlformats.org/drawingml/2006/main">
               <a:ext uri="{FF2B5EF4-FFF2-40B4-BE49-F238E27FC236}">
-                <a16:creationId xmlns:a16="http://schemas.microsoft.com/office/drawing/2014/main" id="{32CDC249-02B6-44B5-9B8E-3B8450FFCF34}"/>
+                <a16:creationId xmlns:a16="http://schemas.microsoft.com/office/drawing/2014/main" id="{15479A89-681B-46AB-A914-685DC6AF4303}"/>
               </a:ext>
             </a:extLst>
           </p:cNvPr>
@@ -9436,7 +9493,7 @@
     </p:spTree>
     <p:extLst>
       <p:ext uri="{BB962C8B-B14F-4D97-AF65-F5344CB8AC3E}">
-        <p14:creationId xmlns:p14="http://schemas.microsoft.com/office/powerpoint/2010/main" val="653710919"/>
+        <p14:creationId xmlns:p14="http://schemas.microsoft.com/office/powerpoint/2010/main" val="1145470438"/>
       </p:ext>
     </p:extLst>
   </p:cSld>
@@ -9467,7 +9524,7 @@
           <p:cNvPr id="8" name="">
             <a:extLst xmlns:a="http://schemas.openxmlformats.org/drawingml/2006/main">
               <a:ext uri="{FF2B5EF4-FFF2-40B4-BE49-F238E27FC236}">
-                <a16:creationId xmlns:a16="http://schemas.microsoft.com/office/drawing/2014/main" id="{CBC2E274-A030-4AF4-A8F5-92630DDD7C14}"/>
+                <a16:creationId xmlns:a16="http://schemas.microsoft.com/office/drawing/2014/main" id="{6D1D6734-D56E-42A7-BDE8-BFBEF8EEA7EE}"/>
               </a:ext>
             </a:extLst>
           </p:cNvPr>
@@ -9524,7 +9581,7 @@
           <p:cNvPr id="2" name="">
             <a:extLst xmlns:a="http://schemas.openxmlformats.org/drawingml/2006/main">
               <a:ext uri="{FF2B5EF4-FFF2-40B4-BE49-F238E27FC236}">
-                <a16:creationId xmlns:a16="http://schemas.microsoft.com/office/drawing/2014/main" id="{7391AF1C-9402-4A82-93D9-D43F03850039}"/>
+                <a16:creationId xmlns:a16="http://schemas.microsoft.com/office/drawing/2014/main" id="{A9FBE38C-E431-4144-BE63-8FB5C78D5008}"/>
               </a:ext>
             </a:extLst>
           </p:cNvPr>
@@ -9581,7 +9638,7 @@
           <p:cNvPr id="3" name="">
             <a:extLst xmlns:a="http://schemas.openxmlformats.org/drawingml/2006/main">
               <a:ext uri="{FF2B5EF4-FFF2-40B4-BE49-F238E27FC236}">
-                <a16:creationId xmlns:a16="http://schemas.microsoft.com/office/drawing/2014/main" id="{E2D598AF-3A20-4346-8178-F31D9CCDF8E4}"/>
+                <a16:creationId xmlns:a16="http://schemas.microsoft.com/office/drawing/2014/main" id="{876BEC77-A028-46AF-9948-B221BF29974D}"/>
               </a:ext>
             </a:extLst>
           </p:cNvPr>
@@ -9645,7 +9702,7 @@
         </p:xfrm>
         <a:graphic xmlns:a="http://schemas.openxmlformats.org/drawingml/2006/main">
           <a:graphicData uri="http://schemas.openxmlformats.org/drawingml/2006/chart">
-            <c:chart xmlns:r="http://schemas.openxmlformats.org/officeDocument/2006/relationships" xmlns:c="http://schemas.openxmlformats.org/drawingml/2006/chart" r:id="R29dd2b272e194129"/>
+            <c:chart xmlns:r="http://schemas.openxmlformats.org/officeDocument/2006/relationships" xmlns:c="http://schemas.openxmlformats.org/drawingml/2006/chart" r:id="R2bbd0ad31a6c4053"/>
           </a:graphicData>
         </a:graphic>
       </p:graphicFrame>
@@ -10560,7 +10617,7 @@
           <p:cNvPr id="6" name="">
             <a:extLst xmlns:a="http://schemas.openxmlformats.org/drawingml/2006/main">
               <a:ext uri="{FF2B5EF4-FFF2-40B4-BE49-F238E27FC236}">
-                <a16:creationId xmlns:a16="http://schemas.microsoft.com/office/drawing/2014/main" id="{EFC18465-8519-4FE5-924F-7332EE646C1F}"/>
+                <a16:creationId xmlns:a16="http://schemas.microsoft.com/office/drawing/2014/main" id="{6F7D29C6-894C-421A-B729-088A99CF97FA}"/>
               </a:ext>
             </a:extLst>
           </p:cNvPr>
@@ -10617,7 +10674,7 @@
           <p:cNvPr id="7" name="">
             <a:extLst xmlns:a="http://schemas.openxmlformats.org/drawingml/2006/main">
               <a:ext uri="{FF2B5EF4-FFF2-40B4-BE49-F238E27FC236}">
-                <a16:creationId xmlns:a16="http://schemas.microsoft.com/office/drawing/2014/main" id="{6F1D9C5E-E513-4A71-AE86-8A2534A867F1}"/>
+                <a16:creationId xmlns:a16="http://schemas.microsoft.com/office/drawing/2014/main" id="{4763CE60-59C8-4DEF-87CC-1D07B5D22F8B}"/>
               </a:ext>
             </a:extLst>
           </p:cNvPr>
@@ -10695,7 +10752,7 @@
     </p:spTree>
     <p:extLst>
       <p:ext uri="{BB962C8B-B14F-4D97-AF65-F5344CB8AC3E}">
-        <p14:creationId xmlns:p14="http://schemas.microsoft.com/office/powerpoint/2010/main" val="1030765572"/>
+        <p14:creationId xmlns:p14="http://schemas.microsoft.com/office/powerpoint/2010/main" val="909954745"/>
       </p:ext>
     </p:extLst>
   </p:cSld>
@@ -10726,7 +10783,7 @@
           <p:cNvPr id="7" name="">
             <a:extLst xmlns:a="http://schemas.openxmlformats.org/drawingml/2006/main">
               <a:ext uri="{FF2B5EF4-FFF2-40B4-BE49-F238E27FC236}">
-                <a16:creationId xmlns:a16="http://schemas.microsoft.com/office/drawing/2014/main" id="{D2CB547E-BD97-4CFC-BEB8-A85F5D7A0F05}"/>
+                <a16:creationId xmlns:a16="http://schemas.microsoft.com/office/drawing/2014/main" id="{FC027099-D5F1-4705-9F14-563DFDF285A5}"/>
               </a:ext>
             </a:extLst>
           </p:cNvPr>
@@ -10783,7 +10840,7 @@
           <p:cNvPr id="2" name="">
             <a:extLst xmlns:a="http://schemas.openxmlformats.org/drawingml/2006/main">
               <a:ext uri="{FF2B5EF4-FFF2-40B4-BE49-F238E27FC236}">
-                <a16:creationId xmlns:a16="http://schemas.microsoft.com/office/drawing/2014/main" id="{CBCA2758-905B-4BEB-8EC1-70F69F3C86C6}"/>
+                <a16:creationId xmlns:a16="http://schemas.microsoft.com/office/drawing/2014/main" id="{74A8830E-4EDF-4D50-9B0B-4517490A72AC}"/>
               </a:ext>
             </a:extLst>
           </p:cNvPr>
@@ -10840,7 +10897,7 @@
           <p:cNvPr id="3" name="">
             <a:extLst xmlns:a="http://schemas.openxmlformats.org/drawingml/2006/main">
               <a:ext uri="{FF2B5EF4-FFF2-40B4-BE49-F238E27FC236}">
-                <a16:creationId xmlns:a16="http://schemas.microsoft.com/office/drawing/2014/main" id="{3827D382-9009-46BB-9797-BF169998723E}"/>
+                <a16:creationId xmlns:a16="http://schemas.microsoft.com/office/drawing/2014/main" id="{C5559E2F-958B-4C3F-8E9E-58C4C51BCF51}"/>
               </a:ext>
             </a:extLst>
           </p:cNvPr>
@@ -10901,7 +10958,7 @@
           <p:nvPr/>
         </p:nvPicPr>
         <p:blipFill>
-          <a:blip xmlns:r="http://schemas.openxmlformats.org/officeDocument/2006/relationships" xmlns:a="http://schemas.openxmlformats.org/drawingml/2006/main" r:embed="R72e9089b437e4e9c"/>
+          <a:blip xmlns:r="http://schemas.openxmlformats.org/officeDocument/2006/relationships" xmlns:a="http://schemas.openxmlformats.org/drawingml/2006/main" r:embed="R7054a5eb35514b35"/>
           <a:stretch xmlns:a="http://schemas.openxmlformats.org/drawingml/2006/main"/>
         </p:blipFill>
         <p:spPr>
@@ -10919,7 +10976,7 @@
           <p:cNvPr id="5" name="">
             <a:extLst xmlns:a="http://schemas.openxmlformats.org/drawingml/2006/main">
               <a:ext uri="{FF2B5EF4-FFF2-40B4-BE49-F238E27FC236}">
-                <a16:creationId xmlns:a16="http://schemas.microsoft.com/office/drawing/2014/main" id="{D0D02F92-EC33-4CEF-A951-01DBB51E3151}"/>
+                <a16:creationId xmlns:a16="http://schemas.microsoft.com/office/drawing/2014/main" id="{3FFE89FC-A9AB-458B-967D-7F1F2116CB02}"/>
               </a:ext>
             </a:extLst>
           </p:cNvPr>
@@ -11315,7 +11372,7 @@
     </p:spTree>
     <p:extLst>
       <p:ext uri="{BB962C8B-B14F-4D97-AF65-F5344CB8AC3E}">
-        <p14:creationId xmlns:p14="http://schemas.microsoft.com/office/powerpoint/2010/main" val="345825310"/>
+        <p14:creationId xmlns:p14="http://schemas.microsoft.com/office/powerpoint/2010/main" val="294535111"/>
       </p:ext>
     </p:extLst>
   </p:cSld>
@@ -11346,7 +11403,7 @@
           <p:cNvPr id="6" name="">
             <a:extLst xmlns:a="http://schemas.openxmlformats.org/drawingml/2006/main">
               <a:ext uri="{FF2B5EF4-FFF2-40B4-BE49-F238E27FC236}">
-                <a16:creationId xmlns:a16="http://schemas.microsoft.com/office/drawing/2014/main" id="{39A80459-A078-4B38-8656-382071D04A7B}"/>
+                <a16:creationId xmlns:a16="http://schemas.microsoft.com/office/drawing/2014/main" id="{DACFE8A6-7DAC-43B4-B51F-79365C051628}"/>
               </a:ext>
             </a:extLst>
           </p:cNvPr>
@@ -11403,7 +11460,7 @@
           <p:cNvPr id="2" name="">
             <a:extLst xmlns:a="http://schemas.openxmlformats.org/drawingml/2006/main">
               <a:ext uri="{FF2B5EF4-FFF2-40B4-BE49-F238E27FC236}">
-                <a16:creationId xmlns:a16="http://schemas.microsoft.com/office/drawing/2014/main" id="{F75D930F-F7EA-46DC-B213-010DE913D231}"/>
+                <a16:creationId xmlns:a16="http://schemas.microsoft.com/office/drawing/2014/main" id="{3204FF16-0D1E-4CC8-A8AC-9BD7F099A111}"/>
               </a:ext>
             </a:extLst>
           </p:cNvPr>
@@ -11460,7 +11517,7 @@
           <p:cNvPr id="3" name="">
             <a:extLst xmlns:a="http://schemas.openxmlformats.org/drawingml/2006/main">
               <a:ext uri="{FF2B5EF4-FFF2-40B4-BE49-F238E27FC236}">
-                <a16:creationId xmlns:a16="http://schemas.microsoft.com/office/drawing/2014/main" id="{B48F074B-EC8E-4FAF-8779-E02C05373F0B}"/>
+                <a16:creationId xmlns:a16="http://schemas.microsoft.com/office/drawing/2014/main" id="{1CE7838D-CD56-467E-A1C9-56ADD9C03C15}"/>
               </a:ext>
             </a:extLst>
           </p:cNvPr>
@@ -11524,7 +11581,7 @@
         </p:xfrm>
         <a:graphic xmlns:a="http://schemas.openxmlformats.org/drawingml/2006/main">
           <a:graphicData uri="http://schemas.openxmlformats.org/drawingml/2006/chart">
-            <c:chart xmlns:r="http://schemas.openxmlformats.org/officeDocument/2006/relationships" xmlns:c="http://schemas.openxmlformats.org/drawingml/2006/chart" r:id="Ra086b668a28e4ddc"/>
+            <c:chart xmlns:r="http://schemas.openxmlformats.org/officeDocument/2006/relationships" xmlns:c="http://schemas.openxmlformats.org/drawingml/2006/chart" r:id="Rcf8c9088f89b4150"/>
           </a:graphicData>
         </a:graphic>
       </p:graphicFrame>
@@ -11533,7 +11590,7 @@
           <p:cNvPr id="5" name="">
             <a:extLst xmlns:a="http://schemas.openxmlformats.org/drawingml/2006/main">
               <a:ext uri="{FF2B5EF4-FFF2-40B4-BE49-F238E27FC236}">
-                <a16:creationId xmlns:a16="http://schemas.microsoft.com/office/drawing/2014/main" id="{C22B09C1-CAD3-4EC2-B643-1BE3F683EF9E}"/>
+                <a16:creationId xmlns:a16="http://schemas.microsoft.com/office/drawing/2014/main" id="{DE2662F5-2B9C-4899-95B0-83AE36D7C5DE}"/>
               </a:ext>
             </a:extLst>
           </p:cNvPr>
@@ -11611,7 +11668,7 @@
     </p:spTree>
     <p:extLst>
       <p:ext uri="{BB962C8B-B14F-4D97-AF65-F5344CB8AC3E}">
-        <p14:creationId xmlns:p14="http://schemas.microsoft.com/office/powerpoint/2010/main" val="60407636"/>
+        <p14:creationId xmlns:p14="http://schemas.microsoft.com/office/powerpoint/2010/main" val="1344386286"/>
       </p:ext>
     </p:extLst>
   </p:cSld>
@@ -11642,7 +11699,7 @@
           <p:cNvPr id="20" name="">
             <a:extLst xmlns:a="http://schemas.openxmlformats.org/drawingml/2006/main">
               <a:ext uri="{FF2B5EF4-FFF2-40B4-BE49-F238E27FC236}">
-                <a16:creationId xmlns:a16="http://schemas.microsoft.com/office/drawing/2014/main" id="{8655E1CA-E3A3-4328-848B-01E147220C52}"/>
+                <a16:creationId xmlns:a16="http://schemas.microsoft.com/office/drawing/2014/main" id="{88C289AD-64B3-437E-BD52-50F1696E7112}"/>
               </a:ext>
             </a:extLst>
           </p:cNvPr>
@@ -11699,7 +11756,7 @@
           <p:cNvPr id="2" name="">
             <a:extLst xmlns:a="http://schemas.openxmlformats.org/drawingml/2006/main">
               <a:ext uri="{FF2B5EF4-FFF2-40B4-BE49-F238E27FC236}">
-                <a16:creationId xmlns:a16="http://schemas.microsoft.com/office/drawing/2014/main" id="{08B9406D-327E-4455-917A-E12405B2C6B4}"/>
+                <a16:creationId xmlns:a16="http://schemas.microsoft.com/office/drawing/2014/main" id="{6C7372E2-0360-43CF-986B-3FC729D9859B}"/>
               </a:ext>
             </a:extLst>
           </p:cNvPr>
@@ -11756,7 +11813,7 @@
           <p:cNvPr id="3" name="">
             <a:extLst xmlns:a="http://schemas.openxmlformats.org/drawingml/2006/main">
               <a:ext uri="{FF2B5EF4-FFF2-40B4-BE49-F238E27FC236}">
-                <a16:creationId xmlns:a16="http://schemas.microsoft.com/office/drawing/2014/main" id="{25A07B72-DF5F-4B7E-A559-CD60FFA1E82C}"/>
+                <a16:creationId xmlns:a16="http://schemas.microsoft.com/office/drawing/2014/main" id="{94E8356C-C829-4F06-9E69-6F781302144D}"/>
               </a:ext>
             </a:extLst>
           </p:cNvPr>
@@ -11813,7 +11870,7 @@
           <p:cNvPr id="4" name="">
             <a:extLst xmlns:a="http://schemas.openxmlformats.org/drawingml/2006/main">
               <a:ext uri="{FF2B5EF4-FFF2-40B4-BE49-F238E27FC236}">
-                <a16:creationId xmlns:a16="http://schemas.microsoft.com/office/drawing/2014/main" id="{BA1D0940-5357-4CCA-98BB-A789A464FD76}"/>
+                <a16:creationId xmlns:a16="http://schemas.microsoft.com/office/drawing/2014/main" id="{18696258-4E11-4B8D-87AE-B2E84B6E3D40}"/>
               </a:ext>
             </a:extLst>
           </p:cNvPr>
@@ -11897,7 +11954,7 @@
           <p:cNvPr id="5" name="">
             <a:extLst xmlns:a="http://schemas.openxmlformats.org/drawingml/2006/main">
               <a:ext uri="{FF2B5EF4-FFF2-40B4-BE49-F238E27FC236}">
-                <a16:creationId xmlns:a16="http://schemas.microsoft.com/office/drawing/2014/main" id="{C1234AD8-86F0-4800-9959-18DE63F04188}"/>
+                <a16:creationId xmlns:a16="http://schemas.microsoft.com/office/drawing/2014/main" id="{3E4A2DAB-843A-41E2-87C3-628693783870}"/>
               </a:ext>
             </a:extLst>
           </p:cNvPr>
@@ -11927,7 +11984,7 @@
           <p:cNvPr id="6" name="">
             <a:extLst xmlns:a="http://schemas.openxmlformats.org/drawingml/2006/main">
               <a:ext uri="{FF2B5EF4-FFF2-40B4-BE49-F238E27FC236}">
-                <a16:creationId xmlns:a16="http://schemas.microsoft.com/office/drawing/2014/main" id="{D437E956-C411-4BFE-AC4F-8DD15FB755B7}"/>
+                <a16:creationId xmlns:a16="http://schemas.microsoft.com/office/drawing/2014/main" id="{9C2914D1-0FC4-4F35-ADB2-86E45D67289A}"/>
               </a:ext>
             </a:extLst>
           </p:cNvPr>
@@ -12011,7 +12068,7 @@
           <p:cNvPr id="7" name="">
             <a:extLst xmlns:a="http://schemas.openxmlformats.org/drawingml/2006/main">
               <a:ext uri="{FF2B5EF4-FFF2-40B4-BE49-F238E27FC236}">
-                <a16:creationId xmlns:a16="http://schemas.microsoft.com/office/drawing/2014/main" id="{88AEB2AA-223F-4955-8990-94ACA0CFED4C}"/>
+                <a16:creationId xmlns:a16="http://schemas.microsoft.com/office/drawing/2014/main" id="{164F7550-F8B1-4543-A3DA-4D4B039FA8B1}"/>
               </a:ext>
             </a:extLst>
           </p:cNvPr>
@@ -12041,7 +12098,7 @@
           <p:cNvPr id="8" name="">
             <a:extLst xmlns:a="http://schemas.openxmlformats.org/drawingml/2006/main">
               <a:ext uri="{FF2B5EF4-FFF2-40B4-BE49-F238E27FC236}">
-                <a16:creationId xmlns:a16="http://schemas.microsoft.com/office/drawing/2014/main" id="{648F3521-07F7-4D07-85F2-8192E66373AF}"/>
+                <a16:creationId xmlns:a16="http://schemas.microsoft.com/office/drawing/2014/main" id="{592918CA-195D-4A4F-A5F3-1876F5A2A812}"/>
               </a:ext>
             </a:extLst>
           </p:cNvPr>
@@ -12125,7 +12182,7 @@
           <p:cNvPr id="9" name="">
             <a:extLst xmlns:a="http://schemas.openxmlformats.org/drawingml/2006/main">
               <a:ext uri="{FF2B5EF4-FFF2-40B4-BE49-F238E27FC236}">
-                <a16:creationId xmlns:a16="http://schemas.microsoft.com/office/drawing/2014/main" id="{E905984E-3ED9-4E86-BB3B-908AC3D83629}"/>
+                <a16:creationId xmlns:a16="http://schemas.microsoft.com/office/drawing/2014/main" id="{A62E803E-1411-4CC4-9342-9A97284D0C12}"/>
               </a:ext>
             </a:extLst>
           </p:cNvPr>
@@ -12155,7 +12212,7 @@
           <p:cNvPr id="10" name="">
             <a:extLst xmlns:a="http://schemas.openxmlformats.org/drawingml/2006/main">
               <a:ext uri="{FF2B5EF4-FFF2-40B4-BE49-F238E27FC236}">
-                <a16:creationId xmlns:a16="http://schemas.microsoft.com/office/drawing/2014/main" id="{32781812-4557-46CF-8149-D5A8C61C0015}"/>
+                <a16:creationId xmlns:a16="http://schemas.microsoft.com/office/drawing/2014/main" id="{687C4E51-12F2-4BB3-A4CD-BE3E3EDA56D9}"/>
               </a:ext>
             </a:extLst>
           </p:cNvPr>
@@ -12239,7 +12296,7 @@
           <p:cNvPr id="11" name="">
             <a:extLst xmlns:a="http://schemas.openxmlformats.org/drawingml/2006/main">
               <a:ext uri="{FF2B5EF4-FFF2-40B4-BE49-F238E27FC236}">
-                <a16:creationId xmlns:a16="http://schemas.microsoft.com/office/drawing/2014/main" id="{22029622-EDB8-4FC4-9981-C888347020AD}"/>
+                <a16:creationId xmlns:a16="http://schemas.microsoft.com/office/drawing/2014/main" id="{AAF50B75-6837-44E9-BC77-ABF421932CB8}"/>
               </a:ext>
             </a:extLst>
           </p:cNvPr>
@@ -12269,7 +12326,7 @@
           <p:cNvPr id="12" name="">
             <a:extLst xmlns:a="http://schemas.openxmlformats.org/drawingml/2006/main">
               <a:ext uri="{FF2B5EF4-FFF2-40B4-BE49-F238E27FC236}">
-                <a16:creationId xmlns:a16="http://schemas.microsoft.com/office/drawing/2014/main" id="{74DBC4A9-F6E9-441D-B62B-C5C884AAFAF3}"/>
+                <a16:creationId xmlns:a16="http://schemas.microsoft.com/office/drawing/2014/main" id="{CEDE6CB9-5915-4252-86B9-BE5A8A41FBEC}"/>
               </a:ext>
             </a:extLst>
           </p:cNvPr>
@@ -12353,7 +12410,7 @@
           <p:cNvPr id="13" name="">
             <a:extLst xmlns:a="http://schemas.openxmlformats.org/drawingml/2006/main">
               <a:ext uri="{FF2B5EF4-FFF2-40B4-BE49-F238E27FC236}">
-                <a16:creationId xmlns:a16="http://schemas.microsoft.com/office/drawing/2014/main" id="{07A1C8E5-E636-41E9-9A2F-5E0BC02E6E12}"/>
+                <a16:creationId xmlns:a16="http://schemas.microsoft.com/office/drawing/2014/main" id="{E90DF939-633B-4FA7-96E2-C36D239FD99B}"/>
               </a:ext>
             </a:extLst>
           </p:cNvPr>
@@ -12410,7 +12467,7 @@
           <p:cNvPr id="14" name="">
             <a:extLst xmlns:a="http://schemas.openxmlformats.org/drawingml/2006/main">
               <a:ext uri="{FF2B5EF4-FFF2-40B4-BE49-F238E27FC236}">
-                <a16:creationId xmlns:a16="http://schemas.microsoft.com/office/drawing/2014/main" id="{5869FF54-E78F-423E-BCF8-BF5FE1C03333}"/>
+                <a16:creationId xmlns:a16="http://schemas.microsoft.com/office/drawing/2014/main" id="{B858EB6E-B870-4591-BF16-96DA593B7073}"/>
               </a:ext>
             </a:extLst>
           </p:cNvPr>
@@ -12467,7 +12524,7 @@
           <p:cNvPr id="15" name="">
             <a:extLst xmlns:a="http://schemas.openxmlformats.org/drawingml/2006/main">
               <a:ext uri="{FF2B5EF4-FFF2-40B4-BE49-F238E27FC236}">
-                <a16:creationId xmlns:a16="http://schemas.microsoft.com/office/drawing/2014/main" id="{5C836B25-A7EE-438B-90B9-9AA0C7341D67}"/>
+                <a16:creationId xmlns:a16="http://schemas.microsoft.com/office/drawing/2014/main" id="{D7A49DA8-53C9-4A6A-B8B1-9D54DDD56ECD}"/>
               </a:ext>
             </a:extLst>
           </p:cNvPr>
@@ -12639,7 +12696,7 @@
           <p:cNvPr id="16" name="">
             <a:extLst xmlns:a="http://schemas.openxmlformats.org/drawingml/2006/main">
               <a:ext uri="{FF2B5EF4-FFF2-40B4-BE49-F238E27FC236}">
-                <a16:creationId xmlns:a16="http://schemas.microsoft.com/office/drawing/2014/main" id="{8D6C9977-E076-42C6-9FAE-1F32D6399022}"/>
+                <a16:creationId xmlns:a16="http://schemas.microsoft.com/office/drawing/2014/main" id="{ADBDB9B8-AB9A-45EF-9F01-4E04E3F9C2AC}"/>
               </a:ext>
             </a:extLst>
           </p:cNvPr>
@@ -12696,7 +12753,7 @@
           <p:cNvPr id="17" name="">
             <a:extLst xmlns:a="http://schemas.openxmlformats.org/drawingml/2006/main">
               <a:ext uri="{FF2B5EF4-FFF2-40B4-BE49-F238E27FC236}">
-                <a16:creationId xmlns:a16="http://schemas.microsoft.com/office/drawing/2014/main" id="{0A0E3D7C-7988-4000-A31E-8BF847BC17CD}"/>
+                <a16:creationId xmlns:a16="http://schemas.microsoft.com/office/drawing/2014/main" id="{0CD5F54A-8754-4E9D-BF88-88674FE67C7D}"/>
               </a:ext>
             </a:extLst>
           </p:cNvPr>
@@ -12845,7 +12902,7 @@
           <p:cNvPr id="18" name="">
             <a:extLst xmlns:a="http://schemas.openxmlformats.org/drawingml/2006/main">
               <a:ext uri="{FF2B5EF4-FFF2-40B4-BE49-F238E27FC236}">
-                <a16:creationId xmlns:a16="http://schemas.microsoft.com/office/drawing/2014/main" id="{3EB5CAAA-FF65-49F6-947C-7DDF2D33A39F}"/>
+                <a16:creationId xmlns:a16="http://schemas.microsoft.com/office/drawing/2014/main" id="{3A5189DA-A04E-4E1A-8379-E160712F7658}"/>
               </a:ext>
             </a:extLst>
           </p:cNvPr>
@@ -12902,7 +12959,7 @@
           <p:cNvPr id="19" name="">
             <a:extLst xmlns:a="http://schemas.openxmlformats.org/drawingml/2006/main">
               <a:ext uri="{FF2B5EF4-FFF2-40B4-BE49-F238E27FC236}">
-                <a16:creationId xmlns:a16="http://schemas.microsoft.com/office/drawing/2014/main" id="{0CC427DE-BA65-47AE-B81F-218A7B11C16C}"/>
+                <a16:creationId xmlns:a16="http://schemas.microsoft.com/office/drawing/2014/main" id="{1BC3CCDE-1085-4A5F-9461-AE72420B4D72}"/>
               </a:ext>
             </a:extLst>
           </p:cNvPr>
@@ -12957,7 +13014,7 @@
     </p:spTree>
     <p:extLst>
       <p:ext uri="{BB962C8B-B14F-4D97-AF65-F5344CB8AC3E}">
-        <p14:creationId xmlns:p14="http://schemas.microsoft.com/office/powerpoint/2010/main" val="1820478969"/>
+        <p14:creationId xmlns:p14="http://schemas.microsoft.com/office/powerpoint/2010/main" val="857740236"/>
       </p:ext>
     </p:extLst>
   </p:cSld>
@@ -12988,7 +13045,7 @@
           <p:cNvPr id="16" name="">
             <a:extLst xmlns:a="http://schemas.openxmlformats.org/drawingml/2006/main">
               <a:ext uri="{FF2B5EF4-FFF2-40B4-BE49-F238E27FC236}">
-                <a16:creationId xmlns:a16="http://schemas.microsoft.com/office/drawing/2014/main" id="{3C7AAAB0-71ED-46C3-A093-FA0A7529395C}"/>
+                <a16:creationId xmlns:a16="http://schemas.microsoft.com/office/drawing/2014/main" id="{5104E808-4BFE-4C0E-BCDA-0FB6EEF93A16}"/>
               </a:ext>
             </a:extLst>
           </p:cNvPr>
@@ -13045,7 +13102,7 @@
           <p:cNvPr id="2" name="">
             <a:extLst xmlns:a="http://schemas.openxmlformats.org/drawingml/2006/main">
               <a:ext uri="{FF2B5EF4-FFF2-40B4-BE49-F238E27FC236}">
-                <a16:creationId xmlns:a16="http://schemas.microsoft.com/office/drawing/2014/main" id="{28C131D7-5778-4B46-8F14-64E5CC89F837}"/>
+                <a16:creationId xmlns:a16="http://schemas.microsoft.com/office/drawing/2014/main" id="{5D795FD6-D504-40F1-A6B0-F0AC9FEDEC3F}"/>
               </a:ext>
             </a:extLst>
           </p:cNvPr>
@@ -13102,7 +13159,7 @@
           <p:cNvPr id="3" name="">
             <a:extLst xmlns:a="http://schemas.openxmlformats.org/drawingml/2006/main">
               <a:ext uri="{FF2B5EF4-FFF2-40B4-BE49-F238E27FC236}">
-                <a16:creationId xmlns:a16="http://schemas.microsoft.com/office/drawing/2014/main" id="{05751847-323E-4776-A7D2-172751ED3BDF}"/>
+                <a16:creationId xmlns:a16="http://schemas.microsoft.com/office/drawing/2014/main" id="{2F8DC1D7-DFB7-414C-9F58-4DC20EBA6E1B}"/>
               </a:ext>
             </a:extLst>
           </p:cNvPr>
@@ -13159,7 +13216,7 @@
           <p:cNvPr id="4" name="">
             <a:extLst xmlns:a="http://schemas.openxmlformats.org/drawingml/2006/main">
               <a:ext uri="{FF2B5EF4-FFF2-40B4-BE49-F238E27FC236}">
-                <a16:creationId xmlns:a16="http://schemas.microsoft.com/office/drawing/2014/main" id="{C03599EF-0216-420E-87B3-287058E7FDEF}"/>
+                <a16:creationId xmlns:a16="http://schemas.microsoft.com/office/drawing/2014/main" id="{8D63EDCC-B9EC-441D-8562-BDC80A239753}"/>
               </a:ext>
             </a:extLst>
           </p:cNvPr>
@@ -13243,7 +13300,7 @@
           <p:cNvPr id="5" name="">
             <a:extLst xmlns:a="http://schemas.openxmlformats.org/drawingml/2006/main">
               <a:ext uri="{FF2B5EF4-FFF2-40B4-BE49-F238E27FC236}">
-                <a16:creationId xmlns:a16="http://schemas.microsoft.com/office/drawing/2014/main" id="{7A341509-B507-4886-9C2F-A82F5C5994AB}"/>
+                <a16:creationId xmlns:a16="http://schemas.microsoft.com/office/drawing/2014/main" id="{C101AF96-9ED6-45E6-A1FC-ECEE69CC2A04}"/>
               </a:ext>
             </a:extLst>
           </p:cNvPr>
@@ -13273,7 +13330,7 @@
           <p:cNvPr id="6" name="">
             <a:extLst xmlns:a="http://schemas.openxmlformats.org/drawingml/2006/main">
               <a:ext uri="{FF2B5EF4-FFF2-40B4-BE49-F238E27FC236}">
-                <a16:creationId xmlns:a16="http://schemas.microsoft.com/office/drawing/2014/main" id="{AC929634-C010-4424-994D-7291175F9051}"/>
+                <a16:creationId xmlns:a16="http://schemas.microsoft.com/office/drawing/2014/main" id="{58A8CB10-1C2D-490D-8A11-FDD793BCD432}"/>
               </a:ext>
             </a:extLst>
           </p:cNvPr>
@@ -13357,7 +13414,7 @@
           <p:cNvPr id="7" name="">
             <a:extLst xmlns:a="http://schemas.openxmlformats.org/drawingml/2006/main">
               <a:ext uri="{FF2B5EF4-FFF2-40B4-BE49-F238E27FC236}">
-                <a16:creationId xmlns:a16="http://schemas.microsoft.com/office/drawing/2014/main" id="{256CBFAF-267F-41CB-A029-807491504F90}"/>
+                <a16:creationId xmlns:a16="http://schemas.microsoft.com/office/drawing/2014/main" id="{CCE4C011-3DBC-45BB-8615-B540981EE574}"/>
               </a:ext>
             </a:extLst>
           </p:cNvPr>
@@ -13387,7 +13444,7 @@
           <p:cNvPr id="8" name="">
             <a:extLst xmlns:a="http://schemas.openxmlformats.org/drawingml/2006/main">
               <a:ext uri="{FF2B5EF4-FFF2-40B4-BE49-F238E27FC236}">
-                <a16:creationId xmlns:a16="http://schemas.microsoft.com/office/drawing/2014/main" id="{2E28B35D-E8CD-407E-AF42-8422DE8EE364}"/>
+                <a16:creationId xmlns:a16="http://schemas.microsoft.com/office/drawing/2014/main" id="{A49C21F2-1E8C-406F-9EEB-2A75A5F0FB1F}"/>
               </a:ext>
             </a:extLst>
           </p:cNvPr>
@@ -13471,7 +13528,7 @@
           <p:cNvPr id="9" name="">
             <a:extLst xmlns:a="http://schemas.openxmlformats.org/drawingml/2006/main">
               <a:ext uri="{FF2B5EF4-FFF2-40B4-BE49-F238E27FC236}">
-                <a16:creationId xmlns:a16="http://schemas.microsoft.com/office/drawing/2014/main" id="{3EE10FFC-DEE6-4BC4-9C44-4E0D7D63DCD4}"/>
+                <a16:creationId xmlns:a16="http://schemas.microsoft.com/office/drawing/2014/main" id="{2C2DA7DB-73FC-4B7C-9B73-676FCBB083DD}"/>
               </a:ext>
             </a:extLst>
           </p:cNvPr>
@@ -13501,7 +13558,7 @@
           <p:cNvPr id="10" name="">
             <a:extLst xmlns:a="http://schemas.openxmlformats.org/drawingml/2006/main">
               <a:ext uri="{FF2B5EF4-FFF2-40B4-BE49-F238E27FC236}">
-                <a16:creationId xmlns:a16="http://schemas.microsoft.com/office/drawing/2014/main" id="{E81DA573-4F75-45A3-A079-950D4B7866B9}"/>
+                <a16:creationId xmlns:a16="http://schemas.microsoft.com/office/drawing/2014/main" id="{F096BB7E-A5E3-4F9F-A46D-B3007CEA9065}"/>
               </a:ext>
             </a:extLst>
           </p:cNvPr>
@@ -13585,7 +13642,7 @@
           <p:cNvPr id="11" name="">
             <a:extLst xmlns:a="http://schemas.openxmlformats.org/drawingml/2006/main">
               <a:ext uri="{FF2B5EF4-FFF2-40B4-BE49-F238E27FC236}">
-                <a16:creationId xmlns:a16="http://schemas.microsoft.com/office/drawing/2014/main" id="{B6A65DF9-545D-4DEE-AE21-E7956F0215C6}"/>
+                <a16:creationId xmlns:a16="http://schemas.microsoft.com/office/drawing/2014/main" id="{1543F806-6431-4A20-A7A8-58316B9D842B}"/>
               </a:ext>
             </a:extLst>
           </p:cNvPr>
@@ -13615,7 +13672,7 @@
           <p:cNvPr id="12" name="">
             <a:extLst xmlns:a="http://schemas.openxmlformats.org/drawingml/2006/main">
               <a:ext uri="{FF2B5EF4-FFF2-40B4-BE49-F238E27FC236}">
-                <a16:creationId xmlns:a16="http://schemas.microsoft.com/office/drawing/2014/main" id="{57DBBCDE-641A-44AF-B9D4-9C5B1B699FB7}"/>
+                <a16:creationId xmlns:a16="http://schemas.microsoft.com/office/drawing/2014/main" id="{0AA18F4D-99DC-4FD4-BB4B-A4CDE8E1EEBD}"/>
               </a:ext>
             </a:extLst>
           </p:cNvPr>
@@ -13699,7 +13756,7 @@
           <p:cNvPr id="13" name="">
             <a:extLst xmlns:a="http://schemas.openxmlformats.org/drawingml/2006/main">
               <a:ext uri="{FF2B5EF4-FFF2-40B4-BE49-F238E27FC236}">
-                <a16:creationId xmlns:a16="http://schemas.microsoft.com/office/drawing/2014/main" id="{6EAE27D5-28C3-4094-B520-AD49B250D140}"/>
+                <a16:creationId xmlns:a16="http://schemas.microsoft.com/office/drawing/2014/main" id="{66B2E97A-9378-4DA5-AC15-CF4B473AE9F2}"/>
               </a:ext>
             </a:extLst>
           </p:cNvPr>
@@ -13756,7 +13813,7 @@
           <p:cNvPr id="14" name="">
             <a:extLst xmlns:a="http://schemas.openxmlformats.org/drawingml/2006/main">
               <a:ext uri="{FF2B5EF4-FFF2-40B4-BE49-F238E27FC236}">
-                <a16:creationId xmlns:a16="http://schemas.microsoft.com/office/drawing/2014/main" id="{0D4CF290-FDBD-4508-8920-ACB1F6B2891F}"/>
+                <a16:creationId xmlns:a16="http://schemas.microsoft.com/office/drawing/2014/main" id="{6E8CBA79-413C-44BA-86FB-F8FB56321A06}"/>
               </a:ext>
             </a:extLst>
           </p:cNvPr>
@@ -13813,7 +13870,7 @@
           <p:cNvPr id="15" name="">
             <a:extLst xmlns:a="http://schemas.openxmlformats.org/drawingml/2006/main">
               <a:ext uri="{FF2B5EF4-FFF2-40B4-BE49-F238E27FC236}">
-                <a16:creationId xmlns:a16="http://schemas.microsoft.com/office/drawing/2014/main" id="{23EC6653-461B-40EF-86CC-3B8143DD04A8}"/>
+                <a16:creationId xmlns:a16="http://schemas.microsoft.com/office/drawing/2014/main" id="{B7612D6E-FB9C-4780-AF6F-99BAEC405818}"/>
               </a:ext>
             </a:extLst>
           </p:cNvPr>
@@ -13891,7 +13948,7 @@
     </p:spTree>
     <p:extLst>
       <p:ext uri="{BB962C8B-B14F-4D97-AF65-F5344CB8AC3E}">
-        <p14:creationId xmlns:p14="http://schemas.microsoft.com/office/powerpoint/2010/main" val="164389694"/>
+        <p14:creationId xmlns:p14="http://schemas.microsoft.com/office/powerpoint/2010/main" val="1292332780"/>
       </p:ext>
     </p:extLst>
   </p:cSld>
@@ -13922,7 +13979,7 @@
           <p:cNvPr id="8" name="">
             <a:extLst xmlns:a="http://schemas.openxmlformats.org/drawingml/2006/main">
               <a:ext uri="{FF2B5EF4-FFF2-40B4-BE49-F238E27FC236}">
-                <a16:creationId xmlns:a16="http://schemas.microsoft.com/office/drawing/2014/main" id="{AED390F8-D446-4535-BE70-37860E443259}"/>
+                <a16:creationId xmlns:a16="http://schemas.microsoft.com/office/drawing/2014/main" id="{FC4747B6-1F83-40C1-9E0C-3C052F2963E0}"/>
               </a:ext>
             </a:extLst>
           </p:cNvPr>
@@ -13979,7 +14036,7 @@
           <p:cNvPr id="2" name="">
             <a:extLst xmlns:a="http://schemas.openxmlformats.org/drawingml/2006/main">
               <a:ext uri="{FF2B5EF4-FFF2-40B4-BE49-F238E27FC236}">
-                <a16:creationId xmlns:a16="http://schemas.microsoft.com/office/drawing/2014/main" id="{D5601682-6D92-45F2-AFC4-A7572DEEDA30}"/>
+                <a16:creationId xmlns:a16="http://schemas.microsoft.com/office/drawing/2014/main" id="{6EAD6BD2-7E49-4156-9EC2-7A1558CF0A71}"/>
               </a:ext>
             </a:extLst>
           </p:cNvPr>
@@ -14036,7 +14093,7 @@
           <p:cNvPr id="3" name="">
             <a:extLst xmlns:a="http://schemas.openxmlformats.org/drawingml/2006/main">
               <a:ext uri="{FF2B5EF4-FFF2-40B4-BE49-F238E27FC236}">
-                <a16:creationId xmlns:a16="http://schemas.microsoft.com/office/drawing/2014/main" id="{685C25C0-5520-43E6-8617-A18403959F1C}"/>
+                <a16:creationId xmlns:a16="http://schemas.microsoft.com/office/drawing/2014/main" id="{D438F728-202B-4992-9E38-7B58346DB106}"/>
               </a:ext>
             </a:extLst>
           </p:cNvPr>
@@ -14093,7 +14150,7 @@
           <p:cNvPr id="4" name="">
             <a:extLst xmlns:a="http://schemas.openxmlformats.org/drawingml/2006/main">
               <a:ext uri="{FF2B5EF4-FFF2-40B4-BE49-F238E27FC236}">
-                <a16:creationId xmlns:a16="http://schemas.microsoft.com/office/drawing/2014/main" id="{23A61DE9-8A92-40E4-B096-0E282C7D41F3}"/>
+                <a16:creationId xmlns:a16="http://schemas.microsoft.com/office/drawing/2014/main" id="{6BE8943E-E7BB-4AB2-9388-F2BFBD1B33C2}"/>
               </a:ext>
             </a:extLst>
           </p:cNvPr>
@@ -14395,7 +14452,7 @@
           <p:cNvPr id="6" name="">
             <a:extLst xmlns:a="http://schemas.openxmlformats.org/drawingml/2006/main">
               <a:ext uri="{FF2B5EF4-FFF2-40B4-BE49-F238E27FC236}">
-                <a16:creationId xmlns:a16="http://schemas.microsoft.com/office/drawing/2014/main" id="{148FC13D-7D61-47DB-9DCD-BD067E447462}"/>
+                <a16:creationId xmlns:a16="http://schemas.microsoft.com/office/drawing/2014/main" id="{51A9D996-BC8B-4B5E-B0A6-6277D2315B12}"/>
               </a:ext>
             </a:extLst>
           </p:cNvPr>
@@ -14475,7 +14532,7 @@
           <p:cNvPr id="7" name="">
             <a:extLst xmlns:a="http://schemas.openxmlformats.org/drawingml/2006/main">
               <a:ext uri="{FF2B5EF4-FFF2-40B4-BE49-F238E27FC236}">
-                <a16:creationId xmlns:a16="http://schemas.microsoft.com/office/drawing/2014/main" id="{756CDCD8-8A46-49E9-B7D7-A44D2E03A4AC}"/>
+                <a16:creationId xmlns:a16="http://schemas.microsoft.com/office/drawing/2014/main" id="{5C37E407-1D0D-400B-A2BA-CED2E29F7624}"/>
               </a:ext>
             </a:extLst>
           </p:cNvPr>
@@ -14553,7 +14610,7 @@
     </p:spTree>
     <p:extLst>
       <p:ext uri="{BB962C8B-B14F-4D97-AF65-F5344CB8AC3E}">
-        <p14:creationId xmlns:p14="http://schemas.microsoft.com/office/powerpoint/2010/main" val="2089340210"/>
+        <p14:creationId xmlns:p14="http://schemas.microsoft.com/office/powerpoint/2010/main" val="576461496"/>
       </p:ext>
     </p:extLst>
   </p:cSld>
@@ -14584,7 +14641,7 @@
           <p:cNvPr id="7" name="">
             <a:extLst xmlns:a="http://schemas.openxmlformats.org/drawingml/2006/main">
               <a:ext uri="{FF2B5EF4-FFF2-40B4-BE49-F238E27FC236}">
-                <a16:creationId xmlns:a16="http://schemas.microsoft.com/office/drawing/2014/main" id="{737E31AB-FB1F-4F63-9E4E-EB82E9DC3949}"/>
+                <a16:creationId xmlns:a16="http://schemas.microsoft.com/office/drawing/2014/main" id="{5D2F01B0-BF90-4189-8CCB-124B0C91BA04}"/>
               </a:ext>
             </a:extLst>
           </p:cNvPr>
@@ -14641,7 +14698,7 @@
           <p:cNvPr id="2" name="">
             <a:extLst xmlns:a="http://schemas.openxmlformats.org/drawingml/2006/main">
               <a:ext uri="{FF2B5EF4-FFF2-40B4-BE49-F238E27FC236}">
-                <a16:creationId xmlns:a16="http://schemas.microsoft.com/office/drawing/2014/main" id="{219BB540-7445-466E-8E38-B9034DD9C825}"/>
+                <a16:creationId xmlns:a16="http://schemas.microsoft.com/office/drawing/2014/main" id="{BFB99386-F458-4550-BABE-5CE9F36235CC}"/>
               </a:ext>
             </a:extLst>
           </p:cNvPr>
@@ -14698,7 +14755,7 @@
           <p:cNvPr id="3" name="">
             <a:extLst xmlns:a="http://schemas.openxmlformats.org/drawingml/2006/main">
               <a:ext uri="{FF2B5EF4-FFF2-40B4-BE49-F238E27FC236}">
-                <a16:creationId xmlns:a16="http://schemas.microsoft.com/office/drawing/2014/main" id="{85913E72-7BCC-491B-8083-252A7E785641}"/>
+                <a16:creationId xmlns:a16="http://schemas.microsoft.com/office/drawing/2014/main" id="{292D7980-BDEE-4C80-8828-AC569D52E538}"/>
               </a:ext>
             </a:extLst>
           </p:cNvPr>
@@ -14755,7 +14812,7 @@
           <p:cNvPr id="4" name="">
             <a:extLst xmlns:a="http://schemas.openxmlformats.org/drawingml/2006/main">
               <a:ext uri="{FF2B5EF4-FFF2-40B4-BE49-F238E27FC236}">
-                <a16:creationId xmlns:a16="http://schemas.microsoft.com/office/drawing/2014/main" id="{1B8935AC-0370-479A-B4CE-32BFF3CE7F6A}"/>
+                <a16:creationId xmlns:a16="http://schemas.microsoft.com/office/drawing/2014/main" id="{D4892A3C-BB48-4312-8A2C-EC2906F1392C}"/>
               </a:ext>
             </a:extLst>
           </p:cNvPr>
@@ -14835,7 +14892,7 @@
           <p:cNvPr id="5" name="">
             <a:extLst xmlns:a="http://schemas.openxmlformats.org/drawingml/2006/main">
               <a:ext uri="{FF2B5EF4-FFF2-40B4-BE49-F238E27FC236}">
-                <a16:creationId xmlns:a16="http://schemas.microsoft.com/office/drawing/2014/main" id="{63DD9CCF-458B-4986-A3AF-46A877DBD8F3}"/>
+                <a16:creationId xmlns:a16="http://schemas.microsoft.com/office/drawing/2014/main" id="{26995A5D-80A5-4D78-8ADB-80E69D697A1E}"/>
               </a:ext>
             </a:extLst>
           </p:cNvPr>
@@ -14892,7 +14949,7 @@
           <p:cNvPr id="6" name="">
             <a:extLst xmlns:a="http://schemas.openxmlformats.org/drawingml/2006/main">
               <a:ext uri="{FF2B5EF4-FFF2-40B4-BE49-F238E27FC236}">
-                <a16:creationId xmlns:a16="http://schemas.microsoft.com/office/drawing/2014/main" id="{BFBE7DCD-6B54-4846-87E5-59DD0D39EB32}"/>
+                <a16:creationId xmlns:a16="http://schemas.microsoft.com/office/drawing/2014/main" id="{84355F66-CEEA-43E0-B9C8-BD75F62AA332}"/>
               </a:ext>
             </a:extLst>
           </p:cNvPr>
@@ -15016,7 +15073,7 @@
     </p:spTree>
     <p:extLst>
       <p:ext uri="{BB962C8B-B14F-4D97-AF65-F5344CB8AC3E}">
-        <p14:creationId xmlns:p14="http://schemas.microsoft.com/office/powerpoint/2010/main" val="430720217"/>
+        <p14:creationId xmlns:p14="http://schemas.microsoft.com/office/powerpoint/2010/main" val="394470385"/>
       </p:ext>
     </p:extLst>
   </p:cSld>
@@ -15047,7 +15104,7 @@
           <p:cNvPr id="6" name="">
             <a:extLst xmlns:a="http://schemas.openxmlformats.org/drawingml/2006/main">
               <a:ext uri="{FF2B5EF4-FFF2-40B4-BE49-F238E27FC236}">
-                <a16:creationId xmlns:a16="http://schemas.microsoft.com/office/drawing/2014/main" id="{FB8E2FE3-A69F-4A28-9598-CD9B7CE8B7CD}"/>
+                <a16:creationId xmlns:a16="http://schemas.microsoft.com/office/drawing/2014/main" id="{D20A99B0-A042-4426-A760-ECA0AF6C4C4E}"/>
               </a:ext>
             </a:extLst>
           </p:cNvPr>
@@ -15104,7 +15161,7 @@
           <p:cNvPr id="2" name="">
             <a:extLst xmlns:a="http://schemas.openxmlformats.org/drawingml/2006/main">
               <a:ext uri="{FF2B5EF4-FFF2-40B4-BE49-F238E27FC236}">
-                <a16:creationId xmlns:a16="http://schemas.microsoft.com/office/drawing/2014/main" id="{ECDA7C0C-604F-4877-A494-41CF4E9E15EF}"/>
+                <a16:creationId xmlns:a16="http://schemas.microsoft.com/office/drawing/2014/main" id="{A1CA4569-833D-4F1E-BECB-04D13D3BDA07}"/>
               </a:ext>
             </a:extLst>
           </p:cNvPr>
@@ -15161,7 +15218,7 @@
           <p:cNvPr id="3" name="">
             <a:extLst xmlns:a="http://schemas.openxmlformats.org/drawingml/2006/main">
               <a:ext uri="{FF2B5EF4-FFF2-40B4-BE49-F238E27FC236}">
-                <a16:creationId xmlns:a16="http://schemas.microsoft.com/office/drawing/2014/main" id="{90B86B53-4835-48BD-B16B-820E2441A72C}"/>
+                <a16:creationId xmlns:a16="http://schemas.microsoft.com/office/drawing/2014/main" id="{7FC50577-73E6-4A0B-8A77-C3C64C9188F3}"/>
               </a:ext>
             </a:extLst>
           </p:cNvPr>
@@ -15218,7 +15275,7 @@
           <p:cNvPr id="4" name="">
             <a:extLst xmlns:a="http://schemas.openxmlformats.org/drawingml/2006/main">
               <a:ext uri="{FF2B5EF4-FFF2-40B4-BE49-F238E27FC236}">
-                <a16:creationId xmlns:a16="http://schemas.microsoft.com/office/drawing/2014/main" id="{86306B76-BAF6-4597-95F1-0DF588DB1DEC}"/>
+                <a16:creationId xmlns:a16="http://schemas.microsoft.com/office/drawing/2014/main" id="{E3CA83B2-0D98-411B-94AC-A6666EA010F5}"/>
               </a:ext>
             </a:extLst>
           </p:cNvPr>
@@ -16081,7 +16138,7 @@
     </p:spTree>
     <p:extLst>
       <p:ext uri="{BB962C8B-B14F-4D97-AF65-F5344CB8AC3E}">
-        <p14:creationId xmlns:p14="http://schemas.microsoft.com/office/powerpoint/2010/main" val="308132298"/>
+        <p14:creationId xmlns:p14="http://schemas.microsoft.com/office/powerpoint/2010/main" val="480226027"/>
       </p:ext>
     </p:extLst>
   </p:cSld>
@@ -16112,7 +16169,7 @@
           <p:cNvPr id="13" name="">
             <a:extLst xmlns:a="http://schemas.openxmlformats.org/drawingml/2006/main">
               <a:ext uri="{FF2B5EF4-FFF2-40B4-BE49-F238E27FC236}">
-                <a16:creationId xmlns:a16="http://schemas.microsoft.com/office/drawing/2014/main" id="{B91AA868-5745-491E-B69B-8DDD56993B8E}"/>
+                <a16:creationId xmlns:a16="http://schemas.microsoft.com/office/drawing/2014/main" id="{7E9E37D1-C026-4F4F-9CAF-5097E4772EA3}"/>
               </a:ext>
             </a:extLst>
           </p:cNvPr>
@@ -16169,7 +16226,7 @@
           <p:cNvPr id="2" name="">
             <a:extLst xmlns:a="http://schemas.openxmlformats.org/drawingml/2006/main">
               <a:ext uri="{FF2B5EF4-FFF2-40B4-BE49-F238E27FC236}">
-                <a16:creationId xmlns:a16="http://schemas.microsoft.com/office/drawing/2014/main" id="{3FA0319F-A0DB-4A6F-AA71-07D440515FD1}"/>
+                <a16:creationId xmlns:a16="http://schemas.microsoft.com/office/drawing/2014/main" id="{F7C88D34-A1F9-42E6-AC37-6C181900F6DC}"/>
               </a:ext>
             </a:extLst>
           </p:cNvPr>
@@ -16226,7 +16283,7 @@
           <p:cNvPr id="3" name="">
             <a:extLst xmlns:a="http://schemas.openxmlformats.org/drawingml/2006/main">
               <a:ext uri="{FF2B5EF4-FFF2-40B4-BE49-F238E27FC236}">
-                <a16:creationId xmlns:a16="http://schemas.microsoft.com/office/drawing/2014/main" id="{DF24904B-2140-4FC9-A660-6F1741235A41}"/>
+                <a16:creationId xmlns:a16="http://schemas.microsoft.com/office/drawing/2014/main" id="{A093EF00-0207-45BB-B332-79ECF60324FC}"/>
               </a:ext>
             </a:extLst>
           </p:cNvPr>
@@ -16283,7 +16340,7 @@
           <p:cNvPr id="4" name="">
             <a:extLst xmlns:a="http://schemas.openxmlformats.org/drawingml/2006/main">
               <a:ext uri="{FF2B5EF4-FFF2-40B4-BE49-F238E27FC236}">
-                <a16:creationId xmlns:a16="http://schemas.microsoft.com/office/drawing/2014/main" id="{0808B5CC-2084-4511-8384-2F4D2C88AC62}"/>
+                <a16:creationId xmlns:a16="http://schemas.microsoft.com/office/drawing/2014/main" id="{35278793-D72F-4536-B39F-3D933C89BE61}"/>
               </a:ext>
             </a:extLst>
           </p:cNvPr>
@@ -16340,7 +16397,7 @@
           <p:cNvPr id="5" name="">
             <a:extLst xmlns:a="http://schemas.openxmlformats.org/drawingml/2006/main">
               <a:ext uri="{FF2B5EF4-FFF2-40B4-BE49-F238E27FC236}">
-                <a16:creationId xmlns:a16="http://schemas.microsoft.com/office/drawing/2014/main" id="{C7938744-E39C-4D54-8361-B626701565D5}"/>
+                <a16:creationId xmlns:a16="http://schemas.microsoft.com/office/drawing/2014/main" id="{9ED23B19-BE9D-4F1C-9344-181BA2F868D3}"/>
               </a:ext>
             </a:extLst>
           </p:cNvPr>
@@ -16397,7 +16454,7 @@
           <p:cNvPr id="6" name="">
             <a:extLst xmlns:a="http://schemas.openxmlformats.org/drawingml/2006/main">
               <a:ext uri="{FF2B5EF4-FFF2-40B4-BE49-F238E27FC236}">
-                <a16:creationId xmlns:a16="http://schemas.microsoft.com/office/drawing/2014/main" id="{B87D56C7-8914-481B-92D4-427FE363313E}"/>
+                <a16:creationId xmlns:a16="http://schemas.microsoft.com/office/drawing/2014/main" id="{E4F632F7-7F4B-42B6-898B-4544AF933FA4}"/>
               </a:ext>
             </a:extLst>
           </p:cNvPr>
@@ -16454,7 +16511,7 @@
           <p:cNvPr id="7" name="">
             <a:extLst xmlns:a="http://schemas.openxmlformats.org/drawingml/2006/main">
               <a:ext uri="{FF2B5EF4-FFF2-40B4-BE49-F238E27FC236}">
-                <a16:creationId xmlns:a16="http://schemas.microsoft.com/office/drawing/2014/main" id="{F010472B-6CD9-472F-A714-81C94643A2DB}"/>
+                <a16:creationId xmlns:a16="http://schemas.microsoft.com/office/drawing/2014/main" id="{2FEFEEE8-D073-4092-ACC9-2A25546B9F6B}"/>
               </a:ext>
             </a:extLst>
           </p:cNvPr>
@@ -16511,7 +16568,7 @@
           <p:cNvPr id="8" name="">
             <a:extLst xmlns:a="http://schemas.openxmlformats.org/drawingml/2006/main">
               <a:ext uri="{FF2B5EF4-FFF2-40B4-BE49-F238E27FC236}">
-                <a16:creationId xmlns:a16="http://schemas.microsoft.com/office/drawing/2014/main" id="{B5446AA0-4229-4DDE-88B2-868290B95253}"/>
+                <a16:creationId xmlns:a16="http://schemas.microsoft.com/office/drawing/2014/main" id="{B8748A0C-FB9A-4A65-8698-A34AA53C2C53}"/>
               </a:ext>
             </a:extLst>
           </p:cNvPr>
@@ -16568,7 +16625,7 @@
           <p:cNvPr id="9" name="">
             <a:extLst xmlns:a="http://schemas.openxmlformats.org/drawingml/2006/main">
               <a:ext uri="{FF2B5EF4-FFF2-40B4-BE49-F238E27FC236}">
-                <a16:creationId xmlns:a16="http://schemas.microsoft.com/office/drawing/2014/main" id="{985E7C62-FFEE-43F5-B951-D450F76B2E81}"/>
+                <a16:creationId xmlns:a16="http://schemas.microsoft.com/office/drawing/2014/main" id="{96015875-9702-446E-84F6-2AFCE6D628A0}"/>
               </a:ext>
             </a:extLst>
           </p:cNvPr>
@@ -16625,7 +16682,7 @@
           <p:cNvPr id="10" name="">
             <a:extLst xmlns:a="http://schemas.openxmlformats.org/drawingml/2006/main">
               <a:ext uri="{FF2B5EF4-FFF2-40B4-BE49-F238E27FC236}">
-                <a16:creationId xmlns:a16="http://schemas.microsoft.com/office/drawing/2014/main" id="{633634C4-14EF-4BA4-9DA9-5B20AECDA191}"/>
+                <a16:creationId xmlns:a16="http://schemas.microsoft.com/office/drawing/2014/main" id="{FDEB6CBE-DECA-40A2-A852-CD3C6BCD3895}"/>
               </a:ext>
             </a:extLst>
           </p:cNvPr>
@@ -16682,7 +16739,7 @@
           <p:cNvPr id="11" name="">
             <a:extLst xmlns:a="http://schemas.openxmlformats.org/drawingml/2006/main">
               <a:ext uri="{FF2B5EF4-FFF2-40B4-BE49-F238E27FC236}">
-                <a16:creationId xmlns:a16="http://schemas.microsoft.com/office/drawing/2014/main" id="{B7AC6C77-A3A1-4A2D-AB52-72DE1AA4650B}"/>
+                <a16:creationId xmlns:a16="http://schemas.microsoft.com/office/drawing/2014/main" id="{48E2ACB3-1A47-45F3-99C9-E8E3649AB5F2}"/>
               </a:ext>
             </a:extLst>
           </p:cNvPr>
@@ -16739,7 +16796,7 @@
           <p:cNvPr id="12" name="">
             <a:extLst xmlns:a="http://schemas.openxmlformats.org/drawingml/2006/main">
               <a:ext uri="{FF2B5EF4-FFF2-40B4-BE49-F238E27FC236}">
-                <a16:creationId xmlns:a16="http://schemas.microsoft.com/office/drawing/2014/main" id="{70767E2B-C36E-4B4A-B125-CCD9B73D4142}"/>
+                <a16:creationId xmlns:a16="http://schemas.microsoft.com/office/drawing/2014/main" id="{B5459D4A-FE11-416C-9264-966D0E16DA09}"/>
               </a:ext>
             </a:extLst>
           </p:cNvPr>
@@ -16794,7 +16851,7 @@
     </p:spTree>
     <p:extLst>
       <p:ext uri="{BB962C8B-B14F-4D97-AF65-F5344CB8AC3E}">
-        <p14:creationId xmlns:p14="http://schemas.microsoft.com/office/powerpoint/2010/main" val="1199435076"/>
+        <p14:creationId xmlns:p14="http://schemas.microsoft.com/office/powerpoint/2010/main" val="1909700487"/>
       </p:ext>
     </p:extLst>
   </p:cSld>
@@ -16825,7 +16882,7 @@
           <p:cNvPr id="7" name="">
             <a:extLst xmlns:a="http://schemas.openxmlformats.org/drawingml/2006/main">
               <a:ext uri="{FF2B5EF4-FFF2-40B4-BE49-F238E27FC236}">
-                <a16:creationId xmlns:a16="http://schemas.microsoft.com/office/drawing/2014/main" id="{639826D3-23A7-4A4D-82AD-2244F3E8C763}"/>
+                <a16:creationId xmlns:a16="http://schemas.microsoft.com/office/drawing/2014/main" id="{03457C29-5741-4F1A-8C31-40347780D376}"/>
               </a:ext>
             </a:extLst>
           </p:cNvPr>
@@ -16882,7 +16939,7 @@
           <p:cNvPr id="2" name="">
             <a:extLst xmlns:a="http://schemas.openxmlformats.org/drawingml/2006/main">
               <a:ext uri="{FF2B5EF4-FFF2-40B4-BE49-F238E27FC236}">
-                <a16:creationId xmlns:a16="http://schemas.microsoft.com/office/drawing/2014/main" id="{FA09901D-CFD8-4F69-8982-EA9048840FEF}"/>
+                <a16:creationId xmlns:a16="http://schemas.microsoft.com/office/drawing/2014/main" id="{5276989B-2E97-4AA0-81D4-5ADA99B89238}"/>
               </a:ext>
             </a:extLst>
           </p:cNvPr>
@@ -16939,7 +16996,7 @@
           <p:cNvPr id="3" name="">
             <a:extLst xmlns:a="http://schemas.openxmlformats.org/drawingml/2006/main">
               <a:ext uri="{FF2B5EF4-FFF2-40B4-BE49-F238E27FC236}">
-                <a16:creationId xmlns:a16="http://schemas.microsoft.com/office/drawing/2014/main" id="{A94F3911-06BC-4741-AE87-5259ED0D813D}"/>
+                <a16:creationId xmlns:a16="http://schemas.microsoft.com/office/drawing/2014/main" id="{CB6254C0-9314-4DD1-AE4D-D18D164B60DF}"/>
               </a:ext>
             </a:extLst>
           </p:cNvPr>
@@ -17314,7 +17371,7 @@
           <p:cNvPr id="5" name="">
             <a:extLst xmlns:a="http://schemas.openxmlformats.org/drawingml/2006/main">
               <a:ext uri="{FF2B5EF4-FFF2-40B4-BE49-F238E27FC236}">
-                <a16:creationId xmlns:a16="http://schemas.microsoft.com/office/drawing/2014/main" id="{06A28B57-9FEF-4DD3-9812-3F153D7B290C}"/>
+                <a16:creationId xmlns:a16="http://schemas.microsoft.com/office/drawing/2014/main" id="{8E2D6608-E1D8-4426-9247-9A4B7316658C}"/>
               </a:ext>
             </a:extLst>
           </p:cNvPr>
@@ -17394,7 +17451,7 @@
           <p:cNvPr id="6" name="">
             <a:extLst xmlns:a="http://schemas.openxmlformats.org/drawingml/2006/main">
               <a:ext uri="{FF2B5EF4-FFF2-40B4-BE49-F238E27FC236}">
-                <a16:creationId xmlns:a16="http://schemas.microsoft.com/office/drawing/2014/main" id="{5D4E0E9C-400D-49A5-9916-43EF4D40D7E2}"/>
+                <a16:creationId xmlns:a16="http://schemas.microsoft.com/office/drawing/2014/main" id="{CC491EA7-12AD-471C-8A25-28E26AAD47FB}"/>
               </a:ext>
             </a:extLst>
           </p:cNvPr>
@@ -17472,7 +17529,7 @@
     </p:spTree>
     <p:extLst>
       <p:ext uri="{BB962C8B-B14F-4D97-AF65-F5344CB8AC3E}">
-        <p14:creationId xmlns:p14="http://schemas.microsoft.com/office/powerpoint/2010/main" val="1592329215"/>
+        <p14:creationId xmlns:p14="http://schemas.microsoft.com/office/powerpoint/2010/main" val="470054644"/>
       </p:ext>
     </p:extLst>
   </p:cSld>
@@ -17503,7 +17560,7 @@
           <p:cNvPr id="14" name="">
             <a:extLst xmlns:a="http://schemas.openxmlformats.org/drawingml/2006/main">
               <a:ext uri="{FF2B5EF4-FFF2-40B4-BE49-F238E27FC236}">
-                <a16:creationId xmlns:a16="http://schemas.microsoft.com/office/drawing/2014/main" id="{14CBF922-42EC-48E8-A1E5-E047B6424234}"/>
+                <a16:creationId xmlns:a16="http://schemas.microsoft.com/office/drawing/2014/main" id="{DB4BAF46-5865-4AE6-BF83-9C76CF67F45D}"/>
               </a:ext>
             </a:extLst>
           </p:cNvPr>
@@ -17560,7 +17617,7 @@
           <p:cNvPr id="2" name="">
             <a:extLst xmlns:a="http://schemas.openxmlformats.org/drawingml/2006/main">
               <a:ext uri="{FF2B5EF4-FFF2-40B4-BE49-F238E27FC236}">
-                <a16:creationId xmlns:a16="http://schemas.microsoft.com/office/drawing/2014/main" id="{D8836220-3B37-4F08-8D8B-838BBADAA721}"/>
+                <a16:creationId xmlns:a16="http://schemas.microsoft.com/office/drawing/2014/main" id="{321CE4A2-7B9C-4EDF-816C-096BD328D39E}"/>
               </a:ext>
             </a:extLst>
           </p:cNvPr>
@@ -17617,7 +17674,7 @@
           <p:cNvPr id="3" name="">
             <a:extLst xmlns:a="http://schemas.openxmlformats.org/drawingml/2006/main">
               <a:ext uri="{FF2B5EF4-FFF2-40B4-BE49-F238E27FC236}">
-                <a16:creationId xmlns:a16="http://schemas.microsoft.com/office/drawing/2014/main" id="{B6FCB86A-B240-4050-99F3-846E2BF5C4A6}"/>
+                <a16:creationId xmlns:a16="http://schemas.microsoft.com/office/drawing/2014/main" id="{0D3A81C1-3BC0-4C34-9DD0-9D3345DAE17A}"/>
               </a:ext>
             </a:extLst>
           </p:cNvPr>
@@ -17674,7 +17731,7 @@
           <p:cNvPr id="4" name="">
             <a:extLst xmlns:a="http://schemas.openxmlformats.org/drawingml/2006/main">
               <a:ext uri="{FF2B5EF4-FFF2-40B4-BE49-F238E27FC236}">
-                <a16:creationId xmlns:a16="http://schemas.microsoft.com/office/drawing/2014/main" id="{58C403C3-9499-4100-9E38-15E1FFC1575A}"/>
+                <a16:creationId xmlns:a16="http://schemas.microsoft.com/office/drawing/2014/main" id="{E8324AF3-26C3-43D5-A6C8-7ED97082699B}"/>
               </a:ext>
             </a:extLst>
           </p:cNvPr>
@@ -17731,7 +17788,7 @@
           <p:cNvPr id="5" name="">
             <a:extLst xmlns:a="http://schemas.openxmlformats.org/drawingml/2006/main">
               <a:ext uri="{FF2B5EF4-FFF2-40B4-BE49-F238E27FC236}">
-                <a16:creationId xmlns:a16="http://schemas.microsoft.com/office/drawing/2014/main" id="{1062CDC3-9BBB-4FC2-A3E6-E010C9DFE5C9}"/>
+                <a16:creationId xmlns:a16="http://schemas.microsoft.com/office/drawing/2014/main" id="{EE660DD4-F421-44E0-8FAD-85E57EAEB82E}"/>
               </a:ext>
             </a:extLst>
           </p:cNvPr>
@@ -17788,7 +17845,7 @@
           <p:cNvPr id="6" name="">
             <a:extLst xmlns:a="http://schemas.openxmlformats.org/drawingml/2006/main">
               <a:ext uri="{FF2B5EF4-FFF2-40B4-BE49-F238E27FC236}">
-                <a16:creationId xmlns:a16="http://schemas.microsoft.com/office/drawing/2014/main" id="{98B274EC-4BB3-42DD-AB18-EBD24C592202}"/>
+                <a16:creationId xmlns:a16="http://schemas.microsoft.com/office/drawing/2014/main" id="{85AC3E14-3923-43E0-8F6A-D64895819AA7}"/>
               </a:ext>
             </a:extLst>
           </p:cNvPr>
@@ -17868,7 +17925,7 @@
           <p:cNvPr id="7" name="">
             <a:extLst xmlns:a="http://schemas.openxmlformats.org/drawingml/2006/main">
               <a:ext uri="{FF2B5EF4-FFF2-40B4-BE49-F238E27FC236}">
-                <a16:creationId xmlns:a16="http://schemas.microsoft.com/office/drawing/2014/main" id="{465F1BD8-8F62-4B28-BB5A-F3C42C05E89B}"/>
+                <a16:creationId xmlns:a16="http://schemas.microsoft.com/office/drawing/2014/main" id="{5C0459A4-31F8-44FD-AABC-4CD9A51324B3}"/>
               </a:ext>
             </a:extLst>
           </p:cNvPr>
@@ -17925,7 +17982,7 @@
           <p:cNvPr id="8" name="">
             <a:extLst xmlns:a="http://schemas.openxmlformats.org/drawingml/2006/main">
               <a:ext uri="{FF2B5EF4-FFF2-40B4-BE49-F238E27FC236}">
-                <a16:creationId xmlns:a16="http://schemas.microsoft.com/office/drawing/2014/main" id="{2CA6A5E0-33E8-4A21-A308-06A21490004B}"/>
+                <a16:creationId xmlns:a16="http://schemas.microsoft.com/office/drawing/2014/main" id="{BE4F0D18-D69B-4AE5-8F8F-97A43EDEE088}"/>
               </a:ext>
             </a:extLst>
           </p:cNvPr>
@@ -17982,7 +18039,7 @@
           <p:cNvPr id="9" name="">
             <a:extLst xmlns:a="http://schemas.openxmlformats.org/drawingml/2006/main">
               <a:ext uri="{FF2B5EF4-FFF2-40B4-BE49-F238E27FC236}">
-                <a16:creationId xmlns:a16="http://schemas.microsoft.com/office/drawing/2014/main" id="{21421B83-8277-4C2A-9736-304527C834C6}"/>
+                <a16:creationId xmlns:a16="http://schemas.microsoft.com/office/drawing/2014/main" id="{CCE30D09-2B17-48C1-A745-42410B364015}"/>
               </a:ext>
             </a:extLst>
           </p:cNvPr>
@@ -18062,7 +18119,7 @@
           <p:cNvPr id="10" name="">
             <a:extLst xmlns:a="http://schemas.openxmlformats.org/drawingml/2006/main">
               <a:ext uri="{FF2B5EF4-FFF2-40B4-BE49-F238E27FC236}">
-                <a16:creationId xmlns:a16="http://schemas.microsoft.com/office/drawing/2014/main" id="{71C6AF39-97E8-4E7B-9B57-0AFF60BA1EA0}"/>
+                <a16:creationId xmlns:a16="http://schemas.microsoft.com/office/drawing/2014/main" id="{B6219601-3783-41D0-89B0-EEB115042E6B}"/>
               </a:ext>
             </a:extLst>
           </p:cNvPr>
@@ -18119,7 +18176,7 @@
           <p:cNvPr id="11" name="">
             <a:extLst xmlns:a="http://schemas.openxmlformats.org/drawingml/2006/main">
               <a:ext uri="{FF2B5EF4-FFF2-40B4-BE49-F238E27FC236}">
-                <a16:creationId xmlns:a16="http://schemas.microsoft.com/office/drawing/2014/main" id="{C49A2728-66E9-4AEE-8211-A4F0C0E29836}"/>
+                <a16:creationId xmlns:a16="http://schemas.microsoft.com/office/drawing/2014/main" id="{515EF0A9-4E60-4FAE-A6FB-29368AF659EB}"/>
               </a:ext>
             </a:extLst>
           </p:cNvPr>
@@ -18176,7 +18233,7 @@
           <p:cNvPr id="12" name="">
             <a:extLst xmlns:a="http://schemas.openxmlformats.org/drawingml/2006/main">
               <a:ext uri="{FF2B5EF4-FFF2-40B4-BE49-F238E27FC236}">
-                <a16:creationId xmlns:a16="http://schemas.microsoft.com/office/drawing/2014/main" id="{937B7776-C125-4673-8E8E-E2CF0C09E349}"/>
+                <a16:creationId xmlns:a16="http://schemas.microsoft.com/office/drawing/2014/main" id="{A218D6A6-0F43-4B5A-BFB8-A0FAF31A509B}"/>
               </a:ext>
             </a:extLst>
           </p:cNvPr>
@@ -18256,7 +18313,7 @@
           <p:cNvPr id="13" name="">
             <a:extLst xmlns:a="http://schemas.openxmlformats.org/drawingml/2006/main">
               <a:ext uri="{FF2B5EF4-FFF2-40B4-BE49-F238E27FC236}">
-                <a16:creationId xmlns:a16="http://schemas.microsoft.com/office/drawing/2014/main" id="{DBC3E99E-BA3E-409D-94B8-BC60F312B8E7}"/>
+                <a16:creationId xmlns:a16="http://schemas.microsoft.com/office/drawing/2014/main" id="{99696150-A368-4DF8-B671-D7F55CFADBAF}"/>
               </a:ext>
             </a:extLst>
           </p:cNvPr>
@@ -18334,7 +18391,7 @@
     </p:spTree>
     <p:extLst>
       <p:ext uri="{BB962C8B-B14F-4D97-AF65-F5344CB8AC3E}">
-        <p14:creationId xmlns:p14="http://schemas.microsoft.com/office/powerpoint/2010/main" val="1650053841"/>
+        <p14:creationId xmlns:p14="http://schemas.microsoft.com/office/powerpoint/2010/main" val="1377509077"/>
       </p:ext>
     </p:extLst>
   </p:cSld>
@@ -18365,7 +18422,7 @@
           <p:cNvPr id="8" name="">
             <a:extLst xmlns:a="http://schemas.openxmlformats.org/drawingml/2006/main">
               <a:ext uri="{FF2B5EF4-FFF2-40B4-BE49-F238E27FC236}">
-                <a16:creationId xmlns:a16="http://schemas.microsoft.com/office/drawing/2014/main" id="{8406342E-C36A-405E-A7BD-3D1456659AA4}"/>
+                <a16:creationId xmlns:a16="http://schemas.microsoft.com/office/drawing/2014/main" id="{DDCC36A6-A38A-4120-AFF7-F48541E6AD91}"/>
               </a:ext>
             </a:extLst>
           </p:cNvPr>
@@ -18422,7 +18479,7 @@
           <p:cNvPr id="2" name="">
             <a:extLst xmlns:a="http://schemas.openxmlformats.org/drawingml/2006/main">
               <a:ext uri="{FF2B5EF4-FFF2-40B4-BE49-F238E27FC236}">
-                <a16:creationId xmlns:a16="http://schemas.microsoft.com/office/drawing/2014/main" id="{49A3929B-C782-4E7F-BF43-10B08FC88678}"/>
+                <a16:creationId xmlns:a16="http://schemas.microsoft.com/office/drawing/2014/main" id="{CC9FE8A6-014C-4D34-9DA7-764BF8BBAE97}"/>
               </a:ext>
             </a:extLst>
           </p:cNvPr>
@@ -18479,7 +18536,7 @@
           <p:cNvPr id="3" name="">
             <a:extLst xmlns:a="http://schemas.openxmlformats.org/drawingml/2006/main">
               <a:ext uri="{FF2B5EF4-FFF2-40B4-BE49-F238E27FC236}">
-                <a16:creationId xmlns:a16="http://schemas.microsoft.com/office/drawing/2014/main" id="{EF1395CC-40C3-4951-8033-B628359B4F03}"/>
+                <a16:creationId xmlns:a16="http://schemas.microsoft.com/office/drawing/2014/main" id="{C9829C6C-99A9-449F-A4C0-12A5D4BB4DC2}"/>
               </a:ext>
             </a:extLst>
           </p:cNvPr>
@@ -18540,7 +18597,7 @@
           <p:nvPr/>
         </p:nvPicPr>
         <p:blipFill>
-          <a:blip xmlns:r="http://schemas.openxmlformats.org/officeDocument/2006/relationships" xmlns:a="http://schemas.openxmlformats.org/drawingml/2006/main" r:embed="R9760d1bf9d8442b2"/>
+          <a:blip xmlns:r="http://schemas.openxmlformats.org/officeDocument/2006/relationships" xmlns:a="http://schemas.openxmlformats.org/drawingml/2006/main" r:embed="R3b70dd7262fa4aba"/>
           <a:stretch xmlns:a="http://schemas.openxmlformats.org/drawingml/2006/main"/>
         </p:blipFill>
         <p:spPr>
@@ -18558,7 +18615,7 @@
           <p:cNvPr id="5" name="">
             <a:extLst xmlns:a="http://schemas.openxmlformats.org/drawingml/2006/main">
               <a:ext uri="{FF2B5EF4-FFF2-40B4-BE49-F238E27FC236}">
-                <a16:creationId xmlns:a16="http://schemas.microsoft.com/office/drawing/2014/main" id="{4121B817-3749-4F45-AE27-E0AC14297C4B}"/>
+                <a16:creationId xmlns:a16="http://schemas.microsoft.com/office/drawing/2014/main" id="{FCC426B9-4812-4C76-8AD3-4AE17E9868E2}"/>
               </a:ext>
             </a:extLst>
           </p:cNvPr>
@@ -18638,7 +18695,7 @@
           <p:cNvPr id="6" name="">
             <a:extLst xmlns:a="http://schemas.openxmlformats.org/drawingml/2006/main">
               <a:ext uri="{FF2B5EF4-FFF2-40B4-BE49-F238E27FC236}">
-                <a16:creationId xmlns:a16="http://schemas.microsoft.com/office/drawing/2014/main" id="{CA96E9E7-7701-4FFF-AFCF-31F4FE99D2FE}"/>
+                <a16:creationId xmlns:a16="http://schemas.microsoft.com/office/drawing/2014/main" id="{66DC0E67-A85F-4BB9-9E20-6C09B8C1A08C}"/>
               </a:ext>
             </a:extLst>
           </p:cNvPr>
@@ -18718,7 +18775,7 @@
           <p:cNvPr id="7" name="">
             <a:extLst xmlns:a="http://schemas.openxmlformats.org/drawingml/2006/main">
               <a:ext uri="{FF2B5EF4-FFF2-40B4-BE49-F238E27FC236}">
-                <a16:creationId xmlns:a16="http://schemas.microsoft.com/office/drawing/2014/main" id="{0E2C576D-8371-4E62-8379-D03CAABCCC24}"/>
+                <a16:creationId xmlns:a16="http://schemas.microsoft.com/office/drawing/2014/main" id="{DCEBE82B-5F47-48F1-9D24-351FA0D0F75A}"/>
               </a:ext>
             </a:extLst>
           </p:cNvPr>
@@ -18796,7 +18853,7 @@
     </p:spTree>
     <p:extLst>
       <p:ext uri="{BB962C8B-B14F-4D97-AF65-F5344CB8AC3E}">
-        <p14:creationId xmlns:p14="http://schemas.microsoft.com/office/powerpoint/2010/main" val="1604107358"/>
+        <p14:creationId xmlns:p14="http://schemas.microsoft.com/office/powerpoint/2010/main" val="921714416"/>
       </p:ext>
     </p:extLst>
   </p:cSld>
@@ -18827,7 +18884,7 @@
           <p:cNvPr id="9" name="">
             <a:extLst xmlns:a="http://schemas.openxmlformats.org/drawingml/2006/main">
               <a:ext uri="{FF2B5EF4-FFF2-40B4-BE49-F238E27FC236}">
-                <a16:creationId xmlns:a16="http://schemas.microsoft.com/office/drawing/2014/main" id="{042C8FB8-7133-4AD3-BAEC-85FE72D4EA78}"/>
+                <a16:creationId xmlns:a16="http://schemas.microsoft.com/office/drawing/2014/main" id="{79ADF6C9-8BC2-42B5-B18D-B18A15AA781D}"/>
               </a:ext>
             </a:extLst>
           </p:cNvPr>
@@ -18884,7 +18941,7 @@
           <p:cNvPr id="2" name="">
             <a:extLst xmlns:a="http://schemas.openxmlformats.org/drawingml/2006/main">
               <a:ext uri="{FF2B5EF4-FFF2-40B4-BE49-F238E27FC236}">
-                <a16:creationId xmlns:a16="http://schemas.microsoft.com/office/drawing/2014/main" id="{6CB9D363-AC65-4FEC-B55F-DE28B13F4350}"/>
+                <a16:creationId xmlns:a16="http://schemas.microsoft.com/office/drawing/2014/main" id="{3D67FD39-288E-4D96-B648-513A4D1F8DC5}"/>
               </a:ext>
             </a:extLst>
           </p:cNvPr>
@@ -18941,7 +18998,7 @@
           <p:cNvPr id="3" name="">
             <a:extLst xmlns:a="http://schemas.openxmlformats.org/drawingml/2006/main">
               <a:ext uri="{FF2B5EF4-FFF2-40B4-BE49-F238E27FC236}">
-                <a16:creationId xmlns:a16="http://schemas.microsoft.com/office/drawing/2014/main" id="{E46B5C33-0572-4C58-A714-C6F40CD5873F}"/>
+                <a16:creationId xmlns:a16="http://schemas.microsoft.com/office/drawing/2014/main" id="{FC677D80-8DB2-466F-B71C-DCD88404C0D7}"/>
               </a:ext>
             </a:extLst>
           </p:cNvPr>
@@ -18998,7 +19055,7 @@
           <p:cNvPr id="4" name="">
             <a:extLst xmlns:a="http://schemas.openxmlformats.org/drawingml/2006/main">
               <a:ext uri="{FF2B5EF4-FFF2-40B4-BE49-F238E27FC236}">
-                <a16:creationId xmlns:a16="http://schemas.microsoft.com/office/drawing/2014/main" id="{FF8C1CFA-46BA-4265-BDE4-B3281D21976F}"/>
+                <a16:creationId xmlns:a16="http://schemas.microsoft.com/office/drawing/2014/main" id="{5CBF0CDE-54B6-4B9D-8F32-6C8F157766B8}"/>
               </a:ext>
             </a:extLst>
           </p:cNvPr>
@@ -19062,7 +19119,7 @@
         </p:xfrm>
         <a:graphic xmlns:a="http://schemas.openxmlformats.org/drawingml/2006/main">
           <a:graphicData uri="http://schemas.openxmlformats.org/drawingml/2006/chart">
-            <c:chart xmlns:r="http://schemas.openxmlformats.org/officeDocument/2006/relationships" xmlns:c="http://schemas.openxmlformats.org/drawingml/2006/chart" r:id="R4191729207474cd2"/>
+            <c:chart xmlns:r="http://schemas.openxmlformats.org/officeDocument/2006/relationships" xmlns:c="http://schemas.openxmlformats.org/drawingml/2006/chart" r:id="R350faa30c2924a4b"/>
           </a:graphicData>
         </a:graphic>
       </p:graphicFrame>
@@ -19071,7 +19128,7 @@
           <p:cNvPr id="6" name="">
             <a:extLst xmlns:a="http://schemas.openxmlformats.org/drawingml/2006/main">
               <a:ext uri="{FF2B5EF4-FFF2-40B4-BE49-F238E27FC236}">
-                <a16:creationId xmlns:a16="http://schemas.microsoft.com/office/drawing/2014/main" id="{CAF5033B-B8A2-4046-8601-F5105AA9BBBC}"/>
+                <a16:creationId xmlns:a16="http://schemas.microsoft.com/office/drawing/2014/main" id="{1B68522D-D4C5-478B-A5D6-C2DB48CEC804}"/>
               </a:ext>
             </a:extLst>
           </p:cNvPr>
@@ -20760,7 +20817,7 @@
           <p:cNvPr id="8" name="">
             <a:extLst xmlns:a="http://schemas.openxmlformats.org/drawingml/2006/main">
               <a:ext uri="{FF2B5EF4-FFF2-40B4-BE49-F238E27FC236}">
-                <a16:creationId xmlns:a16="http://schemas.microsoft.com/office/drawing/2014/main" id="{EC62B12B-B2BA-4544-AC62-6BCE8D6004B9}"/>
+                <a16:creationId xmlns:a16="http://schemas.microsoft.com/office/drawing/2014/main" id="{CB4234CA-A5A5-41F9-ABA6-14121840AB73}"/>
               </a:ext>
             </a:extLst>
           </p:cNvPr>
@@ -20838,7 +20895,7 @@
     </p:spTree>
     <p:extLst>
       <p:ext uri="{BB962C8B-B14F-4D97-AF65-F5344CB8AC3E}">
-        <p14:creationId xmlns:p14="http://schemas.microsoft.com/office/powerpoint/2010/main" val="1290406625"/>
+        <p14:creationId xmlns:p14="http://schemas.microsoft.com/office/powerpoint/2010/main" val="138455769"/>
       </p:ext>
     </p:extLst>
   </p:cSld>
@@ -20869,7 +20926,7 @@
           <p:cNvPr id="7" name="">
             <a:extLst xmlns:a="http://schemas.openxmlformats.org/drawingml/2006/main">
               <a:ext uri="{FF2B5EF4-FFF2-40B4-BE49-F238E27FC236}">
-                <a16:creationId xmlns:a16="http://schemas.microsoft.com/office/drawing/2014/main" id="{90C4A97E-E276-4DA7-8976-4E4C476E790F}"/>
+                <a16:creationId xmlns:a16="http://schemas.microsoft.com/office/drawing/2014/main" id="{64C1B4E6-45BA-4290-97E8-2468B3EB89C1}"/>
               </a:ext>
             </a:extLst>
           </p:cNvPr>
@@ -20926,7 +20983,7 @@
           <p:cNvPr id="2" name="">
             <a:extLst xmlns:a="http://schemas.openxmlformats.org/drawingml/2006/main">
               <a:ext uri="{FF2B5EF4-FFF2-40B4-BE49-F238E27FC236}">
-                <a16:creationId xmlns:a16="http://schemas.microsoft.com/office/drawing/2014/main" id="{97ABA1BB-7D5D-4873-8FBB-90D4654E68B5}"/>
+                <a16:creationId xmlns:a16="http://schemas.microsoft.com/office/drawing/2014/main" id="{ADB47063-6AE5-40B8-992D-2160A5F89C30}"/>
               </a:ext>
             </a:extLst>
           </p:cNvPr>
@@ -20983,7 +21040,7 @@
           <p:cNvPr id="3" name="">
             <a:extLst xmlns:a="http://schemas.openxmlformats.org/drawingml/2006/main">
               <a:ext uri="{FF2B5EF4-FFF2-40B4-BE49-F238E27FC236}">
-                <a16:creationId xmlns:a16="http://schemas.microsoft.com/office/drawing/2014/main" id="{2AEC542A-D575-4292-819C-8EF0F3D89478}"/>
+                <a16:creationId xmlns:a16="http://schemas.microsoft.com/office/drawing/2014/main" id="{C9F952B9-4CF1-439C-A037-E686ED4743B5}"/>
               </a:ext>
             </a:extLst>
           </p:cNvPr>
@@ -21433,7 +21490,7 @@
           <p:cNvPr id="5" name="">
             <a:extLst xmlns:a="http://schemas.openxmlformats.org/drawingml/2006/main">
               <a:ext uri="{FF2B5EF4-FFF2-40B4-BE49-F238E27FC236}">
-                <a16:creationId xmlns:a16="http://schemas.microsoft.com/office/drawing/2014/main" id="{55089365-0F61-4834-977F-E7A3A6B27AB2}"/>
+                <a16:creationId xmlns:a16="http://schemas.microsoft.com/office/drawing/2014/main" id="{6EDDDD2A-56F1-455A-A80E-83439E9663DB}"/>
               </a:ext>
             </a:extLst>
           </p:cNvPr>
@@ -21513,7 +21570,7 @@
           <p:cNvPr id="6" name="">
             <a:extLst xmlns:a="http://schemas.openxmlformats.org/drawingml/2006/main">
               <a:ext uri="{FF2B5EF4-FFF2-40B4-BE49-F238E27FC236}">
-                <a16:creationId xmlns:a16="http://schemas.microsoft.com/office/drawing/2014/main" id="{0275B108-EA5B-48A9-9D55-8D3D8BF14E0A}"/>
+                <a16:creationId xmlns:a16="http://schemas.microsoft.com/office/drawing/2014/main" id="{2BF9E1F1-EA93-4210-95F3-CAC1113AD20E}"/>
               </a:ext>
             </a:extLst>
           </p:cNvPr>
@@ -21591,7 +21648,7 @@
     </p:spTree>
     <p:extLst>
       <p:ext uri="{BB962C8B-B14F-4D97-AF65-F5344CB8AC3E}">
-        <p14:creationId xmlns:p14="http://schemas.microsoft.com/office/powerpoint/2010/main" val="1963953868"/>
+        <p14:creationId xmlns:p14="http://schemas.microsoft.com/office/powerpoint/2010/main" val="1504679885"/>
       </p:ext>
     </p:extLst>
   </p:cSld>
@@ -21622,7 +21679,7 @@
           <p:cNvPr id="5" name="">
             <a:extLst xmlns:a="http://schemas.openxmlformats.org/drawingml/2006/main">
               <a:ext uri="{FF2B5EF4-FFF2-40B4-BE49-F238E27FC236}">
-                <a16:creationId xmlns:a16="http://schemas.microsoft.com/office/drawing/2014/main" id="{47F96064-9343-40AC-853F-58005B40A290}"/>
+                <a16:creationId xmlns:a16="http://schemas.microsoft.com/office/drawing/2014/main" id="{4AC8CC3C-918C-4F64-BAD9-1E8AFE73934A}"/>
               </a:ext>
             </a:extLst>
           </p:cNvPr>
@@ -21679,7 +21736,7 @@
           <p:cNvPr id="2" name="">
             <a:extLst xmlns:a="http://schemas.openxmlformats.org/drawingml/2006/main">
               <a:ext uri="{FF2B5EF4-FFF2-40B4-BE49-F238E27FC236}">
-                <a16:creationId xmlns:a16="http://schemas.microsoft.com/office/drawing/2014/main" id="{BE5FFED3-F52A-42AA-A9D7-860F962A8AD5}"/>
+                <a16:creationId xmlns:a16="http://schemas.microsoft.com/office/drawing/2014/main" id="{F2AABECA-830B-43C1-B416-E456378772F4}"/>
               </a:ext>
             </a:extLst>
           </p:cNvPr>
@@ -21736,7 +21793,7 @@
           <p:cNvPr id="3" name="">
             <a:extLst xmlns:a="http://schemas.openxmlformats.org/drawingml/2006/main">
               <a:ext uri="{FF2B5EF4-FFF2-40B4-BE49-F238E27FC236}">
-                <a16:creationId xmlns:a16="http://schemas.microsoft.com/office/drawing/2014/main" id="{FE1B6490-5203-4D4B-9641-D8E27978662C}"/>
+                <a16:creationId xmlns:a16="http://schemas.microsoft.com/office/drawing/2014/main" id="{FF5A472F-99F2-42F3-8942-6A5CA65B13B4}"/>
               </a:ext>
             </a:extLst>
           </p:cNvPr>
@@ -22406,7 +22463,7 @@
     </p:spTree>
     <p:extLst>
       <p:ext uri="{BB962C8B-B14F-4D97-AF65-F5344CB8AC3E}">
-        <p14:creationId xmlns:p14="http://schemas.microsoft.com/office/powerpoint/2010/main" val="806228499"/>
+        <p14:creationId xmlns:p14="http://schemas.microsoft.com/office/powerpoint/2010/main" val="441630359"/>
       </p:ext>
     </p:extLst>
   </p:cSld>
@@ -22437,7 +22494,7 @@
           <p:cNvPr id="7" name="">
             <a:extLst xmlns:a="http://schemas.openxmlformats.org/drawingml/2006/main">
               <a:ext uri="{FF2B5EF4-FFF2-40B4-BE49-F238E27FC236}">
-                <a16:creationId xmlns:a16="http://schemas.microsoft.com/office/drawing/2014/main" id="{9D7430EE-DF31-40AC-ABC8-B0E5FB5D24A6}"/>
+                <a16:creationId xmlns:a16="http://schemas.microsoft.com/office/drawing/2014/main" id="{A6501506-7A6A-459C-BCE0-1E482FBE2AA5}"/>
               </a:ext>
             </a:extLst>
           </p:cNvPr>
@@ -22494,7 +22551,7 @@
           <p:cNvPr id="2" name="">
             <a:extLst xmlns:a="http://schemas.openxmlformats.org/drawingml/2006/main">
               <a:ext uri="{FF2B5EF4-FFF2-40B4-BE49-F238E27FC236}">
-                <a16:creationId xmlns:a16="http://schemas.microsoft.com/office/drawing/2014/main" id="{83668297-91C0-466F-9FAC-CB75F7704339}"/>
+                <a16:creationId xmlns:a16="http://schemas.microsoft.com/office/drawing/2014/main" id="{3D6F7093-EC83-4011-8AF7-B41EFAFC48EE}"/>
               </a:ext>
             </a:extLst>
           </p:cNvPr>
@@ -22551,7 +22608,7 @@
           <p:cNvPr id="3" name="">
             <a:extLst xmlns:a="http://schemas.openxmlformats.org/drawingml/2006/main">
               <a:ext uri="{FF2B5EF4-FFF2-40B4-BE49-F238E27FC236}">
-                <a16:creationId xmlns:a16="http://schemas.microsoft.com/office/drawing/2014/main" id="{7DF72130-AE74-448A-875E-4B55C80AF827}"/>
+                <a16:creationId xmlns:a16="http://schemas.microsoft.com/office/drawing/2014/main" id="{085AA4D9-3CFA-4A6B-8ED1-55A2E2D89E58}"/>
               </a:ext>
             </a:extLst>
           </p:cNvPr>
@@ -23121,7 +23178,7 @@
           <p:cNvPr id="5" name="">
             <a:extLst xmlns:a="http://schemas.openxmlformats.org/drawingml/2006/main">
               <a:ext uri="{FF2B5EF4-FFF2-40B4-BE49-F238E27FC236}">
-                <a16:creationId xmlns:a16="http://schemas.microsoft.com/office/drawing/2014/main" id="{3837AE45-33DE-4D90-84D0-B87C575FEDD5}"/>
+                <a16:creationId xmlns:a16="http://schemas.microsoft.com/office/drawing/2014/main" id="{8EEBC46A-6B4A-4820-9D35-E5B95311C7BD}"/>
               </a:ext>
             </a:extLst>
           </p:cNvPr>
@@ -23201,7 +23258,7 @@
           <p:cNvPr id="6" name="">
             <a:extLst xmlns:a="http://schemas.openxmlformats.org/drawingml/2006/main">
               <a:ext uri="{FF2B5EF4-FFF2-40B4-BE49-F238E27FC236}">
-                <a16:creationId xmlns:a16="http://schemas.microsoft.com/office/drawing/2014/main" id="{AD5720B3-C2CE-4A65-BD2C-7F77063655BE}"/>
+                <a16:creationId xmlns:a16="http://schemas.microsoft.com/office/drawing/2014/main" id="{7BBEF541-FFCE-49D2-A518-DE06BE7E5FB4}"/>
               </a:ext>
             </a:extLst>
           </p:cNvPr>
@@ -23256,7 +23313,7 @@
     </p:spTree>
     <p:extLst>
       <p:ext uri="{BB962C8B-B14F-4D97-AF65-F5344CB8AC3E}">
-        <p14:creationId xmlns:p14="http://schemas.microsoft.com/office/powerpoint/2010/main" val="930968548"/>
+        <p14:creationId xmlns:p14="http://schemas.microsoft.com/office/powerpoint/2010/main" val="1048649978"/>
       </p:ext>
     </p:extLst>
   </p:cSld>
@@ -23287,7 +23344,7 @@
           <p:cNvPr id="6" name="">
             <a:extLst xmlns:a="http://schemas.openxmlformats.org/drawingml/2006/main">
               <a:ext uri="{FF2B5EF4-FFF2-40B4-BE49-F238E27FC236}">
-                <a16:creationId xmlns:a16="http://schemas.microsoft.com/office/drawing/2014/main" id="{C320A42B-AC34-4FDA-A746-7CB2A205C2D3}"/>
+                <a16:creationId xmlns:a16="http://schemas.microsoft.com/office/drawing/2014/main" id="{505A4047-EDDA-4DC6-953F-A2973016C9CD}"/>
               </a:ext>
             </a:extLst>
           </p:cNvPr>
@@ -23344,7 +23401,7 @@
           <p:cNvPr id="2" name="">
             <a:extLst xmlns:a="http://schemas.openxmlformats.org/drawingml/2006/main">
               <a:ext uri="{FF2B5EF4-FFF2-40B4-BE49-F238E27FC236}">
-                <a16:creationId xmlns:a16="http://schemas.microsoft.com/office/drawing/2014/main" id="{F0A32E9B-C690-470B-B86A-64F8C2EEB1A0}"/>
+                <a16:creationId xmlns:a16="http://schemas.microsoft.com/office/drawing/2014/main" id="{8E28351C-7A15-4734-99FC-7B11BFE7B77F}"/>
               </a:ext>
             </a:extLst>
           </p:cNvPr>
@@ -23401,7 +23458,7 @@
           <p:cNvPr id="3" name="">
             <a:extLst xmlns:a="http://schemas.openxmlformats.org/drawingml/2006/main">
               <a:ext uri="{FF2B5EF4-FFF2-40B4-BE49-F238E27FC236}">
-                <a16:creationId xmlns:a16="http://schemas.microsoft.com/office/drawing/2014/main" id="{F54A5A02-C261-4CCA-BF46-50E479E419FE}"/>
+                <a16:creationId xmlns:a16="http://schemas.microsoft.com/office/drawing/2014/main" id="{9013558F-E292-41C2-A77A-D2CFF3DBCD16}"/>
               </a:ext>
             </a:extLst>
           </p:cNvPr>
@@ -24337,7 +24394,7 @@
           <p:cNvPr id="5" name="">
             <a:extLst xmlns:a="http://schemas.openxmlformats.org/drawingml/2006/main">
               <a:ext uri="{FF2B5EF4-FFF2-40B4-BE49-F238E27FC236}">
-                <a16:creationId xmlns:a16="http://schemas.microsoft.com/office/drawing/2014/main" id="{8B0DD39E-B05F-44EE-98C7-8BF1574145BE}"/>
+                <a16:creationId xmlns:a16="http://schemas.microsoft.com/office/drawing/2014/main" id="{B25E55E4-E36D-4EB8-B43E-FE9B6230D7E8}"/>
               </a:ext>
             </a:extLst>
           </p:cNvPr>
@@ -24415,7 +24472,7 @@
     </p:spTree>
     <p:extLst>
       <p:ext uri="{BB962C8B-B14F-4D97-AF65-F5344CB8AC3E}">
-        <p14:creationId xmlns:p14="http://schemas.microsoft.com/office/powerpoint/2010/main" val="1115216777"/>
+        <p14:creationId xmlns:p14="http://schemas.microsoft.com/office/powerpoint/2010/main" val="1325967831"/>
       </p:ext>
     </p:extLst>
   </p:cSld>
